--- a/Documents/v2_docs/vaxtrack - presentations/VaxTrack-v2.0.0-Platform-Overview.pptx
+++ b/Documents/v2_docs/vaxtrack - presentations/VaxTrack-v2.0.0-Platform-Overview.pptx
@@ -19,9 +19,12 @@
     <p:sldId id="267" r:id="rId13"/>
     <p:sldId id="268" r:id="rId14"/>
     <p:sldId id="269" r:id="rId15"/>
+    <p:sldId id="270" r:id="rId16"/>
+    <p:sldId id="271" r:id="rId17"/>
+    <p:sldId id="272" r:id="rId18"/>
   </p:sldIdLst>
   <p:notesMasterIdLst>
-    <p:notesMasterId r:id="rId16"/>
+    <p:notesMasterId r:id="rId19"/>
   </p:notesMasterIdLst>
   <p:sldSz cx="12191695" cy="6858000"/>
   <p:notesSz cx="6858000" cy="12191695"/>
@@ -979,6 +982,270 @@
             <a:fld id="{F7021451-1387-4CA6-816F-3879F97B5CBC}" type="slidenum">
               <a:rPr lang="en-US"/>
               <a:t>14</a:t>
+            </a:fld>
+            <a:endParaRPr lang="en-US"/>
+          </a:p>
+        </p:txBody>
+      </p:sp>
+    </p:spTree>
+    <p:extLst>
+      <p:ext uri="{BB962C8B-B14F-4D97-AF65-F5344CB8AC3E}">
+        <p14:creationId xmlns:p14="http://schemas.microsoft.com/office/powerpoint/2010/main" val="1024086991"/>
+      </p:ext>
+    </p:extLst>
+  </p:cSld>
+  <p:clrMapOvr>
+    <a:masterClrMapping/>
+  </p:clrMapOvr>
+</p:notes>
+</file>
+
+<file path=ppt/notesSlides/notesSlide15.xml><?xml version="1.0" encoding="utf-8"?>
+<p:notes xmlns:a="http://schemas.openxmlformats.org/drawingml/2006/main" xmlns:r="http://schemas.openxmlformats.org/officeDocument/2006/relationships" xmlns:p="http://schemas.openxmlformats.org/presentationml/2006/main">
+  <p:cSld>
+    <p:spTree>
+      <p:nvGrpSpPr>
+        <p:cNvPr id="1" name=""/>
+        <p:cNvGrpSpPr/>
+        <p:nvPr/>
+      </p:nvGrpSpPr>
+      <p:grpSpPr>
+        <a:xfrm>
+          <a:off x="0" y="0"/>
+          <a:ext cx="0" cy="0"/>
+          <a:chOff x="0" y="0"/>
+          <a:chExt cx="0" cy="0"/>
+        </a:xfrm>
+      </p:grpSpPr>
+      <p:sp>
+        <p:nvSpPr>
+          <p:cNvPr id="2" name="Slide Image Placeholder 1"/>
+          <p:cNvSpPr>
+            <a:spLocks noGrp="1" noRot="1" noChangeAspect="1"/>
+          </p:cNvSpPr>
+          <p:nvPr>
+            <p:ph type="sldImg"/>
+          </p:nvPr>
+        </p:nvSpPr>
+        <p:spPr/>
+      </p:sp>
+      <p:sp>
+        <p:nvSpPr>
+          <p:cNvPr id="3" name="Notes Placeholder 2"/>
+          <p:cNvSpPr>
+            <a:spLocks noGrp="1"/>
+          </p:cNvSpPr>
+          <p:nvPr>
+            <p:ph type="body" idx="1"/>
+          </p:nvPr>
+        </p:nvSpPr>
+        <p:spPr/>
+        <p:txBody>
+          <a:bodyPr/>
+          <a:lstStyle/>
+          <a:p>
+            <a:r>
+              <a:rPr lang="en-US" dirty="0"/>
+              <a:t/>
+            </a:r>
+            <a:endParaRPr lang="en-US" dirty="0"/>
+          </a:p>
+        </p:txBody>
+      </p:sp>
+      <p:sp>
+        <p:nvSpPr>
+          <p:cNvPr id="4" name="Slide Number Placeholder 3"/>
+          <p:cNvSpPr>
+            <a:spLocks noGrp="1"/>
+          </p:cNvSpPr>
+          <p:nvPr>
+            <p:ph type="sldNum" sz="quarter" idx="10"/>
+          </p:nvPr>
+        </p:nvSpPr>
+        <p:spPr/>
+        <p:txBody>
+          <a:bodyPr/>
+          <a:lstStyle/>
+          <a:p>
+            <a:fld id="{F7021451-1387-4CA6-816F-3879F97B5CBC}" type="slidenum">
+              <a:rPr lang="en-US"/>
+              <a:t>15</a:t>
+            </a:fld>
+            <a:endParaRPr lang="en-US"/>
+          </a:p>
+        </p:txBody>
+      </p:sp>
+    </p:spTree>
+    <p:extLst>
+      <p:ext uri="{BB962C8B-B14F-4D97-AF65-F5344CB8AC3E}">
+        <p14:creationId xmlns:p14="http://schemas.microsoft.com/office/powerpoint/2010/main" val="1024086991"/>
+      </p:ext>
+    </p:extLst>
+  </p:cSld>
+  <p:clrMapOvr>
+    <a:masterClrMapping/>
+  </p:clrMapOvr>
+</p:notes>
+</file>
+
+<file path=ppt/notesSlides/notesSlide16.xml><?xml version="1.0" encoding="utf-8"?>
+<p:notes xmlns:a="http://schemas.openxmlformats.org/drawingml/2006/main" xmlns:r="http://schemas.openxmlformats.org/officeDocument/2006/relationships" xmlns:p="http://schemas.openxmlformats.org/presentationml/2006/main">
+  <p:cSld>
+    <p:spTree>
+      <p:nvGrpSpPr>
+        <p:cNvPr id="1" name=""/>
+        <p:cNvGrpSpPr/>
+        <p:nvPr/>
+      </p:nvGrpSpPr>
+      <p:grpSpPr>
+        <a:xfrm>
+          <a:off x="0" y="0"/>
+          <a:ext cx="0" cy="0"/>
+          <a:chOff x="0" y="0"/>
+          <a:chExt cx="0" cy="0"/>
+        </a:xfrm>
+      </p:grpSpPr>
+      <p:sp>
+        <p:nvSpPr>
+          <p:cNvPr id="2" name="Slide Image Placeholder 1"/>
+          <p:cNvSpPr>
+            <a:spLocks noGrp="1" noRot="1" noChangeAspect="1"/>
+          </p:cNvSpPr>
+          <p:nvPr>
+            <p:ph type="sldImg"/>
+          </p:nvPr>
+        </p:nvSpPr>
+        <p:spPr/>
+      </p:sp>
+      <p:sp>
+        <p:nvSpPr>
+          <p:cNvPr id="3" name="Notes Placeholder 2"/>
+          <p:cNvSpPr>
+            <a:spLocks noGrp="1"/>
+          </p:cNvSpPr>
+          <p:nvPr>
+            <p:ph type="body" idx="1"/>
+          </p:nvPr>
+        </p:nvSpPr>
+        <p:spPr/>
+        <p:txBody>
+          <a:bodyPr/>
+          <a:lstStyle/>
+          <a:p>
+            <a:r>
+              <a:rPr lang="en-US" dirty="0"/>
+              <a:t/>
+            </a:r>
+            <a:endParaRPr lang="en-US" dirty="0"/>
+          </a:p>
+        </p:txBody>
+      </p:sp>
+      <p:sp>
+        <p:nvSpPr>
+          <p:cNvPr id="4" name="Slide Number Placeholder 3"/>
+          <p:cNvSpPr>
+            <a:spLocks noGrp="1"/>
+          </p:cNvSpPr>
+          <p:nvPr>
+            <p:ph type="sldNum" sz="quarter" idx="10"/>
+          </p:nvPr>
+        </p:nvSpPr>
+        <p:spPr/>
+        <p:txBody>
+          <a:bodyPr/>
+          <a:lstStyle/>
+          <a:p>
+            <a:fld id="{F7021451-1387-4CA6-816F-3879F97B5CBC}" type="slidenum">
+              <a:rPr lang="en-US"/>
+              <a:t>16</a:t>
+            </a:fld>
+            <a:endParaRPr lang="en-US"/>
+          </a:p>
+        </p:txBody>
+      </p:sp>
+    </p:spTree>
+    <p:extLst>
+      <p:ext uri="{BB962C8B-B14F-4D97-AF65-F5344CB8AC3E}">
+        <p14:creationId xmlns:p14="http://schemas.microsoft.com/office/powerpoint/2010/main" val="1024086991"/>
+      </p:ext>
+    </p:extLst>
+  </p:cSld>
+  <p:clrMapOvr>
+    <a:masterClrMapping/>
+  </p:clrMapOvr>
+</p:notes>
+</file>
+
+<file path=ppt/notesSlides/notesSlide17.xml><?xml version="1.0" encoding="utf-8"?>
+<p:notes xmlns:a="http://schemas.openxmlformats.org/drawingml/2006/main" xmlns:r="http://schemas.openxmlformats.org/officeDocument/2006/relationships" xmlns:p="http://schemas.openxmlformats.org/presentationml/2006/main">
+  <p:cSld>
+    <p:spTree>
+      <p:nvGrpSpPr>
+        <p:cNvPr id="1" name=""/>
+        <p:cNvGrpSpPr/>
+        <p:nvPr/>
+      </p:nvGrpSpPr>
+      <p:grpSpPr>
+        <a:xfrm>
+          <a:off x="0" y="0"/>
+          <a:ext cx="0" cy="0"/>
+          <a:chOff x="0" y="0"/>
+          <a:chExt cx="0" cy="0"/>
+        </a:xfrm>
+      </p:grpSpPr>
+      <p:sp>
+        <p:nvSpPr>
+          <p:cNvPr id="2" name="Slide Image Placeholder 1"/>
+          <p:cNvSpPr>
+            <a:spLocks noGrp="1" noRot="1" noChangeAspect="1"/>
+          </p:cNvSpPr>
+          <p:nvPr>
+            <p:ph type="sldImg"/>
+          </p:nvPr>
+        </p:nvSpPr>
+        <p:spPr/>
+      </p:sp>
+      <p:sp>
+        <p:nvSpPr>
+          <p:cNvPr id="3" name="Notes Placeholder 2"/>
+          <p:cNvSpPr>
+            <a:spLocks noGrp="1"/>
+          </p:cNvSpPr>
+          <p:nvPr>
+            <p:ph type="body" idx="1"/>
+          </p:nvPr>
+        </p:nvSpPr>
+        <p:spPr/>
+        <p:txBody>
+          <a:bodyPr/>
+          <a:lstStyle/>
+          <a:p>
+            <a:r>
+              <a:rPr lang="en-US" dirty="0"/>
+              <a:t/>
+            </a:r>
+            <a:endParaRPr lang="en-US" dirty="0"/>
+          </a:p>
+        </p:txBody>
+      </p:sp>
+      <p:sp>
+        <p:nvSpPr>
+          <p:cNvPr id="4" name="Slide Number Placeholder 3"/>
+          <p:cNvSpPr>
+            <a:spLocks noGrp="1"/>
+          </p:cNvSpPr>
+          <p:nvPr>
+            <p:ph type="sldNum" sz="quarter" idx="10"/>
+          </p:nvPr>
+        </p:nvSpPr>
+        <p:spPr/>
+        <p:txBody>
+          <a:bodyPr/>
+          <a:lstStyle/>
+          <a:p>
+            <a:fld id="{F7021451-1387-4CA6-816F-3879F97B5CBC}" type="slidenum">
+              <a:rPr lang="en-US"/>
+              <a:t>17</a:t>
             </a:fld>
             <a:endParaRPr lang="en-US"/>
           </a:p>
@@ -2446,7 +2713,7 @@
                 <a:ea typeface="Calibri" pitchFamily="34" charset="-122"/>
                 <a:cs typeface="Calibri" pitchFamily="34" charset="-120"/>
               </a:rPr>
-              <a:t>Vivek Kumar  |  Associate Consultant, Infosys  —  Developer, British Petroleum</a:t>
+              <a:t>Vivek Kumar  |  Senior Associate Consultant, Infosys  —  Developer, British Petroleum</a:t>
             </a:r>
             <a:endParaRPr lang="en-US" sz="1100" dirty="0"/>
           </a:p>
@@ -2466,7 +2733,7 @@
     <p:bg>
       <p:bgPr>
         <a:solidFill>
-          <a:srgbClr val="0F2438"/>
+          <a:srgbClr val="F7F9FB"/>
         </a:solidFill>
       </p:bgPr>
     </p:bg>
@@ -2492,8 +2759,8 @@
         </p:nvSpPr>
         <p:spPr>
           <a:xfrm>
-            <a:off x="640080" y="411480"/>
-            <a:ext cx="9144000" cy="548640"/>
+            <a:off x="640080" y="384048"/>
+            <a:ext cx="10881360" cy="502920"/>
           </a:xfrm>
           <a:prstGeom prst="rect">
             <a:avLst/>
@@ -2509,17 +2776,17 @@
               <a:buNone/>
             </a:pPr>
             <a:r>
-              <a:rPr lang="en-US" sz="2800" b="1" dirty="0">
-                <a:solidFill>
-                  <a:srgbClr val="FFFFFF"/>
+              <a:rPr lang="en-US" sz="2200" b="1" dirty="0">
+                <a:solidFill>
+                  <a:srgbClr val="0F2438"/>
                 </a:solidFill>
                 <a:latin typeface="Cambria" pitchFamily="34" charset="0"/>
                 <a:ea typeface="Cambria" pitchFamily="34" charset="-122"/>
                 <a:cs typeface="Cambria" pitchFamily="34" charset="-120"/>
               </a:rPr>
-              <a:t>TECHNOLOGY SNAPSHOT</a:t>
-            </a:r>
-            <a:endParaRPr lang="en-US" sz="2800" dirty="0"/>
+              <a:t>PLATFORM IN ACTION — HOSPITAL &amp; PLATFORM OVERSIGHT</a:t>
+            </a:r>
+            <a:endParaRPr lang="en-US" sz="2200" dirty="0"/>
           </a:p>
         </p:txBody>
       </p:sp>
@@ -2531,8 +2798,8 @@
         </p:nvSpPr>
         <p:spPr>
           <a:xfrm>
-            <a:off x="640080" y="960120"/>
-            <a:ext cx="10515600" cy="365760"/>
+            <a:off x="640080" y="868680"/>
+            <a:ext cx="10515600" cy="320040"/>
           </a:xfrm>
           <a:prstGeom prst="rect">
             <a:avLst/>
@@ -2548,515 +2815,467 @@
               <a:buNone/>
             </a:pPr>
             <a:r>
-              <a:rPr lang="en-US" sz="1200" i="1" dirty="0">
-                <a:solidFill>
-                  <a:srgbClr val="9FB3C8"/>
-                </a:solidFill>
-                <a:latin typeface="Calibri" pitchFamily="34" charset="0"/>
-                <a:ea typeface="Calibri" pitchFamily="34" charset="-122"/>
-                <a:cs typeface="Calibri" pitchFamily="34" charset="-120"/>
-              </a:rPr>
-              <a:t>For orientation only — full architecture depth lives in the companion Technical Specification.</a:t>
-            </a:r>
-            <a:endParaRPr lang="en-US" sz="1200" dirty="0"/>
-          </a:p>
-        </p:txBody>
-      </p:sp>
-      <p:sp>
-        <p:nvSpPr>
-          <p:cNvPr id="4" name="Shape 2"/>
-          <p:cNvSpPr/>
-          <p:nvPr/>
-        </p:nvSpPr>
-        <p:spPr>
-          <a:xfrm>
-            <a:off x="822960" y="1691640"/>
-            <a:ext cx="3291840" cy="914400"/>
+              <a:rPr lang="en-US" sz="1150" i="1" dirty="0">
+                <a:solidFill>
+                  <a:srgbClr val="5B6B7A"/>
+                </a:solidFill>
+                <a:latin typeface="Calibri" pitchFamily="34" charset="0"/>
+                <a:ea typeface="Calibri" pitchFamily="34" charset="-122"/>
+                <a:cs typeface="Calibri" pitchFamily="34" charset="-120"/>
+              </a:rPr>
+              <a:t>Admin-side screens — approvals, user management, and in-app notifications.</a:t>
+            </a:r>
+            <a:endParaRPr lang="en-US" sz="1150" dirty="0"/>
+          </a:p>
+        </p:txBody>
+      </p:sp>
+      <p:sp>
+        <p:nvSpPr>
+          <p:cNvPr id="4" name="Text 2"/>
+          <p:cNvSpPr/>
+          <p:nvPr/>
+        </p:nvSpPr>
+        <p:spPr>
+          <a:xfrm>
+            <a:off x="594360" y="1325880"/>
+            <a:ext cx="5349240" cy="256032"/>
+          </a:xfrm>
+          <a:prstGeom prst="rect">
+            <a:avLst/>
+          </a:prstGeom>
+          <a:noFill/>
+          <a:ln/>
+        </p:spPr>
+        <p:txBody>
+          <a:bodyPr wrap="square" rtlCol="0" anchor="ctr"/>
+          <a:lstStyle/>
+          <a:p>
+            <a:pPr indent="0" marL="0">
+              <a:buNone/>
+            </a:pPr>
+            <a:r>
+              <a:rPr lang="en-US" sz="1000" b="1" dirty="0">
+                <a:solidFill>
+                  <a:srgbClr val="5B6B7A"/>
+                </a:solidFill>
+                <a:latin typeface="Calibri" pitchFamily="34" charset="0"/>
+                <a:ea typeface="Calibri" pitchFamily="34" charset="-122"/>
+                <a:cs typeface="Calibri" pitchFamily="34" charset="-120"/>
+              </a:rPr>
+              <a:t>Bookings Management — platform-admin approval queue</a:t>
+            </a:r>
+            <a:endParaRPr lang="en-US" sz="1000" dirty="0"/>
+          </a:p>
+        </p:txBody>
+      </p:sp>
+      <p:sp>
+        <p:nvSpPr>
+          <p:cNvPr id="5" name="Shape 3"/>
+          <p:cNvSpPr/>
+          <p:nvPr/>
+        </p:nvSpPr>
+        <p:spPr>
+          <a:xfrm>
+            <a:off x="539496" y="1563624"/>
+            <a:ext cx="5458968" cy="2240280"/>
           </a:xfrm>
           <a:prstGeom prst="roundRect">
             <a:avLst>
-              <a:gd name="adj" fmla="val 8000"/>
-            </a:avLst>
-          </a:prstGeom>
-          <a:solidFill>
-            <a:srgbClr val="22C7B5"/>
-          </a:solidFill>
-          <a:ln/>
-        </p:spPr>
-      </p:sp>
-      <p:sp>
-        <p:nvSpPr>
-          <p:cNvPr id="5" name="Text 3"/>
-          <p:cNvSpPr/>
-          <p:nvPr/>
-        </p:nvSpPr>
-        <p:spPr>
-          <a:xfrm>
-            <a:off x="822960" y="1691640"/>
-            <a:ext cx="3291840" cy="502920"/>
-          </a:xfrm>
-          <a:prstGeom prst="rect">
-            <a:avLst/>
-          </a:prstGeom>
-          <a:noFill/>
-          <a:ln/>
-        </p:spPr>
-        <p:txBody>
-          <a:bodyPr wrap="square" rtlCol="0" anchor="ctr"/>
-          <a:lstStyle/>
-          <a:p>
-            <a:pPr algn="ctr" indent="0" marL="0">
-              <a:buNone/>
-            </a:pPr>
-            <a:r>
-              <a:rPr lang="en-US" sz="1400" b="1" dirty="0">
-                <a:solidFill>
-                  <a:srgbClr val="0F2438"/>
-                </a:solidFill>
-                <a:latin typeface="Calibri" pitchFamily="34" charset="0"/>
-                <a:ea typeface="Calibri" pitchFamily="34" charset="-122"/>
-                <a:cs typeface="Calibri" pitchFamily="34" charset="-120"/>
-              </a:rPr>
-              <a:t>Angular 20 SPA</a:t>
-            </a:r>
-            <a:endParaRPr lang="en-US" sz="1400" dirty="0"/>
-          </a:p>
-        </p:txBody>
-      </p:sp>
-      <p:sp>
-        <p:nvSpPr>
-          <p:cNvPr id="6" name="Text 4"/>
-          <p:cNvSpPr/>
-          <p:nvPr/>
-        </p:nvSpPr>
-        <p:spPr>
-          <a:xfrm>
-            <a:off x="822960" y="2148840"/>
-            <a:ext cx="3291840" cy="365760"/>
-          </a:xfrm>
-          <a:prstGeom prst="rect">
-            <a:avLst/>
-          </a:prstGeom>
-          <a:noFill/>
-          <a:ln/>
-        </p:spPr>
-        <p:txBody>
-          <a:bodyPr wrap="square" rtlCol="0" anchor="ctr"/>
-          <a:lstStyle/>
-          <a:p>
-            <a:pPr algn="ctr" indent="0" marL="0">
-              <a:buNone/>
-            </a:pPr>
-            <a:r>
-              <a:rPr lang="en-US" sz="950" dirty="0">
-                <a:solidFill>
-                  <a:srgbClr val="0F2438"/>
-                </a:solidFill>
-                <a:latin typeface="Calibri" pitchFamily="34" charset="0"/>
-                <a:ea typeface="Calibri" pitchFamily="34" charset="-122"/>
-                <a:cs typeface="Calibri" pitchFamily="34" charset="-120"/>
-              </a:rPr>
-              <a:t>standalone components + TailwindCSS</a:t>
-            </a:r>
-            <a:endParaRPr lang="en-US" sz="950" dirty="0"/>
-          </a:p>
-        </p:txBody>
-      </p:sp>
-      <p:sp>
-        <p:nvSpPr>
-          <p:cNvPr id="7" name="Text 5"/>
-          <p:cNvSpPr/>
-          <p:nvPr/>
-        </p:nvSpPr>
-        <p:spPr>
-          <a:xfrm>
-            <a:off x="822960" y="2697480"/>
-            <a:ext cx="3291840" cy="320040"/>
-          </a:xfrm>
-          <a:prstGeom prst="rect">
-            <a:avLst/>
-          </a:prstGeom>
-          <a:noFill/>
-          <a:ln/>
-        </p:spPr>
-        <p:txBody>
-          <a:bodyPr wrap="square" rtlCol="0" anchor="ctr"/>
-          <a:lstStyle/>
-          <a:p>
-            <a:pPr algn="ctr" indent="0" marL="0">
-              <a:buNone/>
-            </a:pPr>
-            <a:r>
-              <a:rPr lang="en-US" sz="1000" dirty="0">
-                <a:solidFill>
-                  <a:srgbClr val="9FB3C8"/>
-                </a:solidFill>
-                <a:latin typeface="Calibri" pitchFamily="34" charset="0"/>
-                <a:ea typeface="Calibri" pitchFamily="34" charset="-122"/>
-                <a:cs typeface="Calibri" pitchFamily="34" charset="-120"/>
-              </a:rPr>
-              <a:t>↓  REST / JSON over HTTPS</a:t>
-            </a:r>
-            <a:endParaRPr lang="en-US" sz="1000" dirty="0"/>
-          </a:p>
-        </p:txBody>
-      </p:sp>
-      <p:sp>
-        <p:nvSpPr>
-          <p:cNvPr id="8" name="Shape 6"/>
-          <p:cNvSpPr/>
-          <p:nvPr/>
-        </p:nvSpPr>
-        <p:spPr>
-          <a:xfrm>
-            <a:off x="822960" y="3108960"/>
-            <a:ext cx="3291840" cy="685800"/>
-          </a:xfrm>
-          <a:prstGeom prst="roundRect">
-            <a:avLst>
-              <a:gd name="adj" fmla="val 8000"/>
-            </a:avLst>
-          </a:prstGeom>
-          <a:solidFill>
-            <a:srgbClr val="163A57"/>
-          </a:solidFill>
-          <a:ln/>
-        </p:spPr>
-      </p:sp>
-      <p:sp>
-        <p:nvSpPr>
-          <p:cNvPr id="9" name="Text 7"/>
-          <p:cNvSpPr/>
-          <p:nvPr/>
-        </p:nvSpPr>
-        <p:spPr>
-          <a:xfrm>
-            <a:off x="1005840" y="3163824"/>
-            <a:ext cx="2926080" cy="320040"/>
-          </a:xfrm>
-          <a:prstGeom prst="rect">
-            <a:avLst/>
-          </a:prstGeom>
-          <a:noFill/>
-          <a:ln/>
-        </p:spPr>
-        <p:txBody>
-          <a:bodyPr wrap="square" rtlCol="0" anchor="ctr"/>
-          <a:lstStyle/>
-          <a:p>
-            <a:pPr indent="0" marL="0">
-              <a:buNone/>
-            </a:pPr>
-            <a:r>
-              <a:rPr lang="en-US" sz="1200" b="1" dirty="0">
-                <a:solidFill>
-                  <a:srgbClr val="22C7B5"/>
-                </a:solidFill>
-                <a:latin typeface="Calibri" pitchFamily="34" charset="0"/>
-                <a:ea typeface="Calibri" pitchFamily="34" charset="-122"/>
-                <a:cs typeface="Calibri" pitchFamily="34" charset="-120"/>
-              </a:rPr>
-              <a:t>Controllers</a:t>
-            </a:r>
-            <a:endParaRPr lang="en-US" sz="1200" dirty="0"/>
-          </a:p>
-        </p:txBody>
-      </p:sp>
-      <p:sp>
-        <p:nvSpPr>
-          <p:cNvPr id="10" name="Text 8"/>
-          <p:cNvSpPr/>
-          <p:nvPr/>
-        </p:nvSpPr>
-        <p:spPr>
-          <a:xfrm>
-            <a:off x="1005840" y="3456432"/>
-            <a:ext cx="2926080" cy="292608"/>
-          </a:xfrm>
-          <a:prstGeom prst="rect">
-            <a:avLst/>
-          </a:prstGeom>
-          <a:noFill/>
-          <a:ln/>
-        </p:spPr>
-        <p:txBody>
-          <a:bodyPr wrap="square" rtlCol="0" anchor="ctr"/>
-          <a:lstStyle/>
-          <a:p>
-            <a:pPr indent="0" marL="0">
-              <a:buNone/>
-            </a:pPr>
-            <a:r>
-              <a:rPr lang="en-US" sz="850" dirty="0">
-                <a:solidFill>
-                  <a:srgbClr val="9FB3C8"/>
-                </a:solidFill>
-                <a:latin typeface="Calibri" pitchFamily="34" charset="0"/>
-                <a:ea typeface="Calibri" pitchFamily="34" charset="-122"/>
-                <a:cs typeface="Calibri" pitchFamily="34" charset="-120"/>
-              </a:rPr>
-              <a:t>HTTP routing + JWT auth enforcement</a:t>
-            </a:r>
-            <a:endParaRPr lang="en-US" sz="850" dirty="0"/>
-          </a:p>
-        </p:txBody>
-      </p:sp>
-      <p:sp>
-        <p:nvSpPr>
-          <p:cNvPr id="11" name="Shape 9"/>
-          <p:cNvSpPr/>
-          <p:nvPr/>
-        </p:nvSpPr>
-        <p:spPr>
-          <a:xfrm>
-            <a:off x="822960" y="3931920"/>
-            <a:ext cx="3291840" cy="685800"/>
-          </a:xfrm>
-          <a:prstGeom prst="roundRect">
-            <a:avLst>
-              <a:gd name="adj" fmla="val 8000"/>
-            </a:avLst>
-          </a:prstGeom>
-          <a:solidFill>
-            <a:srgbClr val="1E4C6E"/>
-          </a:solidFill>
-          <a:ln/>
-        </p:spPr>
-      </p:sp>
-      <p:sp>
-        <p:nvSpPr>
-          <p:cNvPr id="12" name="Text 10"/>
-          <p:cNvSpPr/>
-          <p:nvPr/>
-        </p:nvSpPr>
-        <p:spPr>
-          <a:xfrm>
-            <a:off x="1005840" y="3986784"/>
-            <a:ext cx="2926080" cy="320040"/>
-          </a:xfrm>
-          <a:prstGeom prst="rect">
-            <a:avLst/>
-          </a:prstGeom>
-          <a:noFill/>
-          <a:ln/>
-        </p:spPr>
-        <p:txBody>
-          <a:bodyPr wrap="square" rtlCol="0" anchor="ctr"/>
-          <a:lstStyle/>
-          <a:p>
-            <a:pPr indent="0" marL="0">
-              <a:buNone/>
-            </a:pPr>
-            <a:r>
-              <a:rPr lang="en-US" sz="1200" b="1" dirty="0">
-                <a:solidFill>
-                  <a:srgbClr val="22C7B5"/>
-                </a:solidFill>
-                <a:latin typeface="Calibri" pitchFamily="34" charset="0"/>
-                <a:ea typeface="Calibri" pitchFamily="34" charset="-122"/>
-                <a:cs typeface="Calibri" pitchFamily="34" charset="-120"/>
-              </a:rPr>
-              <a:t>Services</a:t>
-            </a:r>
-            <a:endParaRPr lang="en-US" sz="1200" dirty="0"/>
-          </a:p>
-        </p:txBody>
-      </p:sp>
-      <p:sp>
-        <p:nvSpPr>
-          <p:cNvPr id="13" name="Text 11"/>
-          <p:cNvSpPr/>
-          <p:nvPr/>
-        </p:nvSpPr>
-        <p:spPr>
-          <a:xfrm>
-            <a:off x="1005840" y="4279392"/>
-            <a:ext cx="2926080" cy="292608"/>
-          </a:xfrm>
-          <a:prstGeom prst="rect">
-            <a:avLst/>
-          </a:prstGeom>
-          <a:noFill/>
-          <a:ln/>
-        </p:spPr>
-        <p:txBody>
-          <a:bodyPr wrap="square" rtlCol="0" anchor="ctr"/>
-          <a:lstStyle/>
-          <a:p>
-            <a:pPr indent="0" marL="0">
-              <a:buNone/>
-            </a:pPr>
-            <a:r>
-              <a:rPr lang="en-US" sz="850" dirty="0">
-                <a:solidFill>
-                  <a:srgbClr val="9FB3C8"/>
-                </a:solidFill>
-                <a:latin typeface="Calibri" pitchFamily="34" charset="0"/>
-                <a:ea typeface="Calibri" pitchFamily="34" charset="-122"/>
-                <a:cs typeface="Calibri" pitchFamily="34" charset="-120"/>
-              </a:rPr>
-              <a:t>Business rules, ownership &amp; role checks</a:t>
-            </a:r>
-            <a:endParaRPr lang="en-US" sz="850" dirty="0"/>
-          </a:p>
-        </p:txBody>
-      </p:sp>
-      <p:sp>
-        <p:nvSpPr>
-          <p:cNvPr id="14" name="Shape 12"/>
-          <p:cNvSpPr/>
-          <p:nvPr/>
-        </p:nvSpPr>
-        <p:spPr>
-          <a:xfrm>
-            <a:off x="822960" y="4754880"/>
-            <a:ext cx="3291840" cy="685800"/>
-          </a:xfrm>
-          <a:prstGeom prst="roundRect">
-            <a:avLst>
-              <a:gd name="adj" fmla="val 8000"/>
-            </a:avLst>
-          </a:prstGeom>
-          <a:solidFill>
-            <a:srgbClr val="163A57"/>
-          </a:solidFill>
-          <a:ln/>
-        </p:spPr>
-      </p:sp>
-      <p:sp>
-        <p:nvSpPr>
-          <p:cNvPr id="15" name="Text 13"/>
-          <p:cNvSpPr/>
-          <p:nvPr/>
-        </p:nvSpPr>
-        <p:spPr>
-          <a:xfrm>
-            <a:off x="1005840" y="4809744"/>
-            <a:ext cx="2926080" cy="320040"/>
-          </a:xfrm>
-          <a:prstGeom prst="rect">
-            <a:avLst/>
-          </a:prstGeom>
-          <a:noFill/>
-          <a:ln/>
-        </p:spPr>
-        <p:txBody>
-          <a:bodyPr wrap="square" rtlCol="0" anchor="ctr"/>
-          <a:lstStyle/>
-          <a:p>
-            <a:pPr indent="0" marL="0">
-              <a:buNone/>
-            </a:pPr>
-            <a:r>
-              <a:rPr lang="en-US" sz="1200" b="1" dirty="0">
-                <a:solidFill>
-                  <a:srgbClr val="22C7B5"/>
-                </a:solidFill>
-                <a:latin typeface="Calibri" pitchFamily="34" charset="0"/>
-                <a:ea typeface="Calibri" pitchFamily="34" charset="-122"/>
-                <a:cs typeface="Calibri" pitchFamily="34" charset="-120"/>
-              </a:rPr>
-              <a:t>Repositories (EF Core)</a:t>
-            </a:r>
-            <a:endParaRPr lang="en-US" sz="1200" dirty="0"/>
-          </a:p>
-        </p:txBody>
-      </p:sp>
-      <p:sp>
-        <p:nvSpPr>
-          <p:cNvPr id="16" name="Text 14"/>
-          <p:cNvSpPr/>
-          <p:nvPr/>
-        </p:nvSpPr>
-        <p:spPr>
-          <a:xfrm>
-            <a:off x="1005840" y="5102352"/>
-            <a:ext cx="2926080" cy="292608"/>
-          </a:xfrm>
-          <a:prstGeom prst="rect">
-            <a:avLst/>
-          </a:prstGeom>
-          <a:noFill/>
-          <a:ln/>
-        </p:spPr>
-        <p:txBody>
-          <a:bodyPr wrap="square" rtlCol="0" anchor="ctr"/>
-          <a:lstStyle/>
-          <a:p>
-            <a:pPr indent="0" marL="0">
-              <a:buNone/>
-            </a:pPr>
-            <a:r>
-              <a:rPr lang="en-US" sz="850" dirty="0">
-                <a:solidFill>
-                  <a:srgbClr val="9FB3C8"/>
-                </a:solidFill>
-                <a:latin typeface="Calibri" pitchFamily="34" charset="0"/>
-                <a:ea typeface="Calibri" pitchFamily="34" charset="-122"/>
-                <a:cs typeface="Calibri" pitchFamily="34" charset="-120"/>
-              </a:rPr>
-              <a:t>Data access over SQL Server</a:t>
-            </a:r>
-            <a:endParaRPr lang="en-US" sz="850" dirty="0"/>
-          </a:p>
-        </p:txBody>
-      </p:sp>
-      <p:sp>
-        <p:nvSpPr>
-          <p:cNvPr id="17" name="Shape 15"/>
-          <p:cNvSpPr/>
-          <p:nvPr/>
-        </p:nvSpPr>
-        <p:spPr>
-          <a:xfrm>
-            <a:off x="822960" y="5577840"/>
-            <a:ext cx="3291840" cy="548640"/>
-          </a:xfrm>
-          <a:prstGeom prst="roundRect">
-            <a:avLst>
-              <a:gd name="adj" fmla="val 10000"/>
+              <a:gd name="adj" fmla="val 2449"/>
             </a:avLst>
           </a:prstGeom>
           <a:solidFill>
             <a:srgbClr val="FFFFFF"/>
           </a:solidFill>
-          <a:ln/>
-        </p:spPr>
-      </p:sp>
-      <p:sp>
-        <p:nvSpPr>
-          <p:cNvPr id="18" name="Text 16"/>
-          <p:cNvSpPr/>
-          <p:nvPr/>
-        </p:nvSpPr>
-        <p:spPr>
-          <a:xfrm>
-            <a:off x="822960" y="5577840"/>
-            <a:ext cx="3291840" cy="548640"/>
-          </a:xfrm>
-          <a:prstGeom prst="rect">
-            <a:avLst/>
-          </a:prstGeom>
-          <a:noFill/>
-          <a:ln/>
-        </p:spPr>
-        <p:txBody>
-          <a:bodyPr wrap="square" rtlCol="0" anchor="ctr"/>
+          <a:ln w="12700">
+            <a:solidFill>
+              <a:srgbClr val="EEF3F6"/>
+            </a:solidFill>
+            <a:prstDash val="solid"/>
+          </a:ln>
+          <a:effectLst>
+            <a:outerShdw sx="100000" sy="100000" kx="0" ky="0" algn="bl" rotWithShape="0" blurRad="76200" dist="25400" dir="5400000">
+              <a:srgbClr val="5B6B7A">
+                <a:alpha val="25000"/>
+              </a:srgbClr>
+            </a:outerShdw>
+          </a:effectLst>
+        </p:spPr>
+      </p:sp>
+      <p:pic>
+        <p:nvPicPr>
+          <p:cNvPr id="6" name="Image 0" descr="/tmp/build/imgs_v2/05b-admin-bookings-viewed-as-platform-admin-due-to-bug.png">    </p:cNvPr>
+          <p:cNvPicPr>
+            <a:picLocks noChangeAspect="1"/>
+          </p:cNvPicPr>
+          <p:nvPr/>
+        </p:nvPicPr>
+        <p:blipFill>
+          <a:blip r:embed="rId1"/>
+          <a:srcRect l="0" r="0" t="0" b="0"/>
+          <a:stretch/>
+        </p:blipFill>
+        <p:spPr>
+          <a:xfrm>
+            <a:off x="594360" y="1618488"/>
+            <a:ext cx="5349240" cy="2130552"/>
+          </a:xfrm>
+          <a:prstGeom prst="rect">
+            <a:avLst/>
+          </a:prstGeom>
+        </p:spPr>
+      </p:pic>
+      <p:sp>
+        <p:nvSpPr>
+          <p:cNvPr id="7" name="Text 4"/>
+          <p:cNvSpPr/>
+          <p:nvPr/>
+        </p:nvSpPr>
+        <p:spPr>
+          <a:xfrm>
+            <a:off x="6217920" y="1325880"/>
+            <a:ext cx="5349240" cy="256032"/>
+          </a:xfrm>
+          <a:prstGeom prst="rect">
+            <a:avLst/>
+          </a:prstGeom>
+          <a:noFill/>
+          <a:ln/>
+        </p:spPr>
+        <p:txBody>
+          <a:bodyPr wrap="square" rtlCol="0" anchor="ctr"/>
+          <a:lstStyle/>
+          <a:p>
+            <a:pPr indent="0" marL="0">
+              <a:buNone/>
+            </a:pPr>
+            <a:r>
+              <a:rPr lang="en-US" sz="1000" b="1" dirty="0">
+                <a:solidFill>
+                  <a:srgbClr val="5B6B7A"/>
+                </a:solidFill>
+                <a:latin typeface="Calibri" pitchFamily="34" charset="0"/>
+                <a:ea typeface="Calibri" pitchFamily="34" charset="-122"/>
+                <a:cs typeface="Calibri" pitchFamily="34" charset="-120"/>
+              </a:rPr>
+              <a:t>In-app notifications</a:t>
+            </a:r>
+            <a:endParaRPr lang="en-US" sz="1000" dirty="0"/>
+          </a:p>
+        </p:txBody>
+      </p:sp>
+      <p:sp>
+        <p:nvSpPr>
+          <p:cNvPr id="8" name="Shape 5"/>
+          <p:cNvSpPr/>
+          <p:nvPr/>
+        </p:nvSpPr>
+        <p:spPr>
+          <a:xfrm>
+            <a:off x="6163056" y="1563624"/>
+            <a:ext cx="5458968" cy="2240280"/>
+          </a:xfrm>
+          <a:prstGeom prst="roundRect">
+            <a:avLst>
+              <a:gd name="adj" fmla="val 2449"/>
+            </a:avLst>
+          </a:prstGeom>
+          <a:solidFill>
+            <a:srgbClr val="FFFFFF"/>
+          </a:solidFill>
+          <a:ln w="12700">
+            <a:solidFill>
+              <a:srgbClr val="EEF3F6"/>
+            </a:solidFill>
+            <a:prstDash val="solid"/>
+          </a:ln>
+          <a:effectLst>
+            <a:outerShdw sx="100000" sy="100000" kx="0" ky="0" algn="bl" rotWithShape="0" blurRad="76200" dist="25400" dir="5400000">
+              <a:srgbClr val="5B6B7A">
+                <a:alpha val="25000"/>
+              </a:srgbClr>
+            </a:outerShdw>
+          </a:effectLst>
+        </p:spPr>
+      </p:sp>
+      <p:pic>
+        <p:nvPicPr>
+          <p:cNvPr id="9" name="Image 1" descr="/tmp/build/imgs_v2/09-notification-dropdown.png">    </p:cNvPr>
+          <p:cNvPicPr>
+            <a:picLocks noChangeAspect="1"/>
+          </p:cNvPicPr>
+          <p:nvPr/>
+        </p:nvPicPr>
+        <p:blipFill>
+          <a:blip r:embed="rId2"/>
+          <a:srcRect l="0" r="0" t="0" b="0"/>
+          <a:stretch/>
+        </p:blipFill>
+        <p:spPr>
+          <a:xfrm>
+            <a:off x="6217920" y="1618488"/>
+            <a:ext cx="5349240" cy="2130552"/>
+          </a:xfrm>
+          <a:prstGeom prst="rect">
+            <a:avLst/>
+          </a:prstGeom>
+        </p:spPr>
+      </p:pic>
+      <p:sp>
+        <p:nvSpPr>
+          <p:cNvPr id="10" name="Text 6"/>
+          <p:cNvSpPr/>
+          <p:nvPr/>
+        </p:nvSpPr>
+        <p:spPr>
+          <a:xfrm>
+            <a:off x="594360" y="3977640"/>
+            <a:ext cx="5349240" cy="256032"/>
+          </a:xfrm>
+          <a:prstGeom prst="rect">
+            <a:avLst/>
+          </a:prstGeom>
+          <a:noFill/>
+          <a:ln/>
+        </p:spPr>
+        <p:txBody>
+          <a:bodyPr wrap="square" rtlCol="0" anchor="ctr"/>
+          <a:lstStyle/>
+          <a:p>
+            <a:pPr indent="0" marL="0">
+              <a:buNone/>
+            </a:pPr>
+            <a:r>
+              <a:rPr lang="en-US" sz="1000" b="1" dirty="0">
+                <a:solidFill>
+                  <a:srgbClr val="5B6B7A"/>
+                </a:solidFill>
+                <a:latin typeface="Calibri" pitchFamily="34" charset="0"/>
+                <a:ea typeface="Calibri" pitchFamily="34" charset="-122"/>
+                <a:cs typeface="Calibri" pitchFamily="34" charset="-120"/>
+              </a:rPr>
+              <a:t>Users Management — platform-wide directory</a:t>
+            </a:r>
+            <a:endParaRPr lang="en-US" sz="1000" dirty="0"/>
+          </a:p>
+        </p:txBody>
+      </p:sp>
+      <p:sp>
+        <p:nvSpPr>
+          <p:cNvPr id="11" name="Shape 7"/>
+          <p:cNvSpPr/>
+          <p:nvPr/>
+        </p:nvSpPr>
+        <p:spPr>
+          <a:xfrm>
+            <a:off x="539496" y="4215384"/>
+            <a:ext cx="5458968" cy="2240280"/>
+          </a:xfrm>
+          <a:prstGeom prst="roundRect">
+            <a:avLst>
+              <a:gd name="adj" fmla="val 2449"/>
+            </a:avLst>
+          </a:prstGeom>
+          <a:solidFill>
+            <a:srgbClr val="FFFFFF"/>
+          </a:solidFill>
+          <a:ln w="12700">
+            <a:solidFill>
+              <a:srgbClr val="EEF3F6"/>
+            </a:solidFill>
+            <a:prstDash val="solid"/>
+          </a:ln>
+          <a:effectLst>
+            <a:outerShdw sx="100000" sy="100000" kx="0" ky="0" algn="bl" rotWithShape="0" blurRad="76200" dist="25400" dir="5400000">
+              <a:srgbClr val="5B6B7A">
+                <a:alpha val="25000"/>
+              </a:srgbClr>
+            </a:outerShdw>
+          </a:effectLst>
+        </p:spPr>
+      </p:sp>
+      <p:pic>
+        <p:nvPicPr>
+          <p:cNvPr id="12" name="Image 2" descr="/tmp/build/imgs_v2/08-admin-users.png">    </p:cNvPr>
+          <p:cNvPicPr>
+            <a:picLocks noChangeAspect="1"/>
+          </p:cNvPicPr>
+          <p:nvPr/>
+        </p:nvPicPr>
+        <p:blipFill>
+          <a:blip r:embed="rId3"/>
+          <a:srcRect l="0" r="0" t="0" b="0"/>
+          <a:stretch/>
+        </p:blipFill>
+        <p:spPr>
+          <a:xfrm>
+            <a:off x="594360" y="4270248"/>
+            <a:ext cx="5349240" cy="2130552"/>
+          </a:xfrm>
+          <a:prstGeom prst="rect">
+            <a:avLst/>
+          </a:prstGeom>
+        </p:spPr>
+      </p:pic>
+      <p:sp>
+        <p:nvSpPr>
+          <p:cNvPr id="13" name="Text 8"/>
+          <p:cNvSpPr/>
+          <p:nvPr/>
+        </p:nvSpPr>
+        <p:spPr>
+          <a:xfrm>
+            <a:off x="6217920" y="3977640"/>
+            <a:ext cx="5349240" cy="256032"/>
+          </a:xfrm>
+          <a:prstGeom prst="rect">
+            <a:avLst/>
+          </a:prstGeom>
+          <a:noFill/>
+          <a:ln/>
+        </p:spPr>
+        <p:txBody>
+          <a:bodyPr wrap="square" rtlCol="0" anchor="ctr"/>
+          <a:lstStyle/>
+          <a:p>
+            <a:pPr indent="0" marL="0">
+              <a:buNone/>
+            </a:pPr>
+            <a:r>
+              <a:rPr lang="en-US" sz="1000" b="1" dirty="0">
+                <a:solidFill>
+                  <a:srgbClr val="5B6B7A"/>
+                </a:solidFill>
+                <a:latin typeface="Calibri" pitchFamily="34" charset="0"/>
+                <a:ea typeface="Calibri" pitchFamily="34" charset="-122"/>
+                <a:cs typeface="Calibri" pitchFamily="34" charset="-120"/>
+              </a:rPr>
+              <a:t>Platform Admin Dashboard</a:t>
+            </a:r>
+            <a:endParaRPr lang="en-US" sz="1000" dirty="0"/>
+          </a:p>
+        </p:txBody>
+      </p:sp>
+      <p:sp>
+        <p:nvSpPr>
+          <p:cNvPr id="14" name="Shape 9"/>
+          <p:cNvSpPr/>
+          <p:nvPr/>
+        </p:nvSpPr>
+        <p:spPr>
+          <a:xfrm>
+            <a:off x="6217920" y="4270248"/>
+            <a:ext cx="5349240" cy="2130552"/>
+          </a:xfrm>
+          <a:prstGeom prst="roundRect">
+            <a:avLst>
+              <a:gd name="adj" fmla="val 3433"/>
+            </a:avLst>
+          </a:prstGeom>
+          <a:solidFill>
+            <a:srgbClr val="EEF3F6"/>
+          </a:solidFill>
+          <a:ln w="12700">
+            <a:solidFill>
+              <a:srgbClr val="DCE3E8"/>
+            </a:solidFill>
+            <a:prstDash val="dash"/>
+          </a:ln>
+        </p:spPr>
+      </p:sp>
+      <p:sp>
+        <p:nvSpPr>
+          <p:cNvPr id="15" name="Shape 10"/>
+          <p:cNvSpPr/>
+          <p:nvPr/>
+        </p:nvSpPr>
+        <p:spPr>
+          <a:xfrm>
+            <a:off x="8645652" y="4471416"/>
+            <a:ext cx="493776" cy="493776"/>
+          </a:xfrm>
+          <a:prstGeom prst="ellipse">
+            <a:avLst/>
+          </a:prstGeom>
+          <a:solidFill>
+            <a:srgbClr val="FF6B4A"/>
+          </a:solidFill>
+          <a:ln/>
+        </p:spPr>
+      </p:sp>
+      <p:sp>
+        <p:nvSpPr>
+          <p:cNvPr id="16" name="Text 11"/>
+          <p:cNvSpPr/>
+          <p:nvPr/>
+        </p:nvSpPr>
+        <p:spPr>
+          <a:xfrm>
+            <a:off x="8645652" y="4471416"/>
+            <a:ext cx="493776" cy="493776"/>
+          </a:xfrm>
+          <a:prstGeom prst="rect">
+            <a:avLst/>
+          </a:prstGeom>
+          <a:noFill/>
+          <a:ln/>
+        </p:spPr>
+        <p:txBody>
+          <a:bodyPr wrap="none" rtlCol="0" anchor="ctr"/>
           <a:lstStyle/>
           <a:p>
             <a:pPr algn="ctr" indent="0" marL="0">
               <a:buNone/>
             </a:pPr>
             <a:r>
+              <a:rPr lang="en-US" sz="2000" b="1" dirty="0">
+                <a:solidFill>
+                  <a:srgbClr val="FFFFFF"/>
+                </a:solidFill>
+                <a:latin typeface="Calibri" pitchFamily="34" charset="0"/>
+                <a:ea typeface="Calibri" pitchFamily="34" charset="-122"/>
+                <a:cs typeface="Calibri" pitchFamily="34" charset="-120"/>
+              </a:rPr>
+              <a:t>!</a:t>
+            </a:r>
+            <a:endParaRPr lang="en-US" sz="2000" dirty="0"/>
+          </a:p>
+        </p:txBody>
+      </p:sp>
+      <p:sp>
+        <p:nvSpPr>
+          <p:cNvPr id="17" name="Text 12"/>
+          <p:cNvSpPr/>
+          <p:nvPr/>
+        </p:nvSpPr>
+        <p:spPr>
+          <a:xfrm>
+            <a:off x="6217920" y="5138928"/>
+            <a:ext cx="5349240" cy="365760"/>
+          </a:xfrm>
+          <a:prstGeom prst="rect">
+            <a:avLst/>
+          </a:prstGeom>
+          <a:noFill/>
+          <a:ln/>
+        </p:spPr>
+        <p:txBody>
+          <a:bodyPr wrap="square" rtlCol="0" anchor="ctr"/>
+          <a:lstStyle/>
+          <a:p>
+            <a:pPr algn="ctr" indent="0" marL="0">
+              <a:buNone/>
+            </a:pPr>
+            <a:r>
               <a:rPr lang="en-US" sz="1300" b="1" dirty="0">
                 <a:solidFill>
-                  <a:srgbClr val="0F2438"/>
-                </a:solidFill>
-                <a:latin typeface="Calibri" pitchFamily="34" charset="0"/>
-                <a:ea typeface="Calibri" pitchFamily="34" charset="-122"/>
-                <a:cs typeface="Calibri" pitchFamily="34" charset="-120"/>
-              </a:rPr>
-              <a:t>SQL Server</a:t>
+                  <a:srgbClr val="5B6B7A"/>
+                </a:solidFill>
+                <a:latin typeface="Calibri" pitchFamily="34" charset="0"/>
+                <a:ea typeface="Calibri" pitchFamily="34" charset="-122"/>
+                <a:cs typeface="Calibri" pitchFamily="34" charset="-120"/>
+              </a:rPr>
+              <a:t>In development</a:t>
             </a:r>
             <a:endParaRPr lang="en-US" sz="1300" dirty="0"/>
           </a:p>
@@ -3064,445 +3283,79 @@
       </p:sp>
       <p:sp>
         <p:nvSpPr>
-          <p:cNvPr id="19" name="Text 17"/>
-          <p:cNvSpPr/>
-          <p:nvPr/>
-        </p:nvSpPr>
-        <p:spPr>
-          <a:xfrm>
-            <a:off x="4663440" y="1691640"/>
-            <a:ext cx="6675120" cy="365760"/>
-          </a:xfrm>
-          <a:prstGeom prst="rect">
-            <a:avLst/>
-          </a:prstGeom>
-          <a:noFill/>
-          <a:ln/>
-        </p:spPr>
-        <p:txBody>
-          <a:bodyPr wrap="square" rtlCol="0" anchor="ctr"/>
-          <a:lstStyle/>
-          <a:p>
-            <a:pPr indent="0" marL="0">
-              <a:buNone/>
-            </a:pPr>
-            <a:r>
-              <a:rPr lang="en-US" sz="1400" b="1" dirty="0">
-                <a:solidFill>
-                  <a:srgbClr val="22C7B5"/>
-                </a:solidFill>
-                <a:latin typeface="Calibri" pitchFamily="34" charset="0"/>
-                <a:ea typeface="Calibri" pitchFamily="34" charset="-122"/>
-                <a:cs typeface="Calibri" pitchFamily="34" charset="-120"/>
-              </a:rPr>
-              <a:t>Key choices</a:t>
-            </a:r>
-            <a:endParaRPr lang="en-US" sz="1400" dirty="0"/>
-          </a:p>
-        </p:txBody>
-      </p:sp>
-      <p:sp>
-        <p:nvSpPr>
-          <p:cNvPr id="20" name="Text 18"/>
-          <p:cNvSpPr/>
-          <p:nvPr/>
-        </p:nvSpPr>
-        <p:spPr>
-          <a:xfrm>
-            <a:off x="4663440" y="2148840"/>
-            <a:ext cx="6675120" cy="320040"/>
-          </a:xfrm>
-          <a:prstGeom prst="rect">
-            <a:avLst/>
-          </a:prstGeom>
-          <a:noFill/>
-          <a:ln/>
-        </p:spPr>
-        <p:txBody>
-          <a:bodyPr wrap="square" rtlCol="0" anchor="ctr"/>
-          <a:lstStyle/>
-          <a:p>
-            <a:pPr indent="0" marL="0">
-              <a:buNone/>
-            </a:pPr>
-            <a:r>
-              <a:rPr lang="en-US" sz="1150" b="1" dirty="0">
-                <a:solidFill>
-                  <a:srgbClr val="FFFFFF"/>
-                </a:solidFill>
-                <a:latin typeface="Calibri" pitchFamily="34" charset="0"/>
-                <a:ea typeface="Calibri" pitchFamily="34" charset="-122"/>
-                <a:cs typeface="Calibri" pitchFamily="34" charset="-120"/>
-              </a:rPr>
-              <a:t>Backend</a:t>
-            </a:r>
-            <a:endParaRPr lang="en-US" sz="1150" dirty="0"/>
-          </a:p>
-        </p:txBody>
-      </p:sp>
-      <p:sp>
-        <p:nvSpPr>
-          <p:cNvPr id="21" name="Text 19"/>
-          <p:cNvSpPr/>
-          <p:nvPr/>
-        </p:nvSpPr>
-        <p:spPr>
-          <a:xfrm>
-            <a:off x="4663440" y="2459736"/>
-            <a:ext cx="6675120" cy="502920"/>
-          </a:xfrm>
-          <a:prstGeom prst="rect">
-            <a:avLst/>
-          </a:prstGeom>
-          <a:noFill/>
-          <a:ln/>
-        </p:spPr>
-        <p:txBody>
-          <a:bodyPr wrap="square" rtlCol="0" anchor="ctr"/>
-          <a:lstStyle/>
-          <a:p>
-            <a:pPr indent="0" marL="0">
-              <a:lnSpc>
-                <a:spcPct val="122000"/>
-              </a:lnSpc>
-              <a:buNone/>
-            </a:pPr>
-            <a:r>
-              <a:rPr lang="en-US" sz="1050" dirty="0">
-                <a:solidFill>
-                  <a:srgbClr val="9FB3C8"/>
-                </a:solidFill>
-                <a:latin typeface="Calibri" pitchFamily="34" charset="0"/>
-                <a:ea typeface="Calibri" pitchFamily="34" charset="-122"/>
-                <a:cs typeface="Calibri" pitchFamily="34" charset="-120"/>
-              </a:rPr>
-              <a:t>ASP.NET Core Web API (.NET 10), C# 13 — API-first, no server-rendered views.</a:t>
-            </a:r>
-            <a:endParaRPr lang="en-US" sz="1050" dirty="0"/>
-          </a:p>
-        </p:txBody>
-      </p:sp>
-      <p:sp>
-        <p:nvSpPr>
-          <p:cNvPr id="22" name="Text 20"/>
-          <p:cNvSpPr/>
-          <p:nvPr/>
-        </p:nvSpPr>
-        <p:spPr>
-          <a:xfrm>
-            <a:off x="4663440" y="2990088"/>
-            <a:ext cx="6675120" cy="320040"/>
-          </a:xfrm>
-          <a:prstGeom prst="rect">
-            <a:avLst/>
-          </a:prstGeom>
-          <a:noFill/>
-          <a:ln/>
-        </p:spPr>
-        <p:txBody>
-          <a:bodyPr wrap="square" rtlCol="0" anchor="ctr"/>
-          <a:lstStyle/>
-          <a:p>
-            <a:pPr indent="0" marL="0">
-              <a:buNone/>
-            </a:pPr>
-            <a:r>
-              <a:rPr lang="en-US" sz="1150" b="1" dirty="0">
-                <a:solidFill>
-                  <a:srgbClr val="FFFFFF"/>
-                </a:solidFill>
-                <a:latin typeface="Calibri" pitchFamily="34" charset="0"/>
-                <a:ea typeface="Calibri" pitchFamily="34" charset="-122"/>
-                <a:cs typeface="Calibri" pitchFamily="34" charset="-120"/>
-              </a:rPr>
-              <a:t>Data Access</a:t>
-            </a:r>
-            <a:endParaRPr lang="en-US" sz="1150" dirty="0"/>
-          </a:p>
-        </p:txBody>
-      </p:sp>
-      <p:sp>
-        <p:nvSpPr>
-          <p:cNvPr id="23" name="Text 21"/>
-          <p:cNvSpPr/>
-          <p:nvPr/>
-        </p:nvSpPr>
-        <p:spPr>
-          <a:xfrm>
-            <a:off x="4663440" y="3300984"/>
-            <a:ext cx="6675120" cy="502920"/>
-          </a:xfrm>
-          <a:prstGeom prst="rect">
-            <a:avLst/>
-          </a:prstGeom>
-          <a:noFill/>
-          <a:ln/>
-        </p:spPr>
-        <p:txBody>
-          <a:bodyPr wrap="square" rtlCol="0" anchor="ctr"/>
-          <a:lstStyle/>
-          <a:p>
-            <a:pPr indent="0" marL="0">
-              <a:lnSpc>
-                <a:spcPct val="122000"/>
-              </a:lnSpc>
-              <a:buNone/>
-            </a:pPr>
-            <a:r>
-              <a:rPr lang="en-US" sz="1050" dirty="0">
-                <a:solidFill>
-                  <a:srgbClr val="9FB3C8"/>
-                </a:solidFill>
-                <a:latin typeface="Calibri" pitchFamily="34" charset="0"/>
-                <a:ea typeface="Calibri" pitchFamily="34" charset="-122"/>
-                <a:cs typeface="Calibri" pitchFamily="34" charset="-120"/>
-              </a:rPr>
-              <a:t>Entity Framework Core 10 over Microsoft SQL Server.</a:t>
-            </a:r>
-            <a:endParaRPr lang="en-US" sz="1050" dirty="0"/>
-          </a:p>
-        </p:txBody>
-      </p:sp>
-      <p:sp>
-        <p:nvSpPr>
-          <p:cNvPr id="24" name="Text 22"/>
-          <p:cNvSpPr/>
-          <p:nvPr/>
-        </p:nvSpPr>
-        <p:spPr>
-          <a:xfrm>
-            <a:off x="4663440" y="3831336"/>
-            <a:ext cx="6675120" cy="320040"/>
-          </a:xfrm>
-          <a:prstGeom prst="rect">
-            <a:avLst/>
-          </a:prstGeom>
-          <a:noFill/>
-          <a:ln/>
-        </p:spPr>
-        <p:txBody>
-          <a:bodyPr wrap="square" rtlCol="0" anchor="ctr"/>
-          <a:lstStyle/>
-          <a:p>
-            <a:pPr indent="0" marL="0">
-              <a:buNone/>
-            </a:pPr>
-            <a:r>
-              <a:rPr lang="en-US" sz="1150" b="1" dirty="0">
-                <a:solidFill>
-                  <a:srgbClr val="FFFFFF"/>
-                </a:solidFill>
-                <a:latin typeface="Calibri" pitchFamily="34" charset="0"/>
-                <a:ea typeface="Calibri" pitchFamily="34" charset="-122"/>
-                <a:cs typeface="Calibri" pitchFamily="34" charset="-120"/>
-              </a:rPr>
-              <a:t>Authentication</a:t>
-            </a:r>
-            <a:endParaRPr lang="en-US" sz="1150" dirty="0"/>
-          </a:p>
-        </p:txBody>
-      </p:sp>
-      <p:sp>
-        <p:nvSpPr>
-          <p:cNvPr id="25" name="Text 23"/>
-          <p:cNvSpPr/>
-          <p:nvPr/>
-        </p:nvSpPr>
-        <p:spPr>
-          <a:xfrm>
-            <a:off x="4663440" y="4142232"/>
-            <a:ext cx="6675120" cy="502920"/>
-          </a:xfrm>
-          <a:prstGeom prst="rect">
-            <a:avLst/>
-          </a:prstGeom>
-          <a:noFill/>
-          <a:ln/>
-        </p:spPr>
-        <p:txBody>
-          <a:bodyPr wrap="square" rtlCol="0" anchor="ctr"/>
-          <a:lstStyle/>
-          <a:p>
-            <a:pPr indent="0" marL="0">
-              <a:lnSpc>
-                <a:spcPct val="122000"/>
-              </a:lnSpc>
-              <a:buNone/>
-            </a:pPr>
-            <a:r>
-              <a:rPr lang="en-US" sz="1050" dirty="0">
-                <a:solidFill>
-                  <a:srgbClr val="9FB3C8"/>
-                </a:solidFill>
-                <a:latin typeface="Calibri" pitchFamily="34" charset="0"/>
-                <a:ea typeface="Calibri" pitchFamily="34" charset="-122"/>
-                <a:cs typeface="Calibri" pitchFamily="34" charset="-120"/>
-              </a:rPr>
-              <a:t>JWT Bearer (HMAC-SHA256) with server-side revocation, plus BCrypt.Net-Next for password hashing.</a:t>
-            </a:r>
-            <a:endParaRPr lang="en-US" sz="1050" dirty="0"/>
-          </a:p>
-        </p:txBody>
-      </p:sp>
-      <p:sp>
-        <p:nvSpPr>
-          <p:cNvPr id="26" name="Text 24"/>
-          <p:cNvSpPr/>
-          <p:nvPr/>
-        </p:nvSpPr>
-        <p:spPr>
-          <a:xfrm>
-            <a:off x="4663440" y="4672584"/>
-            <a:ext cx="6675120" cy="320040"/>
-          </a:xfrm>
-          <a:prstGeom prst="rect">
-            <a:avLst/>
-          </a:prstGeom>
-          <a:noFill/>
-          <a:ln/>
-        </p:spPr>
-        <p:txBody>
-          <a:bodyPr wrap="square" rtlCol="0" anchor="ctr"/>
-          <a:lstStyle/>
-          <a:p>
-            <a:pPr indent="0" marL="0">
-              <a:buNone/>
-            </a:pPr>
-            <a:r>
-              <a:rPr lang="en-US" sz="1150" b="1" dirty="0">
-                <a:solidFill>
-                  <a:srgbClr val="FFFFFF"/>
-                </a:solidFill>
-                <a:latin typeface="Calibri" pitchFamily="34" charset="0"/>
-                <a:ea typeface="Calibri" pitchFamily="34" charset="-122"/>
-                <a:cs typeface="Calibri" pitchFamily="34" charset="-120"/>
-              </a:rPr>
-              <a:t>Logging</a:t>
-            </a:r>
-            <a:endParaRPr lang="en-US" sz="1150" dirty="0"/>
-          </a:p>
-        </p:txBody>
-      </p:sp>
-      <p:sp>
-        <p:nvSpPr>
-          <p:cNvPr id="27" name="Text 25"/>
-          <p:cNvSpPr/>
-          <p:nvPr/>
-        </p:nvSpPr>
-        <p:spPr>
-          <a:xfrm>
-            <a:off x="4663440" y="4983480"/>
-            <a:ext cx="6675120" cy="502920"/>
-          </a:xfrm>
-          <a:prstGeom prst="rect">
-            <a:avLst/>
-          </a:prstGeom>
-          <a:noFill/>
-          <a:ln/>
-        </p:spPr>
-        <p:txBody>
-          <a:bodyPr wrap="square" rtlCol="0" anchor="ctr"/>
-          <a:lstStyle/>
-          <a:p>
-            <a:pPr indent="0" marL="0">
-              <a:lnSpc>
-                <a:spcPct val="122000"/>
-              </a:lnSpc>
-              <a:buNone/>
-            </a:pPr>
-            <a:r>
-              <a:rPr lang="en-US" sz="1050" dirty="0">
-                <a:solidFill>
-                  <a:srgbClr val="9FB3C8"/>
-                </a:solidFill>
-                <a:latin typeface="Calibri" pitchFamily="34" charset="0"/>
-                <a:ea typeface="Calibri" pitchFamily="34" charset="-122"/>
-                <a:cs typeface="Calibri" pitchFamily="34" charset="-120"/>
-              </a:rPr>
-              <a:t>Serilog, console + rolling file sinks.</a:t>
-            </a:r>
-            <a:endParaRPr lang="en-US" sz="1050" dirty="0"/>
-          </a:p>
-        </p:txBody>
-      </p:sp>
-      <p:sp>
-        <p:nvSpPr>
-          <p:cNvPr id="28" name="Text 26"/>
-          <p:cNvSpPr/>
-          <p:nvPr/>
-        </p:nvSpPr>
-        <p:spPr>
-          <a:xfrm>
-            <a:off x="4663440" y="5513832"/>
-            <a:ext cx="6675120" cy="320040"/>
-          </a:xfrm>
-          <a:prstGeom prst="rect">
-            <a:avLst/>
-          </a:prstGeom>
-          <a:noFill/>
-          <a:ln/>
-        </p:spPr>
-        <p:txBody>
-          <a:bodyPr wrap="square" rtlCol="0" anchor="ctr"/>
-          <a:lstStyle/>
-          <a:p>
-            <a:pPr indent="0" marL="0">
-              <a:buNone/>
-            </a:pPr>
-            <a:r>
-              <a:rPr lang="en-US" sz="1150" b="1" dirty="0">
-                <a:solidFill>
-                  <a:srgbClr val="FFFFFF"/>
-                </a:solidFill>
-                <a:latin typeface="Calibri" pitchFamily="34" charset="0"/>
-                <a:ea typeface="Calibri" pitchFamily="34" charset="-122"/>
-                <a:cs typeface="Calibri" pitchFamily="34" charset="-120"/>
-              </a:rPr>
-              <a:t>Why API-first + SPA</a:t>
-            </a:r>
-            <a:endParaRPr lang="en-US" sz="1150" dirty="0"/>
-          </a:p>
-        </p:txBody>
-      </p:sp>
-      <p:sp>
-        <p:nvSpPr>
-          <p:cNvPr id="29" name="Text 27"/>
-          <p:cNvSpPr/>
-          <p:nvPr/>
-        </p:nvSpPr>
-        <p:spPr>
-          <a:xfrm>
-            <a:off x="4663440" y="5824728"/>
-            <a:ext cx="6675120" cy="502920"/>
-          </a:xfrm>
-          <a:prstGeom prst="rect">
-            <a:avLst/>
-          </a:prstGeom>
-          <a:noFill/>
-          <a:ln/>
-        </p:spPr>
-        <p:txBody>
-          <a:bodyPr wrap="square" rtlCol="0" anchor="ctr"/>
-          <a:lstStyle/>
-          <a:p>
-            <a:pPr indent="0" marL="0">
-              <a:lnSpc>
-                <a:spcPct val="122000"/>
-              </a:lnSpc>
-              <a:buNone/>
-            </a:pPr>
-            <a:r>
-              <a:rPr lang="en-US" sz="1050" dirty="0">
-                <a:solidFill>
-                  <a:srgbClr val="9FB3C8"/>
-                </a:solidFill>
-                <a:latin typeface="Calibri" pitchFamily="34" charset="0"/>
-                <a:ea typeface="Calibri" pitchFamily="34" charset="-122"/>
-                <a:cs typeface="Calibri" pitchFamily="34" charset="-120"/>
-              </a:rPr>
-              <a:t>Decouples the client from the server entirely — any future client (mobile, third-party) can consume the same, fully server-enforced API.</a:t>
-            </a:r>
-            <a:endParaRPr lang="en-US" sz="1050" dirty="0"/>
+          <p:cNvPr id="18" name="Text 13"/>
+          <p:cNvSpPr/>
+          <p:nvPr/>
+        </p:nvSpPr>
+        <p:spPr>
+          <a:xfrm>
+            <a:off x="6583680" y="5504688"/>
+            <a:ext cx="4617720" cy="640080"/>
+          </a:xfrm>
+          <a:prstGeom prst="rect">
+            <a:avLst/>
+          </a:prstGeom>
+          <a:noFill/>
+          <a:ln/>
+        </p:spPr>
+        <p:txBody>
+          <a:bodyPr wrap="square" rtlCol="0" anchor="ctr"/>
+          <a:lstStyle/>
+          <a:p>
+            <a:pPr algn="ctr" indent="0" marL="0">
+              <a:buNone/>
+            </a:pPr>
+            <a:r>
+              <a:rPr lang="en-US" sz="950" i="1" dirty="0">
+                <a:solidFill>
+                  <a:srgbClr val="5B6B7A"/>
+                </a:solidFill>
+                <a:latin typeface="Calibri" pitchFamily="34" charset="0"/>
+                <a:ea typeface="Calibri" pitchFamily="34" charset="-122"/>
+                <a:cs typeface="Calibri" pitchFamily="34" charset="-120"/>
+              </a:rPr>
+              <a:t>Platform-wide stats overview — not yet implemented as of this build.</a:t>
+            </a:r>
+            <a:endParaRPr lang="en-US" sz="950" dirty="0"/>
+          </a:p>
+        </p:txBody>
+      </p:sp>
+      <p:sp>
+        <p:nvSpPr>
+          <p:cNvPr id="19" name="Text 14"/>
+          <p:cNvSpPr/>
+          <p:nvPr/>
+        </p:nvSpPr>
+        <p:spPr>
+          <a:xfrm>
+            <a:off x="457200" y="6537960"/>
+            <a:ext cx="7315200" cy="274320"/>
+          </a:xfrm>
+          <a:prstGeom prst="rect">
+            <a:avLst/>
+          </a:prstGeom>
+          <a:noFill/>
+          <a:ln/>
+        </p:spPr>
+        <p:txBody>
+          <a:bodyPr wrap="square" rtlCol="0" anchor="ctr"/>
+          <a:lstStyle/>
+          <a:p>
+            <a:pPr algn="l" indent="0" marL="0">
+              <a:buNone/>
+            </a:pPr>
+            <a:r>
+              <a:rPr lang="en-US" sz="900" dirty="0">
+                <a:solidFill>
+                  <a:srgbClr val="5B6B7A"/>
+                </a:solidFill>
+                <a:latin typeface="Calibri" pitchFamily="34" charset="0"/>
+                <a:ea typeface="Calibri" pitchFamily="34" charset="-122"/>
+                <a:cs typeface="Calibri" pitchFamily="34" charset="-120"/>
+              </a:rPr>
+              <a:t>VaxTrack v2.0.0 — Platform Overview</a:t>
+            </a:r>
+            <a:endParaRPr lang="en-US" sz="900" dirty="0"/>
           </a:p>
         </p:txBody>
       </p:sp>
@@ -3546,8 +3399,8 @@
         </p:nvSpPr>
         <p:spPr>
           <a:xfrm>
-            <a:off x="640080" y="411480"/>
-            <a:ext cx="10058400" cy="548640"/>
+            <a:off x="640080" y="384048"/>
+            <a:ext cx="10881360" cy="502920"/>
           </a:xfrm>
           <a:prstGeom prst="rect">
             <a:avLst/>
@@ -3563,7 +3416,7 @@
               <a:buNone/>
             </a:pPr>
             <a:r>
-              <a:rPr lang="en-US" sz="2600" b="1" dirty="0">
+              <a:rPr lang="en-US" sz="2200" b="1" dirty="0">
                 <a:solidFill>
                   <a:srgbClr val="0F2438"/>
                 </a:solidFill>
@@ -3571,9 +3424,9 @@
                 <a:ea typeface="Cambria" pitchFamily="34" charset="-122"/>
                 <a:cs typeface="Cambria" pitchFamily="34" charset="-120"/>
               </a:rPr>
-              <a:t>DOCUMENTATION &amp; GOVERNANCE</a:t>
-            </a:r>
-            <a:endParaRPr lang="en-US" sz="2600" dirty="0"/>
+              <a:t>PLATFORM IN ACTION — CERTIFICATES &amp; SELF-SERVICE</a:t>
+            </a:r>
+            <a:endParaRPr lang="en-US" sz="2200" dirty="0"/>
           </a:p>
         </p:txBody>
       </p:sp>
@@ -3585,8 +3438,8 @@
         </p:nvSpPr>
         <p:spPr>
           <a:xfrm>
-            <a:off x="640080" y="960120"/>
-            <a:ext cx="10515600" cy="365760"/>
+            <a:off x="640080" y="868680"/>
+            <a:ext cx="10881360" cy="320040"/>
           </a:xfrm>
           <a:prstGeom prst="rect">
             <a:avLst/>
@@ -3602,7 +3455,7 @@
               <a:buNone/>
             </a:pPr>
             <a:r>
-              <a:rPr lang="en-US" sz="1200" i="1" dirty="0">
+              <a:rPr lang="en-US" sz="1150" i="1" dirty="0">
                 <a:solidFill>
                   <a:srgbClr val="5B6B7A"/>
                 </a:solidFill>
@@ -3610,26 +3463,65 @@
                 <a:ea typeface="Calibri" pitchFamily="34" charset="-122"/>
                 <a:cs typeface="Calibri" pitchFamily="34" charset="-120"/>
               </a:rPr>
-              <a:t>This overview is backed by four full deliverables for teams that need the depth.</a:t>
-            </a:r>
-            <a:endParaRPr lang="en-US" sz="1200" dirty="0"/>
-          </a:p>
-        </p:txBody>
-      </p:sp>
-      <p:sp>
-        <p:nvSpPr>
-          <p:cNvPr id="4" name="Shape 2"/>
-          <p:cNvSpPr/>
-          <p:nvPr/>
-        </p:nvSpPr>
-        <p:spPr>
-          <a:xfrm>
-            <a:off x="640080" y="1508760"/>
-            <a:ext cx="5212080" cy="1828800"/>
+              <a:t>The loop closes here — a verifiable record, and a self-service path when something needs a human.</a:t>
+            </a:r>
+            <a:endParaRPr lang="en-US" sz="1150" dirty="0"/>
+          </a:p>
+        </p:txBody>
+      </p:sp>
+      <p:sp>
+        <p:nvSpPr>
+          <p:cNvPr id="4" name="Text 2"/>
+          <p:cNvSpPr/>
+          <p:nvPr/>
+        </p:nvSpPr>
+        <p:spPr>
+          <a:xfrm>
+            <a:off x="594360" y="1371600"/>
+            <a:ext cx="5349240" cy="256032"/>
+          </a:xfrm>
+          <a:prstGeom prst="rect">
+            <a:avLst/>
+          </a:prstGeom>
+          <a:noFill/>
+          <a:ln/>
+        </p:spPr>
+        <p:txBody>
+          <a:bodyPr wrap="square" rtlCol="0" anchor="ctr"/>
+          <a:lstStyle/>
+          <a:p>
+            <a:pPr indent="0" marL="0">
+              <a:buNone/>
+            </a:pPr>
+            <a:r>
+              <a:rPr lang="en-US" sz="1000" b="1" dirty="0">
+                <a:solidFill>
+                  <a:srgbClr val="5B6B7A"/>
+                </a:solidFill>
+                <a:latin typeface="Calibri" pitchFamily="34" charset="0"/>
+                <a:ea typeface="Calibri" pitchFamily="34" charset="-122"/>
+                <a:cs typeface="Calibri" pitchFamily="34" charset="-120"/>
+              </a:rPr>
+              <a:t>Public certificate verification (bookingId link)</a:t>
+            </a:r>
+            <a:endParaRPr lang="en-US" sz="1000" dirty="0"/>
+          </a:p>
+        </p:txBody>
+      </p:sp>
+      <p:sp>
+        <p:nvSpPr>
+          <p:cNvPr id="5" name="Shape 3"/>
+          <p:cNvSpPr/>
+          <p:nvPr/>
+        </p:nvSpPr>
+        <p:spPr>
+          <a:xfrm>
+            <a:off x="539496" y="1609344"/>
+            <a:ext cx="5458968" cy="4526280"/>
           </a:xfrm>
           <a:prstGeom prst="roundRect">
             <a:avLst>
-              <a:gd name="adj" fmla="val 4500"/>
+              <a:gd name="adj" fmla="val 1212"/>
             </a:avLst>
           </a:prstGeom>
           <a:solidFill>
@@ -3641,18 +3533,48 @@
             </a:solidFill>
             <a:prstDash val="solid"/>
           </a:ln>
-        </p:spPr>
-      </p:sp>
-      <p:sp>
-        <p:nvSpPr>
-          <p:cNvPr id="5" name="Text 3"/>
-          <p:cNvSpPr/>
-          <p:nvPr/>
-        </p:nvSpPr>
-        <p:spPr>
-          <a:xfrm>
-            <a:off x="896112" y="1691640"/>
-            <a:ext cx="4700016" cy="411480"/>
+          <a:effectLst>
+            <a:outerShdw sx="100000" sy="100000" kx="0" ky="0" algn="bl" rotWithShape="0" blurRad="76200" dist="25400" dir="5400000">
+              <a:srgbClr val="5B6B7A">
+                <a:alpha val="25000"/>
+              </a:srgbClr>
+            </a:outerShdw>
+          </a:effectLst>
+        </p:spPr>
+      </p:sp>
+      <p:pic>
+        <p:nvPicPr>
+          <p:cNvPr id="6" name="Image 0" descr="/tmp/build/imgs_v2/07-certificate-verify.png">    </p:cNvPr>
+          <p:cNvPicPr>
+            <a:picLocks noChangeAspect="1"/>
+          </p:cNvPicPr>
+          <p:nvPr/>
+        </p:nvPicPr>
+        <p:blipFill>
+          <a:blip r:embed="rId1"/>
+          <a:srcRect l="0" r="0" t="0" b="0"/>
+          <a:stretch/>
+        </p:blipFill>
+        <p:spPr>
+          <a:xfrm>
+            <a:off x="594360" y="1664208"/>
+            <a:ext cx="5349240" cy="4416552"/>
+          </a:xfrm>
+          <a:prstGeom prst="rect">
+            <a:avLst/>
+          </a:prstGeom>
+        </p:spPr>
+      </p:pic>
+      <p:sp>
+        <p:nvSpPr>
+          <p:cNvPr id="7" name="Text 4"/>
+          <p:cNvSpPr/>
+          <p:nvPr/>
+        </p:nvSpPr>
+        <p:spPr>
+          <a:xfrm>
+            <a:off x="6217920" y="1371600"/>
+            <a:ext cx="5349240" cy="256032"/>
           </a:xfrm>
           <a:prstGeom prst="rect">
             <a:avLst/>
@@ -3668,115 +3590,34 @@
               <a:buNone/>
             </a:pPr>
             <a:r>
-              <a:rPr lang="en-US" sz="1400" b="1" dirty="0">
-                <a:solidFill>
-                  <a:srgbClr val="0F2438"/>
-                </a:solidFill>
-                <a:latin typeface="Calibri" pitchFamily="34" charset="0"/>
-                <a:ea typeface="Calibri" pitchFamily="34" charset="-122"/>
-                <a:cs typeface="Calibri" pitchFamily="34" charset="-120"/>
-              </a:rPr>
-              <a:t>Functional Specification</a:t>
-            </a:r>
-            <a:endParaRPr lang="en-US" sz="1400" dirty="0"/>
-          </a:p>
-        </p:txBody>
-      </p:sp>
-      <p:sp>
-        <p:nvSpPr>
-          <p:cNvPr id="6" name="Text 4"/>
-          <p:cNvSpPr/>
-          <p:nvPr/>
-        </p:nvSpPr>
-        <p:spPr>
-          <a:xfrm>
-            <a:off x="896112" y="2130552"/>
-            <a:ext cx="4700016" cy="777240"/>
-          </a:xfrm>
-          <a:prstGeom prst="rect">
-            <a:avLst/>
-          </a:prstGeom>
-          <a:noFill/>
-          <a:ln/>
-        </p:spPr>
-        <p:txBody>
-          <a:bodyPr wrap="square" rtlCol="0" anchor="ctr"/>
-          <a:lstStyle/>
-          <a:p>
-            <a:pPr indent="0" marL="0">
-              <a:lnSpc>
-                <a:spcPct val="125000"/>
-              </a:lnSpc>
-              <a:buNone/>
-            </a:pPr>
-            <a:r>
-              <a:rPr lang="en-US" sz="1100" dirty="0">
-                <a:solidFill>
-                  <a:srgbClr val="1B2733"/>
-                </a:solidFill>
-                <a:latin typeface="Calibri" pitchFamily="34" charset="0"/>
-                <a:ea typeface="Calibri" pitchFamily="34" charset="-122"/>
-                <a:cs typeface="Calibri" pitchFamily="34" charset="-120"/>
-              </a:rPr>
-              <a:t>What the app does — business requirements, roles, workflows, permission matrix.</a:t>
-            </a:r>
-            <a:endParaRPr lang="en-US" sz="1100" dirty="0"/>
-          </a:p>
-        </p:txBody>
-      </p:sp>
-      <p:sp>
-        <p:nvSpPr>
-          <p:cNvPr id="7" name="Text 5"/>
-          <p:cNvSpPr/>
-          <p:nvPr/>
-        </p:nvSpPr>
-        <p:spPr>
-          <a:xfrm>
-            <a:off x="896112" y="2926080"/>
-            <a:ext cx="4700016" cy="320040"/>
-          </a:xfrm>
-          <a:prstGeom prst="rect">
-            <a:avLst/>
-          </a:prstGeom>
-          <a:noFill/>
-          <a:ln/>
-        </p:spPr>
-        <p:txBody>
-          <a:bodyPr wrap="square" rtlCol="0" anchor="ctr"/>
-          <a:lstStyle/>
-          <a:p>
-            <a:pPr indent="0" marL="0">
-              <a:buNone/>
-            </a:pPr>
-            <a:r>
-              <a:rPr lang="en-US" sz="950" b="1" dirty="0">
-                <a:solidFill>
-                  <a:srgbClr val="22C7B5"/>
-                </a:solidFill>
-                <a:latin typeface="Calibri" pitchFamily="34" charset="0"/>
-                <a:ea typeface="Calibri" pitchFamily="34" charset="-122"/>
-                <a:cs typeface="Calibri" pitchFamily="34" charset="-120"/>
-              </a:rPr>
-              <a:t>AUDIENCE:  Business stakeholders, all developers</a:t>
-            </a:r>
-            <a:endParaRPr lang="en-US" sz="950" dirty="0"/>
-          </a:p>
-        </p:txBody>
-      </p:sp>
-      <p:sp>
-        <p:nvSpPr>
-          <p:cNvPr id="8" name="Shape 6"/>
-          <p:cNvSpPr/>
-          <p:nvPr/>
-        </p:nvSpPr>
-        <p:spPr>
-          <a:xfrm>
-            <a:off x="6217920" y="1508760"/>
-            <a:ext cx="5212080" cy="1828800"/>
+              <a:rPr lang="en-US" sz="1000" b="1" dirty="0">
+                <a:solidFill>
+                  <a:srgbClr val="5B6B7A"/>
+                </a:solidFill>
+                <a:latin typeface="Calibri" pitchFamily="34" charset="0"/>
+                <a:ea typeface="Calibri" pitchFamily="34" charset="-122"/>
+                <a:cs typeface="Calibri" pitchFamily="34" charset="-120"/>
+              </a:rPr>
+              <a:t>Support — self-service + hospital-admin application queue</a:t>
+            </a:r>
+            <a:endParaRPr lang="en-US" sz="1000" dirty="0"/>
+          </a:p>
+        </p:txBody>
+      </p:sp>
+      <p:sp>
+        <p:nvSpPr>
+          <p:cNvPr id="8" name="Shape 5"/>
+          <p:cNvSpPr/>
+          <p:nvPr/>
+        </p:nvSpPr>
+        <p:spPr>
+          <a:xfrm>
+            <a:off x="6163056" y="1609344"/>
+            <a:ext cx="5458968" cy="4526280"/>
           </a:xfrm>
           <a:prstGeom prst="roundRect">
             <a:avLst>
-              <a:gd name="adj" fmla="val 4500"/>
+              <a:gd name="adj" fmla="val 1212"/>
             </a:avLst>
           </a:prstGeom>
           <a:solidFill>
@@ -3788,425 +3629,41 @@
             </a:solidFill>
             <a:prstDash val="solid"/>
           </a:ln>
-        </p:spPr>
-      </p:sp>
-      <p:sp>
-        <p:nvSpPr>
-          <p:cNvPr id="9" name="Text 7"/>
-          <p:cNvSpPr/>
-          <p:nvPr/>
-        </p:nvSpPr>
-        <p:spPr>
-          <a:xfrm>
-            <a:off x="6473952" y="1691640"/>
-            <a:ext cx="4700016" cy="411480"/>
-          </a:xfrm>
-          <a:prstGeom prst="rect">
-            <a:avLst/>
-          </a:prstGeom>
-          <a:noFill/>
-          <a:ln/>
-        </p:spPr>
-        <p:txBody>
-          <a:bodyPr wrap="square" rtlCol="0" anchor="ctr"/>
-          <a:lstStyle/>
-          <a:p>
-            <a:pPr indent="0" marL="0">
-              <a:buNone/>
-            </a:pPr>
-            <a:r>
-              <a:rPr lang="en-US" sz="1400" b="1" dirty="0">
-                <a:solidFill>
-                  <a:srgbClr val="0F2438"/>
-                </a:solidFill>
-                <a:latin typeface="Calibri" pitchFamily="34" charset="0"/>
-                <a:ea typeface="Calibri" pitchFamily="34" charset="-122"/>
-                <a:cs typeface="Calibri" pitchFamily="34" charset="-120"/>
-              </a:rPr>
-              <a:t>Technical Specification</a:t>
-            </a:r>
-            <a:endParaRPr lang="en-US" sz="1400" dirty="0"/>
-          </a:p>
-        </p:txBody>
-      </p:sp>
-      <p:sp>
-        <p:nvSpPr>
-          <p:cNvPr id="10" name="Text 8"/>
-          <p:cNvSpPr/>
-          <p:nvPr/>
-        </p:nvSpPr>
-        <p:spPr>
-          <a:xfrm>
-            <a:off x="6473952" y="2130552"/>
-            <a:ext cx="4700016" cy="777240"/>
-          </a:xfrm>
-          <a:prstGeom prst="rect">
-            <a:avLst/>
-          </a:prstGeom>
-          <a:noFill/>
-          <a:ln/>
-        </p:spPr>
-        <p:txBody>
-          <a:bodyPr wrap="square" rtlCol="0" anchor="ctr"/>
-          <a:lstStyle/>
-          <a:p>
-            <a:pPr indent="0" marL="0">
-              <a:lnSpc>
-                <a:spcPct val="125000"/>
-              </a:lnSpc>
-              <a:buNone/>
-            </a:pPr>
-            <a:r>
-              <a:rPr lang="en-US" sz="1100" dirty="0">
-                <a:solidFill>
-                  <a:srgbClr val="1B2733"/>
-                </a:solidFill>
-                <a:latin typeface="Calibri" pitchFamily="34" charset="0"/>
-                <a:ea typeface="Calibri" pitchFamily="34" charset="-122"/>
-                <a:cs typeface="Calibri" pitchFamily="34" charset="-120"/>
-              </a:rPr>
-              <a:t>How it's built — architecture, HLD/LLD, every module's frontend + backend detail.</a:t>
-            </a:r>
-            <a:endParaRPr lang="en-US" sz="1100" dirty="0"/>
-          </a:p>
-        </p:txBody>
-      </p:sp>
-      <p:sp>
-        <p:nvSpPr>
-          <p:cNvPr id="11" name="Text 9"/>
-          <p:cNvSpPr/>
-          <p:nvPr/>
-        </p:nvSpPr>
-        <p:spPr>
-          <a:xfrm>
-            <a:off x="6473952" y="2926080"/>
-            <a:ext cx="4700016" cy="320040"/>
-          </a:xfrm>
-          <a:prstGeom prst="rect">
-            <a:avLst/>
-          </a:prstGeom>
-          <a:noFill/>
-          <a:ln/>
-        </p:spPr>
-        <p:txBody>
-          <a:bodyPr wrap="square" rtlCol="0" anchor="ctr"/>
-          <a:lstStyle/>
-          <a:p>
-            <a:pPr indent="0" marL="0">
-              <a:buNone/>
-            </a:pPr>
-            <a:r>
-              <a:rPr lang="en-US" sz="950" b="1" dirty="0">
-                <a:solidFill>
-                  <a:srgbClr val="22C7B5"/>
-                </a:solidFill>
-                <a:latin typeface="Calibri" pitchFamily="34" charset="0"/>
-                <a:ea typeface="Calibri" pitchFamily="34" charset="-122"/>
-                <a:cs typeface="Calibri" pitchFamily="34" charset="-120"/>
-              </a:rPr>
-              <a:t>AUDIENCE:  Developers, QA, tech leads</a:t>
-            </a:r>
-            <a:endParaRPr lang="en-US" sz="950" dirty="0"/>
-          </a:p>
-        </p:txBody>
-      </p:sp>
-      <p:sp>
-        <p:nvSpPr>
-          <p:cNvPr id="12" name="Shape 10"/>
-          <p:cNvSpPr/>
-          <p:nvPr/>
-        </p:nvSpPr>
-        <p:spPr>
-          <a:xfrm>
-            <a:off x="640080" y="3566160"/>
-            <a:ext cx="5212080" cy="1828800"/>
-          </a:xfrm>
-          <a:prstGeom prst="roundRect">
-            <a:avLst>
-              <a:gd name="adj" fmla="val 4500"/>
-            </a:avLst>
-          </a:prstGeom>
-          <a:solidFill>
-            <a:srgbClr val="FFFFFF"/>
-          </a:solidFill>
-          <a:ln w="12700">
-            <a:solidFill>
-              <a:srgbClr val="EEF3F6"/>
-            </a:solidFill>
-            <a:prstDash val="solid"/>
-          </a:ln>
-        </p:spPr>
-      </p:sp>
-      <p:sp>
-        <p:nvSpPr>
-          <p:cNvPr id="13" name="Text 11"/>
-          <p:cNvSpPr/>
-          <p:nvPr/>
-        </p:nvSpPr>
-        <p:spPr>
-          <a:xfrm>
-            <a:off x="896112" y="3749040"/>
-            <a:ext cx="4700016" cy="411480"/>
-          </a:xfrm>
-          <a:prstGeom prst="rect">
-            <a:avLst/>
-          </a:prstGeom>
-          <a:noFill/>
-          <a:ln/>
-        </p:spPr>
-        <p:txBody>
-          <a:bodyPr wrap="square" rtlCol="0" anchor="ctr"/>
-          <a:lstStyle/>
-          <a:p>
-            <a:pPr indent="0" marL="0">
-              <a:buNone/>
-            </a:pPr>
-            <a:r>
-              <a:rPr lang="en-US" sz="1400" b="1" dirty="0">
-                <a:solidFill>
-                  <a:srgbClr val="0F2438"/>
-                </a:solidFill>
-                <a:latin typeface="Calibri" pitchFamily="34" charset="0"/>
-                <a:ea typeface="Calibri" pitchFamily="34" charset="-122"/>
-                <a:cs typeface="Calibri" pitchFamily="34" charset="-120"/>
-              </a:rPr>
-              <a:t>Test Case Sheet</a:t>
-            </a:r>
-            <a:endParaRPr lang="en-US" sz="1400" dirty="0"/>
-          </a:p>
-        </p:txBody>
-      </p:sp>
-      <p:sp>
-        <p:nvSpPr>
-          <p:cNvPr id="14" name="Text 12"/>
-          <p:cNvSpPr/>
-          <p:nvPr/>
-        </p:nvSpPr>
-        <p:spPr>
-          <a:xfrm>
-            <a:off x="896112" y="4187952"/>
-            <a:ext cx="4700016" cy="777240"/>
-          </a:xfrm>
-          <a:prstGeom prst="rect">
-            <a:avLst/>
-          </a:prstGeom>
-          <a:noFill/>
-          <a:ln/>
-        </p:spPr>
-        <p:txBody>
-          <a:bodyPr wrap="square" rtlCol="0" anchor="ctr"/>
-          <a:lstStyle/>
-          <a:p>
-            <a:pPr indent="0" marL="0">
-              <a:lnSpc>
-                <a:spcPct val="125000"/>
-              </a:lnSpc>
-              <a:buNone/>
-            </a:pPr>
-            <a:r>
-              <a:rPr lang="en-US" sz="1100" dirty="0">
-                <a:solidFill>
-                  <a:srgbClr val="1B2733"/>
-                </a:solidFill>
-                <a:latin typeface="Calibri" pitchFamily="34" charset="0"/>
-                <a:ea typeface="Calibri" pitchFamily="34" charset="-122"/>
-                <a:cs typeface="Calibri" pitchFamily="34" charset="-120"/>
-              </a:rPr>
-              <a:t>QA test cases across every module and feature.</a:t>
-            </a:r>
-            <a:endParaRPr lang="en-US" sz="1100" dirty="0"/>
-          </a:p>
-        </p:txBody>
-      </p:sp>
-      <p:sp>
-        <p:nvSpPr>
-          <p:cNvPr id="15" name="Text 13"/>
-          <p:cNvSpPr/>
-          <p:nvPr/>
-        </p:nvSpPr>
-        <p:spPr>
-          <a:xfrm>
-            <a:off x="896112" y="4983480"/>
-            <a:ext cx="4700016" cy="320040"/>
-          </a:xfrm>
-          <a:prstGeom prst="rect">
-            <a:avLst/>
-          </a:prstGeom>
-          <a:noFill/>
-          <a:ln/>
-        </p:spPr>
-        <p:txBody>
-          <a:bodyPr wrap="square" rtlCol="0" anchor="ctr"/>
-          <a:lstStyle/>
-          <a:p>
-            <a:pPr indent="0" marL="0">
-              <a:buNone/>
-            </a:pPr>
-            <a:r>
-              <a:rPr lang="en-US" sz="950" b="1" dirty="0">
-                <a:solidFill>
-                  <a:srgbClr val="22C7B5"/>
-                </a:solidFill>
-                <a:latin typeface="Calibri" pitchFamily="34" charset="0"/>
-                <a:ea typeface="Calibri" pitchFamily="34" charset="-122"/>
-                <a:cs typeface="Calibri" pitchFamily="34" charset="-120"/>
-              </a:rPr>
-              <a:t>AUDIENCE:  QA, developers, tech/team leads</a:t>
-            </a:r>
-            <a:endParaRPr lang="en-US" sz="950" dirty="0"/>
-          </a:p>
-        </p:txBody>
-      </p:sp>
-      <p:sp>
-        <p:nvSpPr>
-          <p:cNvPr id="16" name="Shape 14"/>
-          <p:cNvSpPr/>
-          <p:nvPr/>
-        </p:nvSpPr>
-        <p:spPr>
-          <a:xfrm>
-            <a:off x="6217920" y="3566160"/>
-            <a:ext cx="5212080" cy="1828800"/>
-          </a:xfrm>
-          <a:prstGeom prst="roundRect">
-            <a:avLst>
-              <a:gd name="adj" fmla="val 4500"/>
-            </a:avLst>
-          </a:prstGeom>
-          <a:solidFill>
-            <a:srgbClr val="FFFFFF"/>
-          </a:solidFill>
-          <a:ln w="12700">
-            <a:solidFill>
-              <a:srgbClr val="EEF3F6"/>
-            </a:solidFill>
-            <a:prstDash val="solid"/>
-          </a:ln>
-        </p:spPr>
-      </p:sp>
-      <p:sp>
-        <p:nvSpPr>
-          <p:cNvPr id="17" name="Text 15"/>
-          <p:cNvSpPr/>
-          <p:nvPr/>
-        </p:nvSpPr>
-        <p:spPr>
-          <a:xfrm>
-            <a:off x="6473952" y="3749040"/>
-            <a:ext cx="4700016" cy="411480"/>
-          </a:xfrm>
-          <a:prstGeom prst="rect">
-            <a:avLst/>
-          </a:prstGeom>
-          <a:noFill/>
-          <a:ln/>
-        </p:spPr>
-        <p:txBody>
-          <a:bodyPr wrap="square" rtlCol="0" anchor="ctr"/>
-          <a:lstStyle/>
-          <a:p>
-            <a:pPr indent="0" marL="0">
-              <a:buNone/>
-            </a:pPr>
-            <a:r>
-              <a:rPr lang="en-US" sz="1400" b="1" dirty="0">
-                <a:solidFill>
-                  <a:srgbClr val="0F2438"/>
-                </a:solidFill>
-                <a:latin typeface="Calibri" pitchFamily="34" charset="0"/>
-                <a:ea typeface="Calibri" pitchFamily="34" charset="-122"/>
-                <a:cs typeface="Calibri" pitchFamily="34" charset="-120"/>
-              </a:rPr>
-              <a:t>Project Development Review</a:t>
-            </a:r>
-            <a:endParaRPr lang="en-US" sz="1400" dirty="0"/>
-          </a:p>
-        </p:txBody>
-      </p:sp>
-      <p:sp>
-        <p:nvSpPr>
-          <p:cNvPr id="18" name="Text 16"/>
-          <p:cNvSpPr/>
-          <p:nvPr/>
-        </p:nvSpPr>
-        <p:spPr>
-          <a:xfrm>
-            <a:off x="6473952" y="4187952"/>
-            <a:ext cx="4700016" cy="777240"/>
-          </a:xfrm>
-          <a:prstGeom prst="rect">
-            <a:avLst/>
-          </a:prstGeom>
-          <a:noFill/>
-          <a:ln/>
-        </p:spPr>
-        <p:txBody>
-          <a:bodyPr wrap="square" rtlCol="0" anchor="ctr"/>
-          <a:lstStyle/>
-          <a:p>
-            <a:pPr indent="0" marL="0">
-              <a:lnSpc>
-                <a:spcPct val="125000"/>
-              </a:lnSpc>
-              <a:buNone/>
-            </a:pPr>
-            <a:r>
-              <a:rPr lang="en-US" sz="1100" dirty="0">
-                <a:solidFill>
-                  <a:srgbClr val="1B2733"/>
-                </a:solidFill>
-                <a:latin typeface="Calibri" pitchFamily="34" charset="0"/>
-                <a:ea typeface="Calibri" pitchFamily="34" charset="-122"/>
-                <a:cs typeface="Calibri" pitchFamily="34" charset="-120"/>
-              </a:rPr>
-              <a:t>Structured Q&amp;A covering every part of the build, for design review.</a:t>
-            </a:r>
-            <a:endParaRPr lang="en-US" sz="1100" dirty="0"/>
-          </a:p>
-        </p:txBody>
-      </p:sp>
-      <p:sp>
-        <p:nvSpPr>
-          <p:cNvPr id="19" name="Text 17"/>
-          <p:cNvSpPr/>
-          <p:nvPr/>
-        </p:nvSpPr>
-        <p:spPr>
-          <a:xfrm>
-            <a:off x="6473952" y="4983480"/>
-            <a:ext cx="4700016" cy="320040"/>
-          </a:xfrm>
-          <a:prstGeom prst="rect">
-            <a:avLst/>
-          </a:prstGeom>
-          <a:noFill/>
-          <a:ln/>
-        </p:spPr>
-        <p:txBody>
-          <a:bodyPr wrap="square" rtlCol="0" anchor="ctr"/>
-          <a:lstStyle/>
-          <a:p>
-            <a:pPr indent="0" marL="0">
-              <a:buNone/>
-            </a:pPr>
-            <a:r>
-              <a:rPr lang="en-US" sz="950" b="1" dirty="0">
-                <a:solidFill>
-                  <a:srgbClr val="22C7B5"/>
-                </a:solidFill>
-                <a:latin typeface="Calibri" pitchFamily="34" charset="0"/>
-                <a:ea typeface="Calibri" pitchFamily="34" charset="-122"/>
-                <a:cs typeface="Calibri" pitchFamily="34" charset="-120"/>
-              </a:rPr>
-              <a:t>AUDIENCE:  Tech leads, delivery managers, senior devs</a:t>
-            </a:r>
-            <a:endParaRPr lang="en-US" sz="950" dirty="0"/>
-          </a:p>
-        </p:txBody>
-      </p:sp>
-      <p:sp>
-        <p:nvSpPr>
-          <p:cNvPr id="20" name="Text 18"/>
+          <a:effectLst>
+            <a:outerShdw sx="100000" sy="100000" kx="0" ky="0" algn="bl" rotWithShape="0" blurRad="76200" dist="25400" dir="5400000">
+              <a:srgbClr val="5B6B7A">
+                <a:alpha val="25000"/>
+              </a:srgbClr>
+            </a:outerShdw>
+          </a:effectLst>
+        </p:spPr>
+      </p:sp>
+      <p:pic>
+        <p:nvPicPr>
+          <p:cNvPr id="9" name="Image 1" descr="/tmp/build/imgs_v2/10-support-pending-request.png">    </p:cNvPr>
+          <p:cNvPicPr>
+            <a:picLocks noChangeAspect="1"/>
+          </p:cNvPicPr>
+          <p:nvPr/>
+        </p:nvPicPr>
+        <p:blipFill>
+          <a:blip r:embed="rId2"/>
+          <a:srcRect l="0" r="0" t="0" b="0"/>
+          <a:stretch/>
+        </p:blipFill>
+        <p:spPr>
+          <a:xfrm>
+            <a:off x="6217920" y="1664208"/>
+            <a:ext cx="5349240" cy="4416552"/>
+          </a:xfrm>
+          <a:prstGeom prst="rect">
+            <a:avLst/>
+          </a:prstGeom>
+        </p:spPr>
+      </p:pic>
+      <p:sp>
+        <p:nvSpPr>
+          <p:cNvPr id="10" name="Text 6"/>
           <p:cNvSpPr/>
           <p:nvPr/>
         </p:nvSpPr>
@@ -4284,7 +3741,7 @@
         <p:spPr>
           <a:xfrm>
             <a:off x="640080" y="411480"/>
-            <a:ext cx="9144000" cy="548640"/>
+            <a:ext cx="10058400" cy="548640"/>
           </a:xfrm>
           <a:prstGeom prst="rect">
             <a:avLst/>
@@ -4300,7 +3757,7 @@
               <a:buNone/>
             </a:pPr>
             <a:r>
-              <a:rPr lang="en-US" sz="2800" b="1" dirty="0">
+              <a:rPr lang="en-US" sz="2600" b="1" dirty="0">
                 <a:solidFill>
                   <a:srgbClr val="0F2438"/>
                 </a:solidFill>
@@ -4308,9 +3765,9 @@
                 <a:ea typeface="Cambria" pitchFamily="34" charset="-122"/>
                 <a:cs typeface="Cambria" pitchFamily="34" charset="-120"/>
               </a:rPr>
-              <a:t>WHAT'S NEXT</a:t>
-            </a:r>
-            <a:endParaRPr lang="en-US" sz="2800" dirty="0"/>
+              <a:t>BUSINESS RULES &amp; GUARDRAILS</a:t>
+            </a:r>
+            <a:endParaRPr lang="en-US" sz="2600" dirty="0"/>
           </a:p>
         </p:txBody>
       </p:sp>
@@ -4347,7 +3804,7 @@
                 <a:ea typeface="Calibri" pitchFamily="34" charset="-122"/>
                 <a:cs typeface="Calibri" pitchFamily="34" charset="-120"/>
               </a:rPr>
-              <a:t>Explicitly out of scope for this release — candidates for a future one, not gaps in today's requirements.</a:t>
+              <a:t>A sample of the rules that keep capacity and identity from being abused.</a:t>
             </a:r>
             <a:endParaRPr lang="en-US" sz="1200" dirty="0"/>
           </a:p>
@@ -4361,16 +3818,23 @@
         </p:nvSpPr>
         <p:spPr>
           <a:xfrm>
-            <a:off x="640080" y="1691640"/>
-            <a:ext cx="329184" cy="329184"/>
-          </a:xfrm>
-          <a:prstGeom prst="ellipse">
-            <a:avLst/>
+            <a:off x="640080" y="1508760"/>
+            <a:ext cx="5257800" cy="1371600"/>
+          </a:xfrm>
+          <a:prstGeom prst="roundRect">
+            <a:avLst>
+              <a:gd name="adj" fmla="val 5333"/>
+            </a:avLst>
           </a:prstGeom>
           <a:solidFill>
-            <a:srgbClr val="0F2438"/>
+            <a:srgbClr val="FFFFFF"/>
           </a:solidFill>
-          <a:ln/>
+          <a:ln w="12700">
+            <a:solidFill>
+              <a:srgbClr val="EEF3F6"/>
+            </a:solidFill>
+            <a:prstDash val="solid"/>
+          </a:ln>
         </p:spPr>
       </p:sp>
       <p:sp>
@@ -4381,47 +3845,8 @@
         </p:nvSpPr>
         <p:spPr>
           <a:xfrm>
-            <a:off x="640080" y="1691640"/>
-            <a:ext cx="329184" cy="329184"/>
-          </a:xfrm>
-          <a:prstGeom prst="rect">
-            <a:avLst/>
-          </a:prstGeom>
-          <a:noFill/>
-          <a:ln/>
-        </p:spPr>
-        <p:txBody>
-          <a:bodyPr wrap="none" rtlCol="0" anchor="ctr"/>
-          <a:lstStyle/>
-          <a:p>
-            <a:pPr algn="ctr" indent="0" marL="0">
-              <a:buNone/>
-            </a:pPr>
-            <a:r>
-              <a:rPr lang="en-US" sz="1500" b="1" dirty="0">
-                <a:solidFill>
-                  <a:srgbClr val="22C7B5"/>
-                </a:solidFill>
-                <a:latin typeface="Calibri" pitchFamily="34" charset="0"/>
-                <a:ea typeface="Calibri" pitchFamily="34" charset="-122"/>
-                <a:cs typeface="Calibri" pitchFamily="34" charset="-120"/>
-              </a:rPr>
-              <a:t>→</a:t>
-            </a:r>
-            <a:endParaRPr lang="en-US" sz="1500" dirty="0"/>
-          </a:p>
-        </p:txBody>
-      </p:sp>
-      <p:sp>
-        <p:nvSpPr>
-          <p:cNvPr id="6" name="Text 4"/>
-          <p:cNvSpPr/>
-          <p:nvPr/>
-        </p:nvSpPr>
-        <p:spPr>
-          <a:xfrm>
-            <a:off x="1143000" y="1600200"/>
-            <a:ext cx="4754880" cy="1097280"/>
+            <a:off x="841248" y="1636776"/>
+            <a:ext cx="4855464" cy="594360"/>
           </a:xfrm>
           <a:prstGeom prst="rect">
             <a:avLst/>
@@ -4435,12 +3860,12 @@
           <a:p>
             <a:pPr indent="0" marL="0">
               <a:lnSpc>
-                <a:spcPct val="125000"/>
+                <a:spcPct val="115000"/>
               </a:lnSpc>
               <a:buNone/>
             </a:pPr>
             <a:r>
-              <a:rPr lang="en-US" sz="1150" dirty="0">
+              <a:rPr lang="en-US" sz="1200" b="1" dirty="0">
                 <a:solidFill>
                   <a:srgbClr val="1B2733"/>
                 </a:solidFill>
@@ -4448,81 +3873,22 @@
                 <a:ea typeface="Calibri" pitchFamily="34" charset="-122"/>
                 <a:cs typeface="Calibri" pitchFamily="34" charset="-120"/>
               </a:rPr>
-              <a:t>Outbound email/SMS delivery of notifications, reset tokens, and certificates (in-app only today).</a:t>
-            </a:r>
-            <a:endParaRPr lang="en-US" sz="1150" dirty="0"/>
-          </a:p>
-        </p:txBody>
-      </p:sp>
-      <p:sp>
-        <p:nvSpPr>
-          <p:cNvPr id="7" name="Shape 5"/>
-          <p:cNvSpPr/>
-          <p:nvPr/>
-        </p:nvSpPr>
-        <p:spPr>
-          <a:xfrm>
-            <a:off x="6263640" y="1691640"/>
-            <a:ext cx="329184" cy="329184"/>
-          </a:xfrm>
-          <a:prstGeom prst="ellipse">
-            <a:avLst/>
-          </a:prstGeom>
-          <a:solidFill>
-            <a:srgbClr val="0F2438"/>
-          </a:solidFill>
-          <a:ln/>
-        </p:spPr>
-      </p:sp>
-      <p:sp>
-        <p:nvSpPr>
-          <p:cNvPr id="8" name="Text 6"/>
-          <p:cNvSpPr/>
-          <p:nvPr/>
-        </p:nvSpPr>
-        <p:spPr>
-          <a:xfrm>
-            <a:off x="6263640" y="1691640"/>
-            <a:ext cx="329184" cy="329184"/>
-          </a:xfrm>
-          <a:prstGeom prst="rect">
-            <a:avLst/>
-          </a:prstGeom>
-          <a:noFill/>
-          <a:ln/>
-        </p:spPr>
-        <p:txBody>
-          <a:bodyPr wrap="none" rtlCol="0" anchor="ctr"/>
-          <a:lstStyle/>
-          <a:p>
-            <a:pPr algn="ctr" indent="0" marL="0">
-              <a:buNone/>
-            </a:pPr>
-            <a:r>
-              <a:rPr lang="en-US" sz="1500" b="1" dirty="0">
-                <a:solidFill>
-                  <a:srgbClr val="22C7B5"/>
-                </a:solidFill>
-                <a:latin typeface="Calibri" pitchFamily="34" charset="0"/>
-                <a:ea typeface="Calibri" pitchFamily="34" charset="-122"/>
-                <a:cs typeface="Calibri" pitchFamily="34" charset="-120"/>
-              </a:rPr>
-              <a:t>→</a:t>
-            </a:r>
-            <a:endParaRPr lang="en-US" sz="1500" dirty="0"/>
-          </a:p>
-        </p:txBody>
-      </p:sp>
-      <p:sp>
-        <p:nvSpPr>
-          <p:cNvPr id="9" name="Text 7"/>
-          <p:cNvSpPr/>
-          <p:nvPr/>
-        </p:nvSpPr>
-        <p:spPr>
-          <a:xfrm>
-            <a:off x="6766560" y="1600200"/>
-            <a:ext cx="4754880" cy="1097280"/>
+              <a:t>No double-booking, no booking on someone else's behalf</a:t>
+            </a:r>
+            <a:endParaRPr lang="en-US" sz="1200" dirty="0"/>
+          </a:p>
+        </p:txBody>
+      </p:sp>
+      <p:sp>
+        <p:nvSpPr>
+          <p:cNvPr id="6" name="Text 4"/>
+          <p:cNvSpPr/>
+          <p:nvPr/>
+        </p:nvSpPr>
+        <p:spPr>
+          <a:xfrm>
+            <a:off x="841248" y="2221992"/>
+            <a:ext cx="4855464" cy="594360"/>
           </a:xfrm>
           <a:prstGeom prst="rect">
             <a:avLst/>
@@ -4536,94 +3902,62 @@
           <a:p>
             <a:pPr indent="0" marL="0">
               <a:lnSpc>
-                <a:spcPct val="125000"/>
+                <a:spcPct val="120000"/>
               </a:lnSpc>
               <a:buNone/>
             </a:pPr>
             <a:r>
-              <a:rPr lang="en-US" sz="1150" dirty="0">
-                <a:solidFill>
-                  <a:srgbClr val="1B2733"/>
-                </a:solidFill>
-                <a:latin typeface="Calibri" pitchFamily="34" charset="0"/>
-                <a:ea typeface="Calibri" pitchFamily="34" charset="-122"/>
-                <a:cs typeface="Calibri" pitchFamily="34" charset="-120"/>
-              </a:rPr>
-              <a:t>Payment processing — the platform does not charge for bookings.</a:t>
-            </a:r>
-            <a:endParaRPr lang="en-US" sz="1150" dirty="0"/>
-          </a:p>
-        </p:txBody>
-      </p:sp>
-      <p:sp>
-        <p:nvSpPr>
-          <p:cNvPr id="10" name="Shape 8"/>
-          <p:cNvSpPr/>
-          <p:nvPr/>
-        </p:nvSpPr>
-        <p:spPr>
-          <a:xfrm>
-            <a:off x="640080" y="2926080"/>
-            <a:ext cx="329184" cy="329184"/>
-          </a:xfrm>
-          <a:prstGeom prst="ellipse">
-            <a:avLst/>
+              <a:rPr lang="en-US" sz="1050" dirty="0">
+                <a:solidFill>
+                  <a:srgbClr val="5B6B7A"/>
+                </a:solidFill>
+                <a:latin typeface="Calibri" pitchFamily="34" charset="0"/>
+                <a:ea typeface="Calibri" pitchFamily="34" charset="-122"/>
+                <a:cs typeface="Calibri" pitchFamily="34" charset="-120"/>
+              </a:rPr>
+              <a:t>Every booking is tied to the authenticated caller's own identity.</a:t>
+            </a:r>
+            <a:endParaRPr lang="en-US" sz="1050" dirty="0"/>
+          </a:p>
+        </p:txBody>
+      </p:sp>
+      <p:sp>
+        <p:nvSpPr>
+          <p:cNvPr id="7" name="Shape 5"/>
+          <p:cNvSpPr/>
+          <p:nvPr/>
+        </p:nvSpPr>
+        <p:spPr>
+          <a:xfrm>
+            <a:off x="6263640" y="1508760"/>
+            <a:ext cx="5257800" cy="1371600"/>
+          </a:xfrm>
+          <a:prstGeom prst="roundRect">
+            <a:avLst>
+              <a:gd name="adj" fmla="val 5333"/>
+            </a:avLst>
           </a:prstGeom>
           <a:solidFill>
-            <a:srgbClr val="0F2438"/>
+            <a:srgbClr val="FFFFFF"/>
           </a:solidFill>
-          <a:ln/>
-        </p:spPr>
-      </p:sp>
-      <p:sp>
-        <p:nvSpPr>
-          <p:cNvPr id="11" name="Text 9"/>
-          <p:cNvSpPr/>
-          <p:nvPr/>
-        </p:nvSpPr>
-        <p:spPr>
-          <a:xfrm>
-            <a:off x="640080" y="2926080"/>
-            <a:ext cx="329184" cy="329184"/>
-          </a:xfrm>
-          <a:prstGeom prst="rect">
-            <a:avLst/>
-          </a:prstGeom>
-          <a:noFill/>
-          <a:ln/>
-        </p:spPr>
-        <p:txBody>
-          <a:bodyPr wrap="none" rtlCol="0" anchor="ctr"/>
-          <a:lstStyle/>
-          <a:p>
-            <a:pPr algn="ctr" indent="0" marL="0">
-              <a:buNone/>
-            </a:pPr>
-            <a:r>
-              <a:rPr lang="en-US" sz="1500" b="1" dirty="0">
-                <a:solidFill>
-                  <a:srgbClr val="22C7B5"/>
-                </a:solidFill>
-                <a:latin typeface="Calibri" pitchFamily="34" charset="0"/>
-                <a:ea typeface="Calibri" pitchFamily="34" charset="-122"/>
-                <a:cs typeface="Calibri" pitchFamily="34" charset="-120"/>
-              </a:rPr>
-              <a:t>→</a:t>
-            </a:r>
-            <a:endParaRPr lang="en-US" sz="1500" dirty="0"/>
-          </a:p>
-        </p:txBody>
-      </p:sp>
-      <p:sp>
-        <p:nvSpPr>
-          <p:cNvPr id="12" name="Text 10"/>
-          <p:cNvSpPr/>
-          <p:nvPr/>
-        </p:nvSpPr>
-        <p:spPr>
-          <a:xfrm>
-            <a:off x="1143000" y="2834640"/>
-            <a:ext cx="4754880" cy="1097280"/>
+          <a:ln w="12700">
+            <a:solidFill>
+              <a:srgbClr val="EEF3F6"/>
+            </a:solidFill>
+            <a:prstDash val="solid"/>
+          </a:ln>
+        </p:spPr>
+      </p:sp>
+      <p:sp>
+        <p:nvSpPr>
+          <p:cNvPr id="8" name="Text 6"/>
+          <p:cNvSpPr/>
+          <p:nvPr/>
+        </p:nvSpPr>
+        <p:spPr>
+          <a:xfrm>
+            <a:off x="6464808" y="1636776"/>
+            <a:ext cx="4855464" cy="594360"/>
           </a:xfrm>
           <a:prstGeom prst="rect">
             <a:avLst/>
@@ -4637,12 +3971,12 @@
           <a:p>
             <a:pPr indent="0" marL="0">
               <a:lnSpc>
-                <a:spcPct val="125000"/>
+                <a:spcPct val="115000"/>
               </a:lnSpc>
               <a:buNone/>
             </a:pPr>
             <a:r>
-              <a:rPr lang="en-US" sz="1150" dirty="0">
+              <a:rPr lang="en-US" sz="1200" b="1" dirty="0">
                 <a:solidFill>
                   <a:srgbClr val="1B2733"/>
                 </a:solidFill>
@@ -4650,81 +3984,22 @@
                 <a:ea typeface="Calibri" pitchFamily="34" charset="-122"/>
                 <a:cs typeface="Calibri" pitchFamily="34" charset="-120"/>
               </a:rPr>
-              <a:t>Third-party identity provider (SSO/OAuth) login — first-party email/password only today.</a:t>
-            </a:r>
-            <a:endParaRPr lang="en-US" sz="1150" dirty="0"/>
-          </a:p>
-        </p:txBody>
-      </p:sp>
-      <p:sp>
-        <p:nvSpPr>
-          <p:cNvPr id="13" name="Shape 11"/>
-          <p:cNvSpPr/>
-          <p:nvPr/>
-        </p:nvSpPr>
-        <p:spPr>
-          <a:xfrm>
-            <a:off x="6263640" y="2926080"/>
-            <a:ext cx="329184" cy="329184"/>
-          </a:xfrm>
-          <a:prstGeom prst="ellipse">
-            <a:avLst/>
-          </a:prstGeom>
-          <a:solidFill>
-            <a:srgbClr val="0F2438"/>
-          </a:solidFill>
-          <a:ln/>
-        </p:spPr>
-      </p:sp>
-      <p:sp>
-        <p:nvSpPr>
-          <p:cNvPr id="14" name="Text 12"/>
-          <p:cNvSpPr/>
-          <p:nvPr/>
-        </p:nvSpPr>
-        <p:spPr>
-          <a:xfrm>
-            <a:off x="6263640" y="2926080"/>
-            <a:ext cx="329184" cy="329184"/>
-          </a:xfrm>
-          <a:prstGeom prst="rect">
-            <a:avLst/>
-          </a:prstGeom>
-          <a:noFill/>
-          <a:ln/>
-        </p:spPr>
-        <p:txBody>
-          <a:bodyPr wrap="none" rtlCol="0" anchor="ctr"/>
-          <a:lstStyle/>
-          <a:p>
-            <a:pPr algn="ctr" indent="0" marL="0">
-              <a:buNone/>
-            </a:pPr>
-            <a:r>
-              <a:rPr lang="en-US" sz="1500" b="1" dirty="0">
-                <a:solidFill>
-                  <a:srgbClr val="22C7B5"/>
-                </a:solidFill>
-                <a:latin typeface="Calibri" pitchFamily="34" charset="0"/>
-                <a:ea typeface="Calibri" pitchFamily="34" charset="-122"/>
-                <a:cs typeface="Calibri" pitchFamily="34" charset="-120"/>
-              </a:rPr>
-              <a:t>→</a:t>
-            </a:r>
-            <a:endParaRPr lang="en-US" sz="1500" dirty="0"/>
-          </a:p>
-        </p:txBody>
-      </p:sp>
-      <p:sp>
-        <p:nvSpPr>
-          <p:cNvPr id="15" name="Text 13"/>
-          <p:cNvSpPr/>
-          <p:nvPr/>
-        </p:nvSpPr>
-        <p:spPr>
-          <a:xfrm>
-            <a:off x="6766560" y="2834640"/>
-            <a:ext cx="4754880" cy="1097280"/>
+              <a:t>No login for a disabled account, under any circumstance</a:t>
+            </a:r>
+            <a:endParaRPr lang="en-US" sz="1200" dirty="0"/>
+          </a:p>
+        </p:txBody>
+      </p:sp>
+      <p:sp>
+        <p:nvSpPr>
+          <p:cNvPr id="9" name="Text 7"/>
+          <p:cNvSpPr/>
+          <p:nvPr/>
+        </p:nvSpPr>
+        <p:spPr>
+          <a:xfrm>
+            <a:off x="6464808" y="2221992"/>
+            <a:ext cx="4855464" cy="594360"/>
           </a:xfrm>
           <a:prstGeom prst="rect">
             <a:avLst/>
@@ -4738,94 +4013,62 @@
           <a:p>
             <a:pPr indent="0" marL="0">
               <a:lnSpc>
-                <a:spcPct val="125000"/>
+                <a:spcPct val="120000"/>
               </a:lnSpc>
               <a:buNone/>
             </a:pPr>
             <a:r>
-              <a:rPr lang="en-US" sz="1150" dirty="0">
-                <a:solidFill>
-                  <a:srgbClr val="1B2733"/>
-                </a:solidFill>
-                <a:latin typeface="Calibri" pitchFamily="34" charset="0"/>
-                <a:ea typeface="Calibri" pitchFamily="34" charset="-122"/>
-                <a:cs typeface="Calibri" pitchFamily="34" charset="-120"/>
-              </a:rPr>
-              <a:t>Multi-language / localisation support.</a:t>
-            </a:r>
-            <a:endParaRPr lang="en-US" sz="1150" dirty="0"/>
-          </a:p>
-        </p:txBody>
-      </p:sp>
-      <p:sp>
-        <p:nvSpPr>
-          <p:cNvPr id="16" name="Shape 14"/>
-          <p:cNvSpPr/>
-          <p:nvPr/>
-        </p:nvSpPr>
-        <p:spPr>
-          <a:xfrm>
-            <a:off x="640080" y="4160520"/>
-            <a:ext cx="329184" cy="329184"/>
-          </a:xfrm>
-          <a:prstGeom prst="ellipse">
-            <a:avLst/>
+              <a:rPr lang="en-US" sz="1050" dirty="0">
+                <a:solidFill>
+                  <a:srgbClr val="5B6B7A"/>
+                </a:solidFill>
+                <a:latin typeface="Calibri" pitchFamily="34" charset="0"/>
+                <a:ea typeface="Calibri" pitchFamily="34" charset="-122"/>
+                <a:cs typeface="Calibri" pitchFamily="34" charset="-120"/>
+              </a:rPr>
+              <a:t>Reactivation requires an explicit platform-admin approval.</a:t>
+            </a:r>
+            <a:endParaRPr lang="en-US" sz="1050" dirty="0"/>
+          </a:p>
+        </p:txBody>
+      </p:sp>
+      <p:sp>
+        <p:nvSpPr>
+          <p:cNvPr id="10" name="Shape 8"/>
+          <p:cNvSpPr/>
+          <p:nvPr/>
+        </p:nvSpPr>
+        <p:spPr>
+          <a:xfrm>
+            <a:off x="640080" y="3017520"/>
+            <a:ext cx="5257800" cy="1371600"/>
+          </a:xfrm>
+          <a:prstGeom prst="roundRect">
+            <a:avLst>
+              <a:gd name="adj" fmla="val 5333"/>
+            </a:avLst>
           </a:prstGeom>
           <a:solidFill>
-            <a:srgbClr val="0F2438"/>
+            <a:srgbClr val="FFFFFF"/>
           </a:solidFill>
-          <a:ln/>
-        </p:spPr>
-      </p:sp>
-      <p:sp>
-        <p:nvSpPr>
-          <p:cNvPr id="17" name="Text 15"/>
-          <p:cNvSpPr/>
-          <p:nvPr/>
-        </p:nvSpPr>
-        <p:spPr>
-          <a:xfrm>
-            <a:off x="640080" y="4160520"/>
-            <a:ext cx="329184" cy="329184"/>
-          </a:xfrm>
-          <a:prstGeom prst="rect">
-            <a:avLst/>
-          </a:prstGeom>
-          <a:noFill/>
-          <a:ln/>
-        </p:spPr>
-        <p:txBody>
-          <a:bodyPr wrap="none" rtlCol="0" anchor="ctr"/>
-          <a:lstStyle/>
-          <a:p>
-            <a:pPr algn="ctr" indent="0" marL="0">
-              <a:buNone/>
-            </a:pPr>
-            <a:r>
-              <a:rPr lang="en-US" sz="1500" b="1" dirty="0">
-                <a:solidFill>
-                  <a:srgbClr val="22C7B5"/>
-                </a:solidFill>
-                <a:latin typeface="Calibri" pitchFamily="34" charset="0"/>
-                <a:ea typeface="Calibri" pitchFamily="34" charset="-122"/>
-                <a:cs typeface="Calibri" pitchFamily="34" charset="-120"/>
-              </a:rPr>
-              <a:t>→</a:t>
-            </a:r>
-            <a:endParaRPr lang="en-US" sz="1500" dirty="0"/>
-          </a:p>
-        </p:txBody>
-      </p:sp>
-      <p:sp>
-        <p:nvSpPr>
-          <p:cNvPr id="18" name="Text 16"/>
-          <p:cNvSpPr/>
-          <p:nvPr/>
-        </p:nvSpPr>
-        <p:spPr>
-          <a:xfrm>
-            <a:off x="1143000" y="4069080"/>
-            <a:ext cx="4754880" cy="1097280"/>
+          <a:ln w="12700">
+            <a:solidFill>
+              <a:srgbClr val="EEF3F6"/>
+            </a:solidFill>
+            <a:prstDash val="solid"/>
+          </a:ln>
+        </p:spPr>
+      </p:sp>
+      <p:sp>
+        <p:nvSpPr>
+          <p:cNvPr id="11" name="Text 9"/>
+          <p:cNvSpPr/>
+          <p:nvPr/>
+        </p:nvSpPr>
+        <p:spPr>
+          <a:xfrm>
+            <a:off x="841248" y="3145536"/>
+            <a:ext cx="4855464" cy="594360"/>
           </a:xfrm>
           <a:prstGeom prst="rect">
             <a:avLst/>
@@ -4839,12 +4082,12 @@
           <a:p>
             <a:pPr indent="0" marL="0">
               <a:lnSpc>
-                <a:spcPct val="125000"/>
+                <a:spcPct val="115000"/>
               </a:lnSpc>
               <a:buNone/>
             </a:pPr>
             <a:r>
-              <a:rPr lang="en-US" sz="1150" dirty="0">
+              <a:rPr lang="en-US" sz="1200" b="1" dirty="0">
                 <a:solidFill>
                   <a:srgbClr val="1B2733"/>
                 </a:solidFill>
@@ -4852,81 +4095,22 @@
                 <a:ea typeface="Calibri" pitchFamily="34" charset="-122"/>
                 <a:cs typeface="Calibri" pitchFamily="34" charset="-120"/>
               </a:rPr>
-              <a:t>Native mobile applications — the API is already client-agnostic and could support one.</a:t>
-            </a:r>
-            <a:endParaRPr lang="en-US" sz="1150" dirty="0"/>
-          </a:p>
-        </p:txBody>
-      </p:sp>
-      <p:sp>
-        <p:nvSpPr>
-          <p:cNvPr id="19" name="Shape 17"/>
-          <p:cNvSpPr/>
-          <p:nvPr/>
-        </p:nvSpPr>
-        <p:spPr>
-          <a:xfrm>
-            <a:off x="6263640" y="4160520"/>
-            <a:ext cx="329184" cy="329184"/>
-          </a:xfrm>
-          <a:prstGeom prst="ellipse">
-            <a:avLst/>
-          </a:prstGeom>
-          <a:solidFill>
-            <a:srgbClr val="0F2438"/>
-          </a:solidFill>
-          <a:ln/>
-        </p:spPr>
-      </p:sp>
-      <p:sp>
-        <p:nvSpPr>
-          <p:cNvPr id="20" name="Text 18"/>
-          <p:cNvSpPr/>
-          <p:nvPr/>
-        </p:nvSpPr>
-        <p:spPr>
-          <a:xfrm>
-            <a:off x="6263640" y="4160520"/>
-            <a:ext cx="329184" cy="329184"/>
-          </a:xfrm>
-          <a:prstGeom prst="rect">
-            <a:avLst/>
-          </a:prstGeom>
-          <a:noFill/>
-          <a:ln/>
-        </p:spPr>
-        <p:txBody>
-          <a:bodyPr wrap="none" rtlCol="0" anchor="ctr"/>
-          <a:lstStyle/>
-          <a:p>
-            <a:pPr algn="ctr" indent="0" marL="0">
-              <a:buNone/>
-            </a:pPr>
-            <a:r>
-              <a:rPr lang="en-US" sz="1500" b="1" dirty="0">
-                <a:solidFill>
-                  <a:srgbClr val="22C7B5"/>
-                </a:solidFill>
-                <a:latin typeface="Calibri" pitchFamily="34" charset="0"/>
-                <a:ea typeface="Calibri" pitchFamily="34" charset="-122"/>
-                <a:cs typeface="Calibri" pitchFamily="34" charset="-120"/>
-              </a:rPr>
-              <a:t>→</a:t>
-            </a:r>
-            <a:endParaRPr lang="en-US" sz="1500" dirty="0"/>
-          </a:p>
-        </p:txBody>
-      </p:sp>
-      <p:sp>
-        <p:nvSpPr>
-          <p:cNvPr id="21" name="Text 19"/>
-          <p:cNvSpPr/>
-          <p:nvPr/>
-        </p:nvSpPr>
-        <p:spPr>
-          <a:xfrm>
-            <a:off x="6766560" y="4069080"/>
-            <a:ext cx="4754880" cy="1097280"/>
+              <a:t>No hospital removed without a second-party confirmation</a:t>
+            </a:r>
+            <a:endParaRPr lang="en-US" sz="1200" dirty="0"/>
+          </a:p>
+        </p:txBody>
+      </p:sp>
+      <p:sp>
+        <p:nvSpPr>
+          <p:cNvPr id="12" name="Text 10"/>
+          <p:cNvSpPr/>
+          <p:nvPr/>
+        </p:nvSpPr>
+        <p:spPr>
+          <a:xfrm>
+            <a:off x="841248" y="3730752"/>
+            <a:ext cx="4855464" cy="594360"/>
           </a:xfrm>
           <a:prstGeom prst="rect">
             <a:avLst/>
@@ -4940,12 +4124,81 @@
           <a:p>
             <a:pPr indent="0" marL="0">
               <a:lnSpc>
-                <a:spcPct val="125000"/>
+                <a:spcPct val="120000"/>
               </a:lnSpc>
               <a:buNone/>
             </a:pPr>
             <a:r>
-              <a:rPr lang="en-US" sz="1150" dirty="0">
+              <a:rPr lang="en-US" sz="1050" dirty="0">
+                <a:solidFill>
+                  <a:srgbClr val="5B6B7A"/>
+                </a:solidFill>
+                <a:latin typeface="Calibri" pitchFamily="34" charset="0"/>
+                <a:ea typeface="Calibri" pitchFamily="34" charset="-122"/>
+                <a:cs typeface="Calibri" pitchFamily="34" charset="-120"/>
+              </a:rPr>
+              <a:t>A two-party unregister/authorize flow protects against unilateral removal.</a:t>
+            </a:r>
+            <a:endParaRPr lang="en-US" sz="1050" dirty="0"/>
+          </a:p>
+        </p:txBody>
+      </p:sp>
+      <p:sp>
+        <p:nvSpPr>
+          <p:cNvPr id="13" name="Shape 11"/>
+          <p:cNvSpPr/>
+          <p:nvPr/>
+        </p:nvSpPr>
+        <p:spPr>
+          <a:xfrm>
+            <a:off x="6263640" y="3017520"/>
+            <a:ext cx="5257800" cy="1371600"/>
+          </a:xfrm>
+          <a:prstGeom prst="roundRect">
+            <a:avLst>
+              <a:gd name="adj" fmla="val 5333"/>
+            </a:avLst>
+          </a:prstGeom>
+          <a:solidFill>
+            <a:srgbClr val="FFFFFF"/>
+          </a:solidFill>
+          <a:ln w="12700">
+            <a:solidFill>
+              <a:srgbClr val="EEF3F6"/>
+            </a:solidFill>
+            <a:prstDash val="solid"/>
+          </a:ln>
+        </p:spPr>
+      </p:sp>
+      <p:sp>
+        <p:nvSpPr>
+          <p:cNvPr id="14" name="Text 12"/>
+          <p:cNvSpPr/>
+          <p:nvPr/>
+        </p:nvSpPr>
+        <p:spPr>
+          <a:xfrm>
+            <a:off x="6464808" y="3145536"/>
+            <a:ext cx="4855464" cy="594360"/>
+          </a:xfrm>
+          <a:prstGeom prst="rect">
+            <a:avLst/>
+          </a:prstGeom>
+          <a:noFill/>
+          <a:ln/>
+        </p:spPr>
+        <p:txBody>
+          <a:bodyPr wrap="square" rtlCol="0" anchor="ctr"/>
+          <a:lstStyle/>
+          <a:p>
+            <a:pPr indent="0" marL="0">
+              <a:lnSpc>
+                <a:spcPct val="115000"/>
+              </a:lnSpc>
+              <a:buNone/>
+            </a:pPr>
+            <a:r>
+              <a:rPr lang="en-US" sz="1200" b="1" dirty="0">
                 <a:solidFill>
                   <a:srgbClr val="1B2733"/>
                 </a:solidFill>
@@ -4953,9 +4206,273 @@
                 <a:ea typeface="Calibri" pitchFamily="34" charset="-122"/>
                 <a:cs typeface="Calibri" pitchFamily="34" charset="-120"/>
               </a:rPr>
-              <a:t>Automated appointment scheduling/optimisation across hospitals.</a:t>
-            </a:r>
-            <a:endParaRPr lang="en-US" sz="1150" dirty="0"/>
+              <a:t>A hospital's slots can never go negative or over capacity</a:t>
+            </a:r>
+            <a:endParaRPr lang="en-US" sz="1200" dirty="0"/>
+          </a:p>
+        </p:txBody>
+      </p:sp>
+      <p:sp>
+        <p:nvSpPr>
+          <p:cNvPr id="15" name="Text 13"/>
+          <p:cNvSpPr/>
+          <p:nvPr/>
+        </p:nvSpPr>
+        <p:spPr>
+          <a:xfrm>
+            <a:off x="6464808" y="3730752"/>
+            <a:ext cx="4855464" cy="594360"/>
+          </a:xfrm>
+          <a:prstGeom prst="rect">
+            <a:avLst/>
+          </a:prstGeom>
+          <a:noFill/>
+          <a:ln/>
+        </p:spPr>
+        <p:txBody>
+          <a:bodyPr wrap="square" rtlCol="0" anchor="ctr"/>
+          <a:lstStyle/>
+          <a:p>
+            <a:pPr indent="0" marL="0">
+              <a:lnSpc>
+                <a:spcPct val="120000"/>
+              </a:lnSpc>
+              <a:buNone/>
+            </a:pPr>
+            <a:r>
+              <a:rPr lang="en-US" sz="1050" dirty="0">
+                <a:solidFill>
+                  <a:srgbClr val="5B6B7A"/>
+                </a:solidFill>
+                <a:latin typeface="Calibri" pitchFamily="34" charset="0"/>
+                <a:ea typeface="Calibri" pitchFamily="34" charset="-122"/>
+                <a:cs typeface="Calibri" pitchFamily="34" charset="-120"/>
+              </a:rPr>
+              <a:t>Enforced under any sequence of concurrent booking operations.</a:t>
+            </a:r>
+            <a:endParaRPr lang="en-US" sz="1050" dirty="0"/>
+          </a:p>
+        </p:txBody>
+      </p:sp>
+      <p:sp>
+        <p:nvSpPr>
+          <p:cNvPr id="16" name="Shape 14"/>
+          <p:cNvSpPr/>
+          <p:nvPr/>
+        </p:nvSpPr>
+        <p:spPr>
+          <a:xfrm>
+            <a:off x="640080" y="4526280"/>
+            <a:ext cx="5257800" cy="1371600"/>
+          </a:xfrm>
+          <a:prstGeom prst="roundRect">
+            <a:avLst>
+              <a:gd name="adj" fmla="val 5333"/>
+            </a:avLst>
+          </a:prstGeom>
+          <a:solidFill>
+            <a:srgbClr val="FFFFFF"/>
+          </a:solidFill>
+          <a:ln w="12700">
+            <a:solidFill>
+              <a:srgbClr val="EEF3F6"/>
+            </a:solidFill>
+            <a:prstDash val="solid"/>
+          </a:ln>
+        </p:spPr>
+      </p:sp>
+      <p:sp>
+        <p:nvSpPr>
+          <p:cNvPr id="17" name="Text 15"/>
+          <p:cNvSpPr/>
+          <p:nvPr/>
+        </p:nvSpPr>
+        <p:spPr>
+          <a:xfrm>
+            <a:off x="841248" y="4654296"/>
+            <a:ext cx="4855464" cy="594360"/>
+          </a:xfrm>
+          <a:prstGeom prst="rect">
+            <a:avLst/>
+          </a:prstGeom>
+          <a:noFill/>
+          <a:ln/>
+        </p:spPr>
+        <p:txBody>
+          <a:bodyPr wrap="square" rtlCol="0" anchor="ctr"/>
+          <a:lstStyle/>
+          <a:p>
+            <a:pPr indent="0" marL="0">
+              <a:lnSpc>
+                <a:spcPct val="115000"/>
+              </a:lnSpc>
+              <a:buNone/>
+            </a:pPr>
+            <a:r>
+              <a:rPr lang="en-US" sz="1200" b="1" dirty="0">
+                <a:solidFill>
+                  <a:srgbClr val="1B2733"/>
+                </a:solidFill>
+                <a:latin typeface="Calibri" pitchFamily="34" charset="0"/>
+                <a:ea typeface="Calibri" pitchFamily="34" charset="-122"/>
+                <a:cs typeface="Calibri" pitchFamily="34" charset="-120"/>
+              </a:rPr>
+              <a:t>Every disable, reactivation, unregister, and role change is traceable</a:t>
+            </a:r>
+            <a:endParaRPr lang="en-US" sz="1200" dirty="0"/>
+          </a:p>
+        </p:txBody>
+      </p:sp>
+      <p:sp>
+        <p:nvSpPr>
+          <p:cNvPr id="18" name="Text 16"/>
+          <p:cNvSpPr/>
+          <p:nvPr/>
+        </p:nvSpPr>
+        <p:spPr>
+          <a:xfrm>
+            <a:off x="841248" y="5239512"/>
+            <a:ext cx="4855464" cy="594360"/>
+          </a:xfrm>
+          <a:prstGeom prst="rect">
+            <a:avLst/>
+          </a:prstGeom>
+          <a:noFill/>
+          <a:ln/>
+        </p:spPr>
+        <p:txBody>
+          <a:bodyPr wrap="square" rtlCol="0" anchor="ctr"/>
+          <a:lstStyle/>
+          <a:p>
+            <a:pPr indent="0" marL="0">
+              <a:lnSpc>
+                <a:spcPct val="120000"/>
+              </a:lnSpc>
+              <a:buNone/>
+            </a:pPr>
+            <a:r>
+              <a:rPr lang="en-US" sz="1050" dirty="0">
+                <a:solidFill>
+                  <a:srgbClr val="5B6B7A"/>
+                </a:solidFill>
+                <a:latin typeface="Calibri" pitchFamily="34" charset="0"/>
+                <a:ea typeface="Calibri" pitchFamily="34" charset="-122"/>
+                <a:cs typeface="Calibri" pitchFamily="34" charset="-120"/>
+              </a:rPr>
+              <a:t>Actor, timestamp, and — where applicable — a reason. No gaps.</a:t>
+            </a:r>
+            <a:endParaRPr lang="en-US" sz="1050" dirty="0"/>
+          </a:p>
+        </p:txBody>
+      </p:sp>
+      <p:sp>
+        <p:nvSpPr>
+          <p:cNvPr id="19" name="Shape 17"/>
+          <p:cNvSpPr/>
+          <p:nvPr/>
+        </p:nvSpPr>
+        <p:spPr>
+          <a:xfrm>
+            <a:off x="6263640" y="4526280"/>
+            <a:ext cx="5257800" cy="1371600"/>
+          </a:xfrm>
+          <a:prstGeom prst="roundRect">
+            <a:avLst>
+              <a:gd name="adj" fmla="val 5333"/>
+            </a:avLst>
+          </a:prstGeom>
+          <a:solidFill>
+            <a:srgbClr val="FFFFFF"/>
+          </a:solidFill>
+          <a:ln w="12700">
+            <a:solidFill>
+              <a:srgbClr val="EEF3F6"/>
+            </a:solidFill>
+            <a:prstDash val="solid"/>
+          </a:ln>
+        </p:spPr>
+      </p:sp>
+      <p:sp>
+        <p:nvSpPr>
+          <p:cNvPr id="20" name="Text 18"/>
+          <p:cNvSpPr/>
+          <p:nvPr/>
+        </p:nvSpPr>
+        <p:spPr>
+          <a:xfrm>
+            <a:off x="6464808" y="4654296"/>
+            <a:ext cx="4855464" cy="594360"/>
+          </a:xfrm>
+          <a:prstGeom prst="rect">
+            <a:avLst/>
+          </a:prstGeom>
+          <a:noFill/>
+          <a:ln/>
+        </p:spPr>
+        <p:txBody>
+          <a:bodyPr wrap="square" rtlCol="0" anchor="ctr"/>
+          <a:lstStyle/>
+          <a:p>
+            <a:pPr indent="0" marL="0">
+              <a:lnSpc>
+                <a:spcPct val="115000"/>
+              </a:lnSpc>
+              <a:buNone/>
+            </a:pPr>
+            <a:r>
+              <a:rPr lang="en-US" sz="1200" b="1" dirty="0">
+                <a:solidFill>
+                  <a:srgbClr val="1B2733"/>
+                </a:solidFill>
+                <a:latin typeface="Calibri" pitchFamily="34" charset="0"/>
+                <a:ea typeface="Calibri" pitchFamily="34" charset="-122"/>
+                <a:cs typeface="Calibri" pitchFamily="34" charset="-120"/>
+              </a:rPr>
+              <a:t>No record is ever physically deleted</a:t>
+            </a:r>
+            <a:endParaRPr lang="en-US" sz="1200" dirty="0"/>
+          </a:p>
+        </p:txBody>
+      </p:sp>
+      <p:sp>
+        <p:nvSpPr>
+          <p:cNvPr id="21" name="Text 19"/>
+          <p:cNvSpPr/>
+          <p:nvPr/>
+        </p:nvSpPr>
+        <p:spPr>
+          <a:xfrm>
+            <a:off x="6464808" y="5239512"/>
+            <a:ext cx="4855464" cy="594360"/>
+          </a:xfrm>
+          <a:prstGeom prst="rect">
+            <a:avLst/>
+          </a:prstGeom>
+          <a:noFill/>
+          <a:ln/>
+        </p:spPr>
+        <p:txBody>
+          <a:bodyPr wrap="square" rtlCol="0" anchor="ctr"/>
+          <a:lstStyle/>
+          <a:p>
+            <a:pPr indent="0" marL="0">
+              <a:lnSpc>
+                <a:spcPct val="120000"/>
+              </a:lnSpc>
+              <a:buNone/>
+            </a:pPr>
+            <a:r>
+              <a:rPr lang="en-US" sz="1050" dirty="0">
+                <a:solidFill>
+                  <a:srgbClr val="5B6B7A"/>
+                </a:solidFill>
+                <a:latin typeface="Calibri" pitchFamily="34" charset="0"/>
+                <a:ea typeface="Calibri" pitchFamily="34" charset="-122"/>
+                <a:cs typeface="Calibri" pitchFamily="34" charset="-120"/>
+              </a:rPr>
+              <a:t>A uniform soft-delete pattern applies across users, hospitals, bookings, and credentials.</a:t>
+            </a:r>
+            <a:endParaRPr lang="en-US" sz="1050" dirty="0"/>
           </a:p>
         </p:txBody>
       </p:sp>
@@ -5038,7 +4555,7 @@
         </p:nvSpPr>
         <p:spPr>
           <a:xfrm>
-            <a:off x="640080" y="457200"/>
+            <a:off x="640080" y="411480"/>
             <a:ext cx="9144000" cy="548640"/>
           </a:xfrm>
           <a:prstGeom prst="rect">
@@ -5055,7 +4572,7 @@
               <a:buNone/>
             </a:pPr>
             <a:r>
-              <a:rPr lang="en-US" sz="3000" b="1" dirty="0">
+              <a:rPr lang="en-US" sz="2800" b="1" dirty="0">
                 <a:solidFill>
                   <a:srgbClr val="FFFFFF"/>
                 </a:solidFill>
@@ -5063,9 +4580,9 @@
                 <a:ea typeface="Cambria" pitchFamily="34" charset="-122"/>
                 <a:cs typeface="Cambria" pitchFamily="34" charset="-120"/>
               </a:rPr>
-              <a:t>CONCLUSION</a:t>
-            </a:r>
-            <a:endParaRPr lang="en-US" sz="3000" dirty="0"/>
+              <a:t>TECHNOLOGY SNAPSHOT</a:t>
+            </a:r>
+            <a:endParaRPr lang="en-US" sz="2800" dirty="0"/>
           </a:p>
         </p:txBody>
       </p:sp>
@@ -5077,8 +4594,8 @@
         </p:nvSpPr>
         <p:spPr>
           <a:xfrm>
-            <a:off x="640080" y="1371600"/>
-            <a:ext cx="10698480" cy="1188720"/>
+            <a:off x="640080" y="960120"/>
+            <a:ext cx="10515600" cy="365760"/>
           </a:xfrm>
           <a:prstGeom prst="rect">
             <a:avLst/>
@@ -5091,23 +4608,20 @@
           <a:lstStyle/>
           <a:p>
             <a:pPr indent="0" marL="0">
-              <a:lnSpc>
-                <a:spcPct val="135000"/>
-              </a:lnSpc>
-              <a:buNone/>
-            </a:pPr>
-            <a:r>
-              <a:rPr lang="en-US" sz="1500" dirty="0">
-                <a:solidFill>
-                  <a:srgbClr val="FFFFFF"/>
-                </a:solidFill>
-                <a:latin typeface="Calibri" pitchFamily="34" charset="0"/>
-                <a:ea typeface="Calibri" pitchFamily="34" charset="-122"/>
-                <a:cs typeface="Calibri" pitchFamily="34" charset="-120"/>
-              </a:rPr>
-              <a:t>VaxTrack v2.0.0 turns a single-developer demo into a platform an operator could actually run: multiple hospitals, three scoped roles, self-service where it's safe, oversight where it matters, and an audit trail on everything in between.</a:t>
-            </a:r>
-            <a:endParaRPr lang="en-US" sz="1500" dirty="0"/>
+              <a:buNone/>
+            </a:pPr>
+            <a:r>
+              <a:rPr lang="en-US" sz="1200" i="1" dirty="0">
+                <a:solidFill>
+                  <a:srgbClr val="9FB3C8"/>
+                </a:solidFill>
+                <a:latin typeface="Calibri" pitchFamily="34" charset="0"/>
+                <a:ea typeface="Calibri" pitchFamily="34" charset="-122"/>
+                <a:cs typeface="Calibri" pitchFamily="34" charset="-120"/>
+              </a:rPr>
+              <a:t>For orientation only — full architecture depth lives in the companion Technical Specification.</a:t>
+            </a:r>
+            <a:endParaRPr lang="en-US" sz="1200" dirty="0"/>
           </a:p>
         </p:txBody>
       </p:sp>
@@ -5119,12 +4633,151 @@
         </p:nvSpPr>
         <p:spPr>
           <a:xfrm>
-            <a:off x="640080" y="2880360"/>
-            <a:ext cx="3456432" cy="2651760"/>
+            <a:off x="822960" y="1691640"/>
+            <a:ext cx="3291840" cy="914400"/>
           </a:xfrm>
           <a:prstGeom prst="roundRect">
             <a:avLst>
-              <a:gd name="adj" fmla="val 3448"/>
+              <a:gd name="adj" fmla="val 8000"/>
+            </a:avLst>
+          </a:prstGeom>
+          <a:solidFill>
+            <a:srgbClr val="22C7B5"/>
+          </a:solidFill>
+          <a:ln/>
+        </p:spPr>
+      </p:sp>
+      <p:sp>
+        <p:nvSpPr>
+          <p:cNvPr id="5" name="Text 3"/>
+          <p:cNvSpPr/>
+          <p:nvPr/>
+        </p:nvSpPr>
+        <p:spPr>
+          <a:xfrm>
+            <a:off x="822960" y="1691640"/>
+            <a:ext cx="3291840" cy="502920"/>
+          </a:xfrm>
+          <a:prstGeom prst="rect">
+            <a:avLst/>
+          </a:prstGeom>
+          <a:noFill/>
+          <a:ln/>
+        </p:spPr>
+        <p:txBody>
+          <a:bodyPr wrap="square" rtlCol="0" anchor="ctr"/>
+          <a:lstStyle/>
+          <a:p>
+            <a:pPr algn="ctr" indent="0" marL="0">
+              <a:buNone/>
+            </a:pPr>
+            <a:r>
+              <a:rPr lang="en-US" sz="1400" b="1" dirty="0">
+                <a:solidFill>
+                  <a:srgbClr val="0F2438"/>
+                </a:solidFill>
+                <a:latin typeface="Calibri" pitchFamily="34" charset="0"/>
+                <a:ea typeface="Calibri" pitchFamily="34" charset="-122"/>
+                <a:cs typeface="Calibri" pitchFamily="34" charset="-120"/>
+              </a:rPr>
+              <a:t>Angular 20 SPA</a:t>
+            </a:r>
+            <a:endParaRPr lang="en-US" sz="1400" dirty="0"/>
+          </a:p>
+        </p:txBody>
+      </p:sp>
+      <p:sp>
+        <p:nvSpPr>
+          <p:cNvPr id="6" name="Text 4"/>
+          <p:cNvSpPr/>
+          <p:nvPr/>
+        </p:nvSpPr>
+        <p:spPr>
+          <a:xfrm>
+            <a:off x="822960" y="2148840"/>
+            <a:ext cx="3291840" cy="365760"/>
+          </a:xfrm>
+          <a:prstGeom prst="rect">
+            <a:avLst/>
+          </a:prstGeom>
+          <a:noFill/>
+          <a:ln/>
+        </p:spPr>
+        <p:txBody>
+          <a:bodyPr wrap="square" rtlCol="0" anchor="ctr"/>
+          <a:lstStyle/>
+          <a:p>
+            <a:pPr algn="ctr" indent="0" marL="0">
+              <a:buNone/>
+            </a:pPr>
+            <a:r>
+              <a:rPr lang="en-US" sz="950" dirty="0">
+                <a:solidFill>
+                  <a:srgbClr val="0F2438"/>
+                </a:solidFill>
+                <a:latin typeface="Calibri" pitchFamily="34" charset="0"/>
+                <a:ea typeface="Calibri" pitchFamily="34" charset="-122"/>
+                <a:cs typeface="Calibri" pitchFamily="34" charset="-120"/>
+              </a:rPr>
+              <a:t>standalone components + TailwindCSS</a:t>
+            </a:r>
+            <a:endParaRPr lang="en-US" sz="950" dirty="0"/>
+          </a:p>
+        </p:txBody>
+      </p:sp>
+      <p:sp>
+        <p:nvSpPr>
+          <p:cNvPr id="7" name="Text 5"/>
+          <p:cNvSpPr/>
+          <p:nvPr/>
+        </p:nvSpPr>
+        <p:spPr>
+          <a:xfrm>
+            <a:off x="822960" y="2697480"/>
+            <a:ext cx="3291840" cy="320040"/>
+          </a:xfrm>
+          <a:prstGeom prst="rect">
+            <a:avLst/>
+          </a:prstGeom>
+          <a:noFill/>
+          <a:ln/>
+        </p:spPr>
+        <p:txBody>
+          <a:bodyPr wrap="square" rtlCol="0" anchor="ctr"/>
+          <a:lstStyle/>
+          <a:p>
+            <a:pPr algn="ctr" indent="0" marL="0">
+              <a:buNone/>
+            </a:pPr>
+            <a:r>
+              <a:rPr lang="en-US" sz="1000" dirty="0">
+                <a:solidFill>
+                  <a:srgbClr val="9FB3C8"/>
+                </a:solidFill>
+                <a:latin typeface="Calibri" pitchFamily="34" charset="0"/>
+                <a:ea typeface="Calibri" pitchFamily="34" charset="-122"/>
+                <a:cs typeface="Calibri" pitchFamily="34" charset="-120"/>
+              </a:rPr>
+              <a:t>↓  REST / JSON over HTTPS</a:t>
+            </a:r>
+            <a:endParaRPr lang="en-US" sz="1000" dirty="0"/>
+          </a:p>
+        </p:txBody>
+      </p:sp>
+      <p:sp>
+        <p:nvSpPr>
+          <p:cNvPr id="8" name="Shape 6"/>
+          <p:cNvSpPr/>
+          <p:nvPr/>
+        </p:nvSpPr>
+        <p:spPr>
+          <a:xfrm>
+            <a:off x="822960" y="3108960"/>
+            <a:ext cx="3291840" cy="685800"/>
+          </a:xfrm>
+          <a:prstGeom prst="roundRect">
+            <a:avLst>
+              <a:gd name="adj" fmla="val 8000"/>
             </a:avLst>
           </a:prstGeom>
           <a:solidFill>
@@ -5135,14 +4788,14 @@
       </p:sp>
       <p:sp>
         <p:nvSpPr>
-          <p:cNvPr id="5" name="Text 3"/>
-          <p:cNvSpPr/>
-          <p:nvPr/>
-        </p:nvSpPr>
-        <p:spPr>
-          <a:xfrm>
-            <a:off x="868680" y="3108960"/>
-            <a:ext cx="2999232" cy="457200"/>
+          <p:cNvPr id="9" name="Text 7"/>
+          <p:cNvSpPr/>
+          <p:nvPr/>
+        </p:nvSpPr>
+        <p:spPr>
+          <a:xfrm>
+            <a:off x="1005840" y="3163824"/>
+            <a:ext cx="2926080" cy="320040"/>
           </a:xfrm>
           <a:prstGeom prst="rect">
             <a:avLst/>
@@ -5158,7 +4811,7 @@
               <a:buNone/>
             </a:pPr>
             <a:r>
-              <a:rPr lang="en-US" sz="1400" b="1" dirty="0">
+              <a:rPr lang="en-US" sz="1200" b="1" dirty="0">
                 <a:solidFill>
                   <a:srgbClr val="22C7B5"/>
                 </a:solidFill>
@@ -5166,22 +4819,22 @@
                 <a:ea typeface="Calibri" pitchFamily="34" charset="-122"/>
                 <a:cs typeface="Calibri" pitchFamily="34" charset="-120"/>
               </a:rPr>
-              <a:t>For Business</a:t>
-            </a:r>
-            <a:endParaRPr lang="en-US" sz="1400" dirty="0"/>
-          </a:p>
-        </p:txBody>
-      </p:sp>
-      <p:sp>
-        <p:nvSpPr>
-          <p:cNvPr id="6" name="Text 4"/>
-          <p:cNvSpPr/>
-          <p:nvPr/>
-        </p:nvSpPr>
-        <p:spPr>
-          <a:xfrm>
-            <a:off x="868680" y="3657600"/>
-            <a:ext cx="2999232" cy="1737360"/>
+              <a:t>Controllers</a:t>
+            </a:r>
+            <a:endParaRPr lang="en-US" sz="1200" dirty="0"/>
+          </a:p>
+        </p:txBody>
+      </p:sp>
+      <p:sp>
+        <p:nvSpPr>
+          <p:cNvPr id="10" name="Text 8"/>
+          <p:cNvSpPr/>
+          <p:nvPr/>
+        </p:nvSpPr>
+        <p:spPr>
+          <a:xfrm>
+            <a:off x="1005840" y="3456432"/>
+            <a:ext cx="2926080" cy="292608"/>
           </a:xfrm>
           <a:prstGeom prst="rect">
             <a:avLst/>
@@ -5194,13 +4847,10 @@
           <a:lstStyle/>
           <a:p>
             <a:pPr indent="0" marL="0">
-              <a:lnSpc>
-                <a:spcPct val="130000"/>
-              </a:lnSpc>
-              <a:buNone/>
-            </a:pPr>
-            <a:r>
-              <a:rPr lang="en-US" sz="1150" dirty="0">
+              <a:buNone/>
+            </a:pPr>
+            <a:r>
+              <a:rPr lang="en-US" sz="850" dirty="0">
                 <a:solidFill>
                   <a:srgbClr val="9FB3C8"/>
                 </a:solidFill>
@@ -5208,26 +4858,126 @@
                 <a:ea typeface="Calibri" pitchFamily="34" charset="-122"/>
                 <a:cs typeface="Calibri" pitchFamily="34" charset="-120"/>
               </a:rPr>
-              <a:t>One accountable system of record, from registration to certificate — with self-service that reduces platform-admin load.</a:t>
-            </a:r>
-            <a:endParaRPr lang="en-US" sz="1150" dirty="0"/>
-          </a:p>
-        </p:txBody>
-      </p:sp>
-      <p:sp>
-        <p:nvSpPr>
-          <p:cNvPr id="7" name="Shape 5"/>
-          <p:cNvSpPr/>
-          <p:nvPr/>
-        </p:nvSpPr>
-        <p:spPr>
-          <a:xfrm>
-            <a:off x="4315968" y="2880360"/>
-            <a:ext cx="3456432" cy="2651760"/>
+              <a:t>HTTP routing + JWT auth enforcement</a:t>
+            </a:r>
+            <a:endParaRPr lang="en-US" sz="850" dirty="0"/>
+          </a:p>
+        </p:txBody>
+      </p:sp>
+      <p:sp>
+        <p:nvSpPr>
+          <p:cNvPr id="11" name="Shape 9"/>
+          <p:cNvSpPr/>
+          <p:nvPr/>
+        </p:nvSpPr>
+        <p:spPr>
+          <a:xfrm>
+            <a:off x="822960" y="3931920"/>
+            <a:ext cx="3291840" cy="685800"/>
           </a:xfrm>
           <a:prstGeom prst="roundRect">
             <a:avLst>
-              <a:gd name="adj" fmla="val 3448"/>
+              <a:gd name="adj" fmla="val 8000"/>
+            </a:avLst>
+          </a:prstGeom>
+          <a:solidFill>
+            <a:srgbClr val="1E4C6E"/>
+          </a:solidFill>
+          <a:ln/>
+        </p:spPr>
+      </p:sp>
+      <p:sp>
+        <p:nvSpPr>
+          <p:cNvPr id="12" name="Text 10"/>
+          <p:cNvSpPr/>
+          <p:nvPr/>
+        </p:nvSpPr>
+        <p:spPr>
+          <a:xfrm>
+            <a:off x="1005840" y="3986784"/>
+            <a:ext cx="2926080" cy="320040"/>
+          </a:xfrm>
+          <a:prstGeom prst="rect">
+            <a:avLst/>
+          </a:prstGeom>
+          <a:noFill/>
+          <a:ln/>
+        </p:spPr>
+        <p:txBody>
+          <a:bodyPr wrap="square" rtlCol="0" anchor="ctr"/>
+          <a:lstStyle/>
+          <a:p>
+            <a:pPr indent="0" marL="0">
+              <a:buNone/>
+            </a:pPr>
+            <a:r>
+              <a:rPr lang="en-US" sz="1200" b="1" dirty="0">
+                <a:solidFill>
+                  <a:srgbClr val="22C7B5"/>
+                </a:solidFill>
+                <a:latin typeface="Calibri" pitchFamily="34" charset="0"/>
+                <a:ea typeface="Calibri" pitchFamily="34" charset="-122"/>
+                <a:cs typeface="Calibri" pitchFamily="34" charset="-120"/>
+              </a:rPr>
+              <a:t>Services</a:t>
+            </a:r>
+            <a:endParaRPr lang="en-US" sz="1200" dirty="0"/>
+          </a:p>
+        </p:txBody>
+      </p:sp>
+      <p:sp>
+        <p:nvSpPr>
+          <p:cNvPr id="13" name="Text 11"/>
+          <p:cNvSpPr/>
+          <p:nvPr/>
+        </p:nvSpPr>
+        <p:spPr>
+          <a:xfrm>
+            <a:off x="1005840" y="4279392"/>
+            <a:ext cx="2926080" cy="292608"/>
+          </a:xfrm>
+          <a:prstGeom prst="rect">
+            <a:avLst/>
+          </a:prstGeom>
+          <a:noFill/>
+          <a:ln/>
+        </p:spPr>
+        <p:txBody>
+          <a:bodyPr wrap="square" rtlCol="0" anchor="ctr"/>
+          <a:lstStyle/>
+          <a:p>
+            <a:pPr indent="0" marL="0">
+              <a:buNone/>
+            </a:pPr>
+            <a:r>
+              <a:rPr lang="en-US" sz="850" dirty="0">
+                <a:solidFill>
+                  <a:srgbClr val="9FB3C8"/>
+                </a:solidFill>
+                <a:latin typeface="Calibri" pitchFamily="34" charset="0"/>
+                <a:ea typeface="Calibri" pitchFamily="34" charset="-122"/>
+                <a:cs typeface="Calibri" pitchFamily="34" charset="-120"/>
+              </a:rPr>
+              <a:t>Business rules, ownership &amp; role checks</a:t>
+            </a:r>
+            <a:endParaRPr lang="en-US" sz="850" dirty="0"/>
+          </a:p>
+        </p:txBody>
+      </p:sp>
+      <p:sp>
+        <p:nvSpPr>
+          <p:cNvPr id="14" name="Shape 12"/>
+          <p:cNvSpPr/>
+          <p:nvPr/>
+        </p:nvSpPr>
+        <p:spPr>
+          <a:xfrm>
+            <a:off x="822960" y="4754880"/>
+            <a:ext cx="3291840" cy="685800"/>
+          </a:xfrm>
+          <a:prstGeom prst="roundRect">
+            <a:avLst>
+              <a:gd name="adj" fmla="val 8000"/>
             </a:avLst>
           </a:prstGeom>
           <a:solidFill>
@@ -5238,14 +4988,14 @@
       </p:sp>
       <p:sp>
         <p:nvSpPr>
-          <p:cNvPr id="8" name="Text 6"/>
-          <p:cNvSpPr/>
-          <p:nvPr/>
-        </p:nvSpPr>
-        <p:spPr>
-          <a:xfrm>
-            <a:off x="4544568" y="3108960"/>
-            <a:ext cx="2999232" cy="457200"/>
+          <p:cNvPr id="15" name="Text 13"/>
+          <p:cNvSpPr/>
+          <p:nvPr/>
+        </p:nvSpPr>
+        <p:spPr>
+          <a:xfrm>
+            <a:off x="1005840" y="4809744"/>
+            <a:ext cx="2926080" cy="320040"/>
           </a:xfrm>
           <a:prstGeom prst="rect">
             <a:avLst/>
@@ -5261,6 +5011,145 @@
               <a:buNone/>
             </a:pPr>
             <a:r>
+              <a:rPr lang="en-US" sz="1200" b="1" dirty="0">
+                <a:solidFill>
+                  <a:srgbClr val="22C7B5"/>
+                </a:solidFill>
+                <a:latin typeface="Calibri" pitchFamily="34" charset="0"/>
+                <a:ea typeface="Calibri" pitchFamily="34" charset="-122"/>
+                <a:cs typeface="Calibri" pitchFamily="34" charset="-120"/>
+              </a:rPr>
+              <a:t>Repositories (EF Core)</a:t>
+            </a:r>
+            <a:endParaRPr lang="en-US" sz="1200" dirty="0"/>
+          </a:p>
+        </p:txBody>
+      </p:sp>
+      <p:sp>
+        <p:nvSpPr>
+          <p:cNvPr id="16" name="Text 14"/>
+          <p:cNvSpPr/>
+          <p:nvPr/>
+        </p:nvSpPr>
+        <p:spPr>
+          <a:xfrm>
+            <a:off x="1005840" y="5102352"/>
+            <a:ext cx="2926080" cy="292608"/>
+          </a:xfrm>
+          <a:prstGeom prst="rect">
+            <a:avLst/>
+          </a:prstGeom>
+          <a:noFill/>
+          <a:ln/>
+        </p:spPr>
+        <p:txBody>
+          <a:bodyPr wrap="square" rtlCol="0" anchor="ctr"/>
+          <a:lstStyle/>
+          <a:p>
+            <a:pPr indent="0" marL="0">
+              <a:buNone/>
+            </a:pPr>
+            <a:r>
+              <a:rPr lang="en-US" sz="850" dirty="0">
+                <a:solidFill>
+                  <a:srgbClr val="9FB3C8"/>
+                </a:solidFill>
+                <a:latin typeface="Calibri" pitchFamily="34" charset="0"/>
+                <a:ea typeface="Calibri" pitchFamily="34" charset="-122"/>
+                <a:cs typeface="Calibri" pitchFamily="34" charset="-120"/>
+              </a:rPr>
+              <a:t>Data access over SQL Server</a:t>
+            </a:r>
+            <a:endParaRPr lang="en-US" sz="850" dirty="0"/>
+          </a:p>
+        </p:txBody>
+      </p:sp>
+      <p:sp>
+        <p:nvSpPr>
+          <p:cNvPr id="17" name="Shape 15"/>
+          <p:cNvSpPr/>
+          <p:nvPr/>
+        </p:nvSpPr>
+        <p:spPr>
+          <a:xfrm>
+            <a:off x="822960" y="5577840"/>
+            <a:ext cx="3291840" cy="548640"/>
+          </a:xfrm>
+          <a:prstGeom prst="roundRect">
+            <a:avLst>
+              <a:gd name="adj" fmla="val 10000"/>
+            </a:avLst>
+          </a:prstGeom>
+          <a:solidFill>
+            <a:srgbClr val="FFFFFF"/>
+          </a:solidFill>
+          <a:ln/>
+        </p:spPr>
+      </p:sp>
+      <p:sp>
+        <p:nvSpPr>
+          <p:cNvPr id="18" name="Text 16"/>
+          <p:cNvSpPr/>
+          <p:nvPr/>
+        </p:nvSpPr>
+        <p:spPr>
+          <a:xfrm>
+            <a:off x="822960" y="5577840"/>
+            <a:ext cx="3291840" cy="548640"/>
+          </a:xfrm>
+          <a:prstGeom prst="rect">
+            <a:avLst/>
+          </a:prstGeom>
+          <a:noFill/>
+          <a:ln/>
+        </p:spPr>
+        <p:txBody>
+          <a:bodyPr wrap="square" rtlCol="0" anchor="ctr"/>
+          <a:lstStyle/>
+          <a:p>
+            <a:pPr algn="ctr" indent="0" marL="0">
+              <a:buNone/>
+            </a:pPr>
+            <a:r>
+              <a:rPr lang="en-US" sz="1300" b="1" dirty="0">
+                <a:solidFill>
+                  <a:srgbClr val="0F2438"/>
+                </a:solidFill>
+                <a:latin typeface="Calibri" pitchFamily="34" charset="0"/>
+                <a:ea typeface="Calibri" pitchFamily="34" charset="-122"/>
+                <a:cs typeface="Calibri" pitchFamily="34" charset="-120"/>
+              </a:rPr>
+              <a:t>SQL Server</a:t>
+            </a:r>
+            <a:endParaRPr lang="en-US" sz="1300" dirty="0"/>
+          </a:p>
+        </p:txBody>
+      </p:sp>
+      <p:sp>
+        <p:nvSpPr>
+          <p:cNvPr id="19" name="Text 17"/>
+          <p:cNvSpPr/>
+          <p:nvPr/>
+        </p:nvSpPr>
+        <p:spPr>
+          <a:xfrm>
+            <a:off x="4663440" y="1691640"/>
+            <a:ext cx="6675120" cy="365760"/>
+          </a:xfrm>
+          <a:prstGeom prst="rect">
+            <a:avLst/>
+          </a:prstGeom>
+          <a:noFill/>
+          <a:ln/>
+        </p:spPr>
+        <p:txBody>
+          <a:bodyPr wrap="square" rtlCol="0" anchor="ctr"/>
+          <a:lstStyle/>
+          <a:p>
+            <a:pPr indent="0" marL="0">
+              <a:buNone/>
+            </a:pPr>
+            <a:r>
               <a:rPr lang="en-US" sz="1400" b="1" dirty="0">
                 <a:solidFill>
                   <a:srgbClr val="22C7B5"/>
@@ -5269,7 +5158,7 @@
                 <a:ea typeface="Calibri" pitchFamily="34" charset="-122"/>
                 <a:cs typeface="Calibri" pitchFamily="34" charset="-120"/>
               </a:rPr>
-              <a:t>For Engineering</a:t>
+              <a:t>Key choices</a:t>
             </a:r>
             <a:endParaRPr lang="en-US" sz="1400" dirty="0"/>
           </a:p>
@@ -5277,14 +5166,53 @@
       </p:sp>
       <p:sp>
         <p:nvSpPr>
-          <p:cNvPr id="9" name="Text 7"/>
-          <p:cNvSpPr/>
-          <p:nvPr/>
-        </p:nvSpPr>
-        <p:spPr>
-          <a:xfrm>
-            <a:off x="4544568" y="3657600"/>
-            <a:ext cx="2999232" cy="1737360"/>
+          <p:cNvPr id="20" name="Text 18"/>
+          <p:cNvSpPr/>
+          <p:nvPr/>
+        </p:nvSpPr>
+        <p:spPr>
+          <a:xfrm>
+            <a:off x="4663440" y="2148840"/>
+            <a:ext cx="6675120" cy="320040"/>
+          </a:xfrm>
+          <a:prstGeom prst="rect">
+            <a:avLst/>
+          </a:prstGeom>
+          <a:noFill/>
+          <a:ln/>
+        </p:spPr>
+        <p:txBody>
+          <a:bodyPr wrap="square" rtlCol="0" anchor="ctr"/>
+          <a:lstStyle/>
+          <a:p>
+            <a:pPr indent="0" marL="0">
+              <a:buNone/>
+            </a:pPr>
+            <a:r>
+              <a:rPr lang="en-US" sz="1150" b="1" dirty="0">
+                <a:solidFill>
+                  <a:srgbClr val="FFFFFF"/>
+                </a:solidFill>
+                <a:latin typeface="Calibri" pitchFamily="34" charset="0"/>
+                <a:ea typeface="Calibri" pitchFamily="34" charset="-122"/>
+                <a:cs typeface="Calibri" pitchFamily="34" charset="-120"/>
+              </a:rPr>
+              <a:t>Backend</a:t>
+            </a:r>
+            <a:endParaRPr lang="en-US" sz="1150" dirty="0"/>
+          </a:p>
+        </p:txBody>
+      </p:sp>
+      <p:sp>
+        <p:nvSpPr>
+          <p:cNvPr id="21" name="Text 19"/>
+          <p:cNvSpPr/>
+          <p:nvPr/>
+        </p:nvSpPr>
+        <p:spPr>
+          <a:xfrm>
+            <a:off x="4663440" y="2459736"/>
+            <a:ext cx="6675120" cy="502920"/>
           </a:xfrm>
           <a:prstGeom prst="rect">
             <a:avLst/>
@@ -5298,12 +5226,12 @@
           <a:p>
             <a:pPr indent="0" marL="0">
               <a:lnSpc>
-                <a:spcPct val="130000"/>
+                <a:spcPct val="122000"/>
               </a:lnSpc>
               <a:buNone/>
             </a:pPr>
             <a:r>
-              <a:rPr lang="en-US" sz="1150" dirty="0">
+              <a:rPr lang="en-US" sz="1050" dirty="0">
                 <a:solidFill>
                   <a:srgbClr val="9FB3C8"/>
                 </a:solidFill>
@@ -5311,7 +5239,46 @@
                 <a:ea typeface="Calibri" pitchFamily="34" charset="-122"/>
                 <a:cs typeface="Calibri" pitchFamily="34" charset="-120"/>
               </a:rPr>
-              <a:t>A clean, API-first, three-layer architecture with every rule enforced server-side — ready for a real database, a real client, and real scale.</a:t>
+              <a:t>ASP.NET Core Web API (.NET 10), C# 13 — API-first, no server-rendered views.</a:t>
+            </a:r>
+            <a:endParaRPr lang="en-US" sz="1050" dirty="0"/>
+          </a:p>
+        </p:txBody>
+      </p:sp>
+      <p:sp>
+        <p:nvSpPr>
+          <p:cNvPr id="22" name="Text 20"/>
+          <p:cNvSpPr/>
+          <p:nvPr/>
+        </p:nvSpPr>
+        <p:spPr>
+          <a:xfrm>
+            <a:off x="4663440" y="2990088"/>
+            <a:ext cx="6675120" cy="320040"/>
+          </a:xfrm>
+          <a:prstGeom prst="rect">
+            <a:avLst/>
+          </a:prstGeom>
+          <a:noFill/>
+          <a:ln/>
+        </p:spPr>
+        <p:txBody>
+          <a:bodyPr wrap="square" rtlCol="0" anchor="ctr"/>
+          <a:lstStyle/>
+          <a:p>
+            <a:pPr indent="0" marL="0">
+              <a:buNone/>
+            </a:pPr>
+            <a:r>
+              <a:rPr lang="en-US" sz="1150" b="1" dirty="0">
+                <a:solidFill>
+                  <a:srgbClr val="FFFFFF"/>
+                </a:solidFill>
+                <a:latin typeface="Calibri" pitchFamily="34" charset="0"/>
+                <a:ea typeface="Calibri" pitchFamily="34" charset="-122"/>
+                <a:cs typeface="Calibri" pitchFamily="34" charset="-120"/>
+              </a:rPr>
+              <a:t>Data Access</a:t>
             </a:r>
             <a:endParaRPr lang="en-US" sz="1150" dirty="0"/>
           </a:p>
@@ -5319,75 +5286,14 @@
       </p:sp>
       <p:sp>
         <p:nvSpPr>
-          <p:cNvPr id="10" name="Shape 8"/>
-          <p:cNvSpPr/>
-          <p:nvPr/>
-        </p:nvSpPr>
-        <p:spPr>
-          <a:xfrm>
-            <a:off x="7991856" y="2880360"/>
-            <a:ext cx="3456432" cy="2651760"/>
-          </a:xfrm>
-          <a:prstGeom prst="roundRect">
-            <a:avLst>
-              <a:gd name="adj" fmla="val 3448"/>
-            </a:avLst>
-          </a:prstGeom>
-          <a:solidFill>
-            <a:srgbClr val="163A57"/>
-          </a:solidFill>
-          <a:ln/>
-        </p:spPr>
-      </p:sp>
-      <p:sp>
-        <p:nvSpPr>
-          <p:cNvPr id="11" name="Text 9"/>
-          <p:cNvSpPr/>
-          <p:nvPr/>
-        </p:nvSpPr>
-        <p:spPr>
-          <a:xfrm>
-            <a:off x="8220456" y="3108960"/>
-            <a:ext cx="2999232" cy="457200"/>
-          </a:xfrm>
-          <a:prstGeom prst="rect">
-            <a:avLst/>
-          </a:prstGeom>
-          <a:noFill/>
-          <a:ln/>
-        </p:spPr>
-        <p:txBody>
-          <a:bodyPr wrap="square" rtlCol="0" anchor="ctr"/>
-          <a:lstStyle/>
-          <a:p>
-            <a:pPr indent="0" marL="0">
-              <a:buNone/>
-            </a:pPr>
-            <a:r>
-              <a:rPr lang="en-US" sz="1400" b="1" dirty="0">
-                <a:solidFill>
-                  <a:srgbClr val="22C7B5"/>
-                </a:solidFill>
-                <a:latin typeface="Calibri" pitchFamily="34" charset="0"/>
-                <a:ea typeface="Calibri" pitchFamily="34" charset="-122"/>
-                <a:cs typeface="Calibri" pitchFamily="34" charset="-120"/>
-              </a:rPr>
-              <a:t>For Governance</a:t>
-            </a:r>
-            <a:endParaRPr lang="en-US" sz="1400" dirty="0"/>
-          </a:p>
-        </p:txBody>
-      </p:sp>
-      <p:sp>
-        <p:nvSpPr>
-          <p:cNvPr id="12" name="Text 10"/>
-          <p:cNvSpPr/>
-          <p:nvPr/>
-        </p:nvSpPr>
-        <p:spPr>
-          <a:xfrm>
-            <a:off x="8220456" y="3657600"/>
-            <a:ext cx="2999232" cy="1737360"/>
+          <p:cNvPr id="23" name="Text 21"/>
+          <p:cNvSpPr/>
+          <p:nvPr/>
+        </p:nvSpPr>
+        <p:spPr>
+          <a:xfrm>
+            <a:off x="4663440" y="3300984"/>
+            <a:ext cx="6675120" cy="502920"/>
           </a:xfrm>
           <a:prstGeom prst="rect">
             <a:avLst/>
@@ -5401,12 +5307,12 @@
           <a:p>
             <a:pPr indent="0" marL="0">
               <a:lnSpc>
-                <a:spcPct val="130000"/>
+                <a:spcPct val="122000"/>
               </a:lnSpc>
               <a:buNone/>
             </a:pPr>
             <a:r>
-              <a:rPr lang="en-US" sz="1150" dirty="0">
+              <a:rPr lang="en-US" sz="1050" dirty="0">
                 <a:solidFill>
                   <a:srgbClr val="9FB3C8"/>
                 </a:solidFill>
@@ -5414,9 +5320,252 @@
                 <a:ea typeface="Calibri" pitchFamily="34" charset="-122"/>
                 <a:cs typeface="Calibri" pitchFamily="34" charset="-120"/>
               </a:rPr>
-              <a:t>Full audit trails and a documented spec set (FSD, TSD, Test Cases, Review Q&amp;A) ready for onboarding and sign-off.</a:t>
+              <a:t>Entity Framework Core 10 over Microsoft SQL Server.</a:t>
+            </a:r>
+            <a:endParaRPr lang="en-US" sz="1050" dirty="0"/>
+          </a:p>
+        </p:txBody>
+      </p:sp>
+      <p:sp>
+        <p:nvSpPr>
+          <p:cNvPr id="24" name="Text 22"/>
+          <p:cNvSpPr/>
+          <p:nvPr/>
+        </p:nvSpPr>
+        <p:spPr>
+          <a:xfrm>
+            <a:off x="4663440" y="3831336"/>
+            <a:ext cx="6675120" cy="320040"/>
+          </a:xfrm>
+          <a:prstGeom prst="rect">
+            <a:avLst/>
+          </a:prstGeom>
+          <a:noFill/>
+          <a:ln/>
+        </p:spPr>
+        <p:txBody>
+          <a:bodyPr wrap="square" rtlCol="0" anchor="ctr"/>
+          <a:lstStyle/>
+          <a:p>
+            <a:pPr indent="0" marL="0">
+              <a:buNone/>
+            </a:pPr>
+            <a:r>
+              <a:rPr lang="en-US" sz="1150" b="1" dirty="0">
+                <a:solidFill>
+                  <a:srgbClr val="FFFFFF"/>
+                </a:solidFill>
+                <a:latin typeface="Calibri" pitchFamily="34" charset="0"/>
+                <a:ea typeface="Calibri" pitchFamily="34" charset="-122"/>
+                <a:cs typeface="Calibri" pitchFamily="34" charset="-120"/>
+              </a:rPr>
+              <a:t>Authentication</a:t>
             </a:r>
             <a:endParaRPr lang="en-US" sz="1150" dirty="0"/>
+          </a:p>
+        </p:txBody>
+      </p:sp>
+      <p:sp>
+        <p:nvSpPr>
+          <p:cNvPr id="25" name="Text 23"/>
+          <p:cNvSpPr/>
+          <p:nvPr/>
+        </p:nvSpPr>
+        <p:spPr>
+          <a:xfrm>
+            <a:off x="4663440" y="4142232"/>
+            <a:ext cx="6675120" cy="502920"/>
+          </a:xfrm>
+          <a:prstGeom prst="rect">
+            <a:avLst/>
+          </a:prstGeom>
+          <a:noFill/>
+          <a:ln/>
+        </p:spPr>
+        <p:txBody>
+          <a:bodyPr wrap="square" rtlCol="0" anchor="ctr"/>
+          <a:lstStyle/>
+          <a:p>
+            <a:pPr indent="0" marL="0">
+              <a:lnSpc>
+                <a:spcPct val="122000"/>
+              </a:lnSpc>
+              <a:buNone/>
+            </a:pPr>
+            <a:r>
+              <a:rPr lang="en-US" sz="1050" dirty="0">
+                <a:solidFill>
+                  <a:srgbClr val="9FB3C8"/>
+                </a:solidFill>
+                <a:latin typeface="Calibri" pitchFamily="34" charset="0"/>
+                <a:ea typeface="Calibri" pitchFamily="34" charset="-122"/>
+                <a:cs typeface="Calibri" pitchFamily="34" charset="-120"/>
+              </a:rPr>
+              <a:t>JWT Bearer (HMAC-SHA256) with server-side revocation, plus BCrypt.Net-Next for password hashing.</a:t>
+            </a:r>
+            <a:endParaRPr lang="en-US" sz="1050" dirty="0"/>
+          </a:p>
+        </p:txBody>
+      </p:sp>
+      <p:sp>
+        <p:nvSpPr>
+          <p:cNvPr id="26" name="Text 24"/>
+          <p:cNvSpPr/>
+          <p:nvPr/>
+        </p:nvSpPr>
+        <p:spPr>
+          <a:xfrm>
+            <a:off x="4663440" y="4672584"/>
+            <a:ext cx="6675120" cy="320040"/>
+          </a:xfrm>
+          <a:prstGeom prst="rect">
+            <a:avLst/>
+          </a:prstGeom>
+          <a:noFill/>
+          <a:ln/>
+        </p:spPr>
+        <p:txBody>
+          <a:bodyPr wrap="square" rtlCol="0" anchor="ctr"/>
+          <a:lstStyle/>
+          <a:p>
+            <a:pPr indent="0" marL="0">
+              <a:buNone/>
+            </a:pPr>
+            <a:r>
+              <a:rPr lang="en-US" sz="1150" b="1" dirty="0">
+                <a:solidFill>
+                  <a:srgbClr val="FFFFFF"/>
+                </a:solidFill>
+                <a:latin typeface="Calibri" pitchFamily="34" charset="0"/>
+                <a:ea typeface="Calibri" pitchFamily="34" charset="-122"/>
+                <a:cs typeface="Calibri" pitchFamily="34" charset="-120"/>
+              </a:rPr>
+              <a:t>Logging</a:t>
+            </a:r>
+            <a:endParaRPr lang="en-US" sz="1150" dirty="0"/>
+          </a:p>
+        </p:txBody>
+      </p:sp>
+      <p:sp>
+        <p:nvSpPr>
+          <p:cNvPr id="27" name="Text 25"/>
+          <p:cNvSpPr/>
+          <p:nvPr/>
+        </p:nvSpPr>
+        <p:spPr>
+          <a:xfrm>
+            <a:off x="4663440" y="4983480"/>
+            <a:ext cx="6675120" cy="502920"/>
+          </a:xfrm>
+          <a:prstGeom prst="rect">
+            <a:avLst/>
+          </a:prstGeom>
+          <a:noFill/>
+          <a:ln/>
+        </p:spPr>
+        <p:txBody>
+          <a:bodyPr wrap="square" rtlCol="0" anchor="ctr"/>
+          <a:lstStyle/>
+          <a:p>
+            <a:pPr indent="0" marL="0">
+              <a:lnSpc>
+                <a:spcPct val="122000"/>
+              </a:lnSpc>
+              <a:buNone/>
+            </a:pPr>
+            <a:r>
+              <a:rPr lang="en-US" sz="1050" dirty="0">
+                <a:solidFill>
+                  <a:srgbClr val="9FB3C8"/>
+                </a:solidFill>
+                <a:latin typeface="Calibri" pitchFamily="34" charset="0"/>
+                <a:ea typeface="Calibri" pitchFamily="34" charset="-122"/>
+                <a:cs typeface="Calibri" pitchFamily="34" charset="-120"/>
+              </a:rPr>
+              <a:t>Serilog, console + rolling file sinks.</a:t>
+            </a:r>
+            <a:endParaRPr lang="en-US" sz="1050" dirty="0"/>
+          </a:p>
+        </p:txBody>
+      </p:sp>
+      <p:sp>
+        <p:nvSpPr>
+          <p:cNvPr id="28" name="Text 26"/>
+          <p:cNvSpPr/>
+          <p:nvPr/>
+        </p:nvSpPr>
+        <p:spPr>
+          <a:xfrm>
+            <a:off x="4663440" y="5513832"/>
+            <a:ext cx="6675120" cy="320040"/>
+          </a:xfrm>
+          <a:prstGeom prst="rect">
+            <a:avLst/>
+          </a:prstGeom>
+          <a:noFill/>
+          <a:ln/>
+        </p:spPr>
+        <p:txBody>
+          <a:bodyPr wrap="square" rtlCol="0" anchor="ctr"/>
+          <a:lstStyle/>
+          <a:p>
+            <a:pPr indent="0" marL="0">
+              <a:buNone/>
+            </a:pPr>
+            <a:r>
+              <a:rPr lang="en-US" sz="1150" b="1" dirty="0">
+                <a:solidFill>
+                  <a:srgbClr val="FFFFFF"/>
+                </a:solidFill>
+                <a:latin typeface="Calibri" pitchFamily="34" charset="0"/>
+                <a:ea typeface="Calibri" pitchFamily="34" charset="-122"/>
+                <a:cs typeface="Calibri" pitchFamily="34" charset="-120"/>
+              </a:rPr>
+              <a:t>Why API-first + SPA</a:t>
+            </a:r>
+            <a:endParaRPr lang="en-US" sz="1150" dirty="0"/>
+          </a:p>
+        </p:txBody>
+      </p:sp>
+      <p:sp>
+        <p:nvSpPr>
+          <p:cNvPr id="29" name="Text 27"/>
+          <p:cNvSpPr/>
+          <p:nvPr/>
+        </p:nvSpPr>
+        <p:spPr>
+          <a:xfrm>
+            <a:off x="4663440" y="5824728"/>
+            <a:ext cx="6675120" cy="502920"/>
+          </a:xfrm>
+          <a:prstGeom prst="rect">
+            <a:avLst/>
+          </a:prstGeom>
+          <a:noFill/>
+          <a:ln/>
+        </p:spPr>
+        <p:txBody>
+          <a:bodyPr wrap="square" rtlCol="0" anchor="ctr"/>
+          <a:lstStyle/>
+          <a:p>
+            <a:pPr indent="0" marL="0">
+              <a:lnSpc>
+                <a:spcPct val="122000"/>
+              </a:lnSpc>
+              <a:buNone/>
+            </a:pPr>
+            <a:r>
+              <a:rPr lang="en-US" sz="1050" dirty="0">
+                <a:solidFill>
+                  <a:srgbClr val="9FB3C8"/>
+                </a:solidFill>
+                <a:latin typeface="Calibri" pitchFamily="34" charset="0"/>
+                <a:ea typeface="Calibri" pitchFamily="34" charset="-122"/>
+                <a:cs typeface="Calibri" pitchFamily="34" charset="-120"/>
+              </a:rPr>
+              <a:t>Decouples the client from the server entirely — any future client (mobile, third-party) can consume the same, fully server-enforced API.</a:t>
+            </a:r>
+            <a:endParaRPr lang="en-US" sz="1050" dirty="0"/>
           </a:p>
         </p:txBody>
       </p:sp>
@@ -5431,6 +5580,1498 @@
 <file path=ppt/slides/slide14.xml><?xml version="1.0" encoding="utf-8"?>
 <p:sld xmlns:a="http://schemas.openxmlformats.org/drawingml/2006/main" xmlns:r="http://schemas.openxmlformats.org/officeDocument/2006/relationships" xmlns:p="http://schemas.openxmlformats.org/presentationml/2006/main">
   <p:cSld name="Slide 14">
+    <p:bg>
+      <p:bgPr>
+        <a:solidFill>
+          <a:srgbClr val="F7F9FB"/>
+        </a:solidFill>
+      </p:bgPr>
+    </p:bg>
+    <p:spTree>
+      <p:nvGrpSpPr>
+        <p:cNvPr id="1" name=""/>
+        <p:cNvGrpSpPr/>
+        <p:nvPr/>
+      </p:nvGrpSpPr>
+      <p:grpSpPr>
+        <a:xfrm>
+          <a:off x="0" y="0"/>
+          <a:ext cx="0" cy="0"/>
+          <a:chOff x="0" y="0"/>
+          <a:chExt cx="0" cy="0"/>
+        </a:xfrm>
+      </p:grpSpPr>
+      <p:sp>
+        <p:nvSpPr>
+          <p:cNvPr id="2" name="Text 0"/>
+          <p:cNvSpPr/>
+          <p:nvPr/>
+        </p:nvSpPr>
+        <p:spPr>
+          <a:xfrm>
+            <a:off x="640080" y="411480"/>
+            <a:ext cx="10058400" cy="548640"/>
+          </a:xfrm>
+          <a:prstGeom prst="rect">
+            <a:avLst/>
+          </a:prstGeom>
+          <a:noFill/>
+          <a:ln/>
+        </p:spPr>
+        <p:txBody>
+          <a:bodyPr wrap="square" rtlCol="0" anchor="ctr"/>
+          <a:lstStyle/>
+          <a:p>
+            <a:pPr indent="0" marL="0">
+              <a:buNone/>
+            </a:pPr>
+            <a:r>
+              <a:rPr lang="en-US" sz="2600" b="1" dirty="0">
+                <a:solidFill>
+                  <a:srgbClr val="0F2438"/>
+                </a:solidFill>
+                <a:latin typeface="Cambria" pitchFamily="34" charset="0"/>
+                <a:ea typeface="Cambria" pitchFamily="34" charset="-122"/>
+                <a:cs typeface="Cambria" pitchFamily="34" charset="-120"/>
+              </a:rPr>
+              <a:t>DOCUMENTATION &amp; GOVERNANCE</a:t>
+            </a:r>
+            <a:endParaRPr lang="en-US" sz="2600" dirty="0"/>
+          </a:p>
+        </p:txBody>
+      </p:sp>
+      <p:sp>
+        <p:nvSpPr>
+          <p:cNvPr id="3" name="Text 1"/>
+          <p:cNvSpPr/>
+          <p:nvPr/>
+        </p:nvSpPr>
+        <p:spPr>
+          <a:xfrm>
+            <a:off x="640080" y="960120"/>
+            <a:ext cx="10515600" cy="365760"/>
+          </a:xfrm>
+          <a:prstGeom prst="rect">
+            <a:avLst/>
+          </a:prstGeom>
+          <a:noFill/>
+          <a:ln/>
+        </p:spPr>
+        <p:txBody>
+          <a:bodyPr wrap="square" rtlCol="0" anchor="ctr"/>
+          <a:lstStyle/>
+          <a:p>
+            <a:pPr indent="0" marL="0">
+              <a:buNone/>
+            </a:pPr>
+            <a:r>
+              <a:rPr lang="en-US" sz="1200" i="1" dirty="0">
+                <a:solidFill>
+                  <a:srgbClr val="5B6B7A"/>
+                </a:solidFill>
+                <a:latin typeface="Calibri" pitchFamily="34" charset="0"/>
+                <a:ea typeface="Calibri" pitchFamily="34" charset="-122"/>
+                <a:cs typeface="Calibri" pitchFamily="34" charset="-120"/>
+              </a:rPr>
+              <a:t>This overview is backed by four full deliverables for teams that need the depth.</a:t>
+            </a:r>
+            <a:endParaRPr lang="en-US" sz="1200" dirty="0"/>
+          </a:p>
+        </p:txBody>
+      </p:sp>
+      <p:sp>
+        <p:nvSpPr>
+          <p:cNvPr id="4" name="Shape 2"/>
+          <p:cNvSpPr/>
+          <p:nvPr/>
+        </p:nvSpPr>
+        <p:spPr>
+          <a:xfrm>
+            <a:off x="640080" y="1508760"/>
+            <a:ext cx="5212080" cy="1828800"/>
+          </a:xfrm>
+          <a:prstGeom prst="roundRect">
+            <a:avLst>
+              <a:gd name="adj" fmla="val 4500"/>
+            </a:avLst>
+          </a:prstGeom>
+          <a:solidFill>
+            <a:srgbClr val="FFFFFF"/>
+          </a:solidFill>
+          <a:ln w="12700">
+            <a:solidFill>
+              <a:srgbClr val="EEF3F6"/>
+            </a:solidFill>
+            <a:prstDash val="solid"/>
+          </a:ln>
+        </p:spPr>
+      </p:sp>
+      <p:sp>
+        <p:nvSpPr>
+          <p:cNvPr id="5" name="Text 3"/>
+          <p:cNvSpPr/>
+          <p:nvPr/>
+        </p:nvSpPr>
+        <p:spPr>
+          <a:xfrm>
+            <a:off x="896112" y="1691640"/>
+            <a:ext cx="4700016" cy="411480"/>
+          </a:xfrm>
+          <a:prstGeom prst="rect">
+            <a:avLst/>
+          </a:prstGeom>
+          <a:noFill/>
+          <a:ln/>
+        </p:spPr>
+        <p:txBody>
+          <a:bodyPr wrap="square" rtlCol="0" anchor="ctr"/>
+          <a:lstStyle/>
+          <a:p>
+            <a:pPr indent="0" marL="0">
+              <a:buNone/>
+            </a:pPr>
+            <a:r>
+              <a:rPr lang="en-US" sz="1400" b="1" dirty="0">
+                <a:solidFill>
+                  <a:srgbClr val="0F2438"/>
+                </a:solidFill>
+                <a:latin typeface="Calibri" pitchFamily="34" charset="0"/>
+                <a:ea typeface="Calibri" pitchFamily="34" charset="-122"/>
+                <a:cs typeface="Calibri" pitchFamily="34" charset="-120"/>
+              </a:rPr>
+              <a:t>Functional Specification</a:t>
+            </a:r>
+            <a:endParaRPr lang="en-US" sz="1400" dirty="0"/>
+          </a:p>
+        </p:txBody>
+      </p:sp>
+      <p:sp>
+        <p:nvSpPr>
+          <p:cNvPr id="6" name="Text 4"/>
+          <p:cNvSpPr/>
+          <p:nvPr/>
+        </p:nvSpPr>
+        <p:spPr>
+          <a:xfrm>
+            <a:off x="896112" y="2130552"/>
+            <a:ext cx="4700016" cy="777240"/>
+          </a:xfrm>
+          <a:prstGeom prst="rect">
+            <a:avLst/>
+          </a:prstGeom>
+          <a:noFill/>
+          <a:ln/>
+        </p:spPr>
+        <p:txBody>
+          <a:bodyPr wrap="square" rtlCol="0" anchor="ctr"/>
+          <a:lstStyle/>
+          <a:p>
+            <a:pPr indent="0" marL="0">
+              <a:lnSpc>
+                <a:spcPct val="125000"/>
+              </a:lnSpc>
+              <a:buNone/>
+            </a:pPr>
+            <a:r>
+              <a:rPr lang="en-US" sz="1100" dirty="0">
+                <a:solidFill>
+                  <a:srgbClr val="1B2733"/>
+                </a:solidFill>
+                <a:latin typeface="Calibri" pitchFamily="34" charset="0"/>
+                <a:ea typeface="Calibri" pitchFamily="34" charset="-122"/>
+                <a:cs typeface="Calibri" pitchFamily="34" charset="-120"/>
+              </a:rPr>
+              <a:t>What the app does — business requirements, roles, workflows, permission matrix.</a:t>
+            </a:r>
+            <a:endParaRPr lang="en-US" sz="1100" dirty="0"/>
+          </a:p>
+        </p:txBody>
+      </p:sp>
+      <p:sp>
+        <p:nvSpPr>
+          <p:cNvPr id="7" name="Text 5"/>
+          <p:cNvSpPr/>
+          <p:nvPr/>
+        </p:nvSpPr>
+        <p:spPr>
+          <a:xfrm>
+            <a:off x="896112" y="2926080"/>
+            <a:ext cx="4700016" cy="320040"/>
+          </a:xfrm>
+          <a:prstGeom prst="rect">
+            <a:avLst/>
+          </a:prstGeom>
+          <a:noFill/>
+          <a:ln/>
+        </p:spPr>
+        <p:txBody>
+          <a:bodyPr wrap="square" rtlCol="0" anchor="ctr"/>
+          <a:lstStyle/>
+          <a:p>
+            <a:pPr indent="0" marL="0">
+              <a:buNone/>
+            </a:pPr>
+            <a:r>
+              <a:rPr lang="en-US" sz="950" b="1" dirty="0">
+                <a:solidFill>
+                  <a:srgbClr val="22C7B5"/>
+                </a:solidFill>
+                <a:latin typeface="Calibri" pitchFamily="34" charset="0"/>
+                <a:ea typeface="Calibri" pitchFamily="34" charset="-122"/>
+                <a:cs typeface="Calibri" pitchFamily="34" charset="-120"/>
+              </a:rPr>
+              <a:t>AUDIENCE:  Business stakeholders, all developers</a:t>
+            </a:r>
+            <a:endParaRPr lang="en-US" sz="950" dirty="0"/>
+          </a:p>
+        </p:txBody>
+      </p:sp>
+      <p:sp>
+        <p:nvSpPr>
+          <p:cNvPr id="8" name="Shape 6"/>
+          <p:cNvSpPr/>
+          <p:nvPr/>
+        </p:nvSpPr>
+        <p:spPr>
+          <a:xfrm>
+            <a:off x="6217920" y="1508760"/>
+            <a:ext cx="5212080" cy="1828800"/>
+          </a:xfrm>
+          <a:prstGeom prst="roundRect">
+            <a:avLst>
+              <a:gd name="adj" fmla="val 4500"/>
+            </a:avLst>
+          </a:prstGeom>
+          <a:solidFill>
+            <a:srgbClr val="FFFFFF"/>
+          </a:solidFill>
+          <a:ln w="12700">
+            <a:solidFill>
+              <a:srgbClr val="EEF3F6"/>
+            </a:solidFill>
+            <a:prstDash val="solid"/>
+          </a:ln>
+        </p:spPr>
+      </p:sp>
+      <p:sp>
+        <p:nvSpPr>
+          <p:cNvPr id="9" name="Text 7"/>
+          <p:cNvSpPr/>
+          <p:nvPr/>
+        </p:nvSpPr>
+        <p:spPr>
+          <a:xfrm>
+            <a:off x="6473952" y="1691640"/>
+            <a:ext cx="4700016" cy="411480"/>
+          </a:xfrm>
+          <a:prstGeom prst="rect">
+            <a:avLst/>
+          </a:prstGeom>
+          <a:noFill/>
+          <a:ln/>
+        </p:spPr>
+        <p:txBody>
+          <a:bodyPr wrap="square" rtlCol="0" anchor="ctr"/>
+          <a:lstStyle/>
+          <a:p>
+            <a:pPr indent="0" marL="0">
+              <a:buNone/>
+            </a:pPr>
+            <a:r>
+              <a:rPr lang="en-US" sz="1400" b="1" dirty="0">
+                <a:solidFill>
+                  <a:srgbClr val="0F2438"/>
+                </a:solidFill>
+                <a:latin typeface="Calibri" pitchFamily="34" charset="0"/>
+                <a:ea typeface="Calibri" pitchFamily="34" charset="-122"/>
+                <a:cs typeface="Calibri" pitchFamily="34" charset="-120"/>
+              </a:rPr>
+              <a:t>Technical Specification</a:t>
+            </a:r>
+            <a:endParaRPr lang="en-US" sz="1400" dirty="0"/>
+          </a:p>
+        </p:txBody>
+      </p:sp>
+      <p:sp>
+        <p:nvSpPr>
+          <p:cNvPr id="10" name="Text 8"/>
+          <p:cNvSpPr/>
+          <p:nvPr/>
+        </p:nvSpPr>
+        <p:spPr>
+          <a:xfrm>
+            <a:off x="6473952" y="2130552"/>
+            <a:ext cx="4700016" cy="777240"/>
+          </a:xfrm>
+          <a:prstGeom prst="rect">
+            <a:avLst/>
+          </a:prstGeom>
+          <a:noFill/>
+          <a:ln/>
+        </p:spPr>
+        <p:txBody>
+          <a:bodyPr wrap="square" rtlCol="0" anchor="ctr"/>
+          <a:lstStyle/>
+          <a:p>
+            <a:pPr indent="0" marL="0">
+              <a:lnSpc>
+                <a:spcPct val="125000"/>
+              </a:lnSpc>
+              <a:buNone/>
+            </a:pPr>
+            <a:r>
+              <a:rPr lang="en-US" sz="1100" dirty="0">
+                <a:solidFill>
+                  <a:srgbClr val="1B2733"/>
+                </a:solidFill>
+                <a:latin typeface="Calibri" pitchFamily="34" charset="0"/>
+                <a:ea typeface="Calibri" pitchFamily="34" charset="-122"/>
+                <a:cs typeface="Calibri" pitchFamily="34" charset="-120"/>
+              </a:rPr>
+              <a:t>How it's built — architecture, HLD/LLD, every module's frontend + backend detail.</a:t>
+            </a:r>
+            <a:endParaRPr lang="en-US" sz="1100" dirty="0"/>
+          </a:p>
+        </p:txBody>
+      </p:sp>
+      <p:sp>
+        <p:nvSpPr>
+          <p:cNvPr id="11" name="Text 9"/>
+          <p:cNvSpPr/>
+          <p:nvPr/>
+        </p:nvSpPr>
+        <p:spPr>
+          <a:xfrm>
+            <a:off x="6473952" y="2926080"/>
+            <a:ext cx="4700016" cy="320040"/>
+          </a:xfrm>
+          <a:prstGeom prst="rect">
+            <a:avLst/>
+          </a:prstGeom>
+          <a:noFill/>
+          <a:ln/>
+        </p:spPr>
+        <p:txBody>
+          <a:bodyPr wrap="square" rtlCol="0" anchor="ctr"/>
+          <a:lstStyle/>
+          <a:p>
+            <a:pPr indent="0" marL="0">
+              <a:buNone/>
+            </a:pPr>
+            <a:r>
+              <a:rPr lang="en-US" sz="950" b="1" dirty="0">
+                <a:solidFill>
+                  <a:srgbClr val="22C7B5"/>
+                </a:solidFill>
+                <a:latin typeface="Calibri" pitchFamily="34" charset="0"/>
+                <a:ea typeface="Calibri" pitchFamily="34" charset="-122"/>
+                <a:cs typeface="Calibri" pitchFamily="34" charset="-120"/>
+              </a:rPr>
+              <a:t>AUDIENCE:  Developers, QA, tech leads</a:t>
+            </a:r>
+            <a:endParaRPr lang="en-US" sz="950" dirty="0"/>
+          </a:p>
+        </p:txBody>
+      </p:sp>
+      <p:sp>
+        <p:nvSpPr>
+          <p:cNvPr id="12" name="Shape 10"/>
+          <p:cNvSpPr/>
+          <p:nvPr/>
+        </p:nvSpPr>
+        <p:spPr>
+          <a:xfrm>
+            <a:off x="640080" y="3566160"/>
+            <a:ext cx="5212080" cy="1828800"/>
+          </a:xfrm>
+          <a:prstGeom prst="roundRect">
+            <a:avLst>
+              <a:gd name="adj" fmla="val 4500"/>
+            </a:avLst>
+          </a:prstGeom>
+          <a:solidFill>
+            <a:srgbClr val="FFFFFF"/>
+          </a:solidFill>
+          <a:ln w="12700">
+            <a:solidFill>
+              <a:srgbClr val="EEF3F6"/>
+            </a:solidFill>
+            <a:prstDash val="solid"/>
+          </a:ln>
+        </p:spPr>
+      </p:sp>
+      <p:sp>
+        <p:nvSpPr>
+          <p:cNvPr id="13" name="Text 11"/>
+          <p:cNvSpPr/>
+          <p:nvPr/>
+        </p:nvSpPr>
+        <p:spPr>
+          <a:xfrm>
+            <a:off x="896112" y="3749040"/>
+            <a:ext cx="4700016" cy="411480"/>
+          </a:xfrm>
+          <a:prstGeom prst="rect">
+            <a:avLst/>
+          </a:prstGeom>
+          <a:noFill/>
+          <a:ln/>
+        </p:spPr>
+        <p:txBody>
+          <a:bodyPr wrap="square" rtlCol="0" anchor="ctr"/>
+          <a:lstStyle/>
+          <a:p>
+            <a:pPr indent="0" marL="0">
+              <a:buNone/>
+            </a:pPr>
+            <a:r>
+              <a:rPr lang="en-US" sz="1400" b="1" dirty="0">
+                <a:solidFill>
+                  <a:srgbClr val="0F2438"/>
+                </a:solidFill>
+                <a:latin typeface="Calibri" pitchFamily="34" charset="0"/>
+                <a:ea typeface="Calibri" pitchFamily="34" charset="-122"/>
+                <a:cs typeface="Calibri" pitchFamily="34" charset="-120"/>
+              </a:rPr>
+              <a:t>Test Case Sheet</a:t>
+            </a:r>
+            <a:endParaRPr lang="en-US" sz="1400" dirty="0"/>
+          </a:p>
+        </p:txBody>
+      </p:sp>
+      <p:sp>
+        <p:nvSpPr>
+          <p:cNvPr id="14" name="Text 12"/>
+          <p:cNvSpPr/>
+          <p:nvPr/>
+        </p:nvSpPr>
+        <p:spPr>
+          <a:xfrm>
+            <a:off x="896112" y="4187952"/>
+            <a:ext cx="4700016" cy="777240"/>
+          </a:xfrm>
+          <a:prstGeom prst="rect">
+            <a:avLst/>
+          </a:prstGeom>
+          <a:noFill/>
+          <a:ln/>
+        </p:spPr>
+        <p:txBody>
+          <a:bodyPr wrap="square" rtlCol="0" anchor="ctr"/>
+          <a:lstStyle/>
+          <a:p>
+            <a:pPr indent="0" marL="0">
+              <a:lnSpc>
+                <a:spcPct val="125000"/>
+              </a:lnSpc>
+              <a:buNone/>
+            </a:pPr>
+            <a:r>
+              <a:rPr lang="en-US" sz="1100" dirty="0">
+                <a:solidFill>
+                  <a:srgbClr val="1B2733"/>
+                </a:solidFill>
+                <a:latin typeface="Calibri" pitchFamily="34" charset="0"/>
+                <a:ea typeface="Calibri" pitchFamily="34" charset="-122"/>
+                <a:cs typeface="Calibri" pitchFamily="34" charset="-120"/>
+              </a:rPr>
+              <a:t>QA test cases across every module and feature.</a:t>
+            </a:r>
+            <a:endParaRPr lang="en-US" sz="1100" dirty="0"/>
+          </a:p>
+        </p:txBody>
+      </p:sp>
+      <p:sp>
+        <p:nvSpPr>
+          <p:cNvPr id="15" name="Text 13"/>
+          <p:cNvSpPr/>
+          <p:nvPr/>
+        </p:nvSpPr>
+        <p:spPr>
+          <a:xfrm>
+            <a:off x="896112" y="4983480"/>
+            <a:ext cx="4700016" cy="320040"/>
+          </a:xfrm>
+          <a:prstGeom prst="rect">
+            <a:avLst/>
+          </a:prstGeom>
+          <a:noFill/>
+          <a:ln/>
+        </p:spPr>
+        <p:txBody>
+          <a:bodyPr wrap="square" rtlCol="0" anchor="ctr"/>
+          <a:lstStyle/>
+          <a:p>
+            <a:pPr indent="0" marL="0">
+              <a:buNone/>
+            </a:pPr>
+            <a:r>
+              <a:rPr lang="en-US" sz="950" b="1" dirty="0">
+                <a:solidFill>
+                  <a:srgbClr val="22C7B5"/>
+                </a:solidFill>
+                <a:latin typeface="Calibri" pitchFamily="34" charset="0"/>
+                <a:ea typeface="Calibri" pitchFamily="34" charset="-122"/>
+                <a:cs typeface="Calibri" pitchFamily="34" charset="-120"/>
+              </a:rPr>
+              <a:t>AUDIENCE:  QA, developers, tech/team leads</a:t>
+            </a:r>
+            <a:endParaRPr lang="en-US" sz="950" dirty="0"/>
+          </a:p>
+        </p:txBody>
+      </p:sp>
+      <p:sp>
+        <p:nvSpPr>
+          <p:cNvPr id="16" name="Shape 14"/>
+          <p:cNvSpPr/>
+          <p:nvPr/>
+        </p:nvSpPr>
+        <p:spPr>
+          <a:xfrm>
+            <a:off x="6217920" y="3566160"/>
+            <a:ext cx="5212080" cy="1828800"/>
+          </a:xfrm>
+          <a:prstGeom prst="roundRect">
+            <a:avLst>
+              <a:gd name="adj" fmla="val 4500"/>
+            </a:avLst>
+          </a:prstGeom>
+          <a:solidFill>
+            <a:srgbClr val="FFFFFF"/>
+          </a:solidFill>
+          <a:ln w="12700">
+            <a:solidFill>
+              <a:srgbClr val="EEF3F6"/>
+            </a:solidFill>
+            <a:prstDash val="solid"/>
+          </a:ln>
+        </p:spPr>
+      </p:sp>
+      <p:sp>
+        <p:nvSpPr>
+          <p:cNvPr id="17" name="Text 15"/>
+          <p:cNvSpPr/>
+          <p:nvPr/>
+        </p:nvSpPr>
+        <p:spPr>
+          <a:xfrm>
+            <a:off x="6473952" y="3749040"/>
+            <a:ext cx="4700016" cy="411480"/>
+          </a:xfrm>
+          <a:prstGeom prst="rect">
+            <a:avLst/>
+          </a:prstGeom>
+          <a:noFill/>
+          <a:ln/>
+        </p:spPr>
+        <p:txBody>
+          <a:bodyPr wrap="square" rtlCol="0" anchor="ctr"/>
+          <a:lstStyle/>
+          <a:p>
+            <a:pPr indent="0" marL="0">
+              <a:buNone/>
+            </a:pPr>
+            <a:r>
+              <a:rPr lang="en-US" sz="1400" b="1" dirty="0">
+                <a:solidFill>
+                  <a:srgbClr val="0F2438"/>
+                </a:solidFill>
+                <a:latin typeface="Calibri" pitchFamily="34" charset="0"/>
+                <a:ea typeface="Calibri" pitchFamily="34" charset="-122"/>
+                <a:cs typeface="Calibri" pitchFamily="34" charset="-120"/>
+              </a:rPr>
+              <a:t>Project Development Review</a:t>
+            </a:r>
+            <a:endParaRPr lang="en-US" sz="1400" dirty="0"/>
+          </a:p>
+        </p:txBody>
+      </p:sp>
+      <p:sp>
+        <p:nvSpPr>
+          <p:cNvPr id="18" name="Text 16"/>
+          <p:cNvSpPr/>
+          <p:nvPr/>
+        </p:nvSpPr>
+        <p:spPr>
+          <a:xfrm>
+            <a:off x="6473952" y="4187952"/>
+            <a:ext cx="4700016" cy="777240"/>
+          </a:xfrm>
+          <a:prstGeom prst="rect">
+            <a:avLst/>
+          </a:prstGeom>
+          <a:noFill/>
+          <a:ln/>
+        </p:spPr>
+        <p:txBody>
+          <a:bodyPr wrap="square" rtlCol="0" anchor="ctr"/>
+          <a:lstStyle/>
+          <a:p>
+            <a:pPr indent="0" marL="0">
+              <a:lnSpc>
+                <a:spcPct val="125000"/>
+              </a:lnSpc>
+              <a:buNone/>
+            </a:pPr>
+            <a:r>
+              <a:rPr lang="en-US" sz="1100" dirty="0">
+                <a:solidFill>
+                  <a:srgbClr val="1B2733"/>
+                </a:solidFill>
+                <a:latin typeface="Calibri" pitchFamily="34" charset="0"/>
+                <a:ea typeface="Calibri" pitchFamily="34" charset="-122"/>
+                <a:cs typeface="Calibri" pitchFamily="34" charset="-120"/>
+              </a:rPr>
+              <a:t>Structured Q&amp;A covering every part of the build, for design review.</a:t>
+            </a:r>
+            <a:endParaRPr lang="en-US" sz="1100" dirty="0"/>
+          </a:p>
+        </p:txBody>
+      </p:sp>
+      <p:sp>
+        <p:nvSpPr>
+          <p:cNvPr id="19" name="Text 17"/>
+          <p:cNvSpPr/>
+          <p:nvPr/>
+        </p:nvSpPr>
+        <p:spPr>
+          <a:xfrm>
+            <a:off x="6473952" y="4983480"/>
+            <a:ext cx="4700016" cy="320040"/>
+          </a:xfrm>
+          <a:prstGeom prst="rect">
+            <a:avLst/>
+          </a:prstGeom>
+          <a:noFill/>
+          <a:ln/>
+        </p:spPr>
+        <p:txBody>
+          <a:bodyPr wrap="square" rtlCol="0" anchor="ctr"/>
+          <a:lstStyle/>
+          <a:p>
+            <a:pPr indent="0" marL="0">
+              <a:buNone/>
+            </a:pPr>
+            <a:r>
+              <a:rPr lang="en-US" sz="950" b="1" dirty="0">
+                <a:solidFill>
+                  <a:srgbClr val="22C7B5"/>
+                </a:solidFill>
+                <a:latin typeface="Calibri" pitchFamily="34" charset="0"/>
+                <a:ea typeface="Calibri" pitchFamily="34" charset="-122"/>
+                <a:cs typeface="Calibri" pitchFamily="34" charset="-120"/>
+              </a:rPr>
+              <a:t>AUDIENCE:  Tech leads, delivery managers, senior devs</a:t>
+            </a:r>
+            <a:endParaRPr lang="en-US" sz="950" dirty="0"/>
+          </a:p>
+        </p:txBody>
+      </p:sp>
+      <p:sp>
+        <p:nvSpPr>
+          <p:cNvPr id="20" name="Text 18"/>
+          <p:cNvSpPr/>
+          <p:nvPr/>
+        </p:nvSpPr>
+        <p:spPr>
+          <a:xfrm>
+            <a:off x="457200" y="6537960"/>
+            <a:ext cx="7315200" cy="274320"/>
+          </a:xfrm>
+          <a:prstGeom prst="rect">
+            <a:avLst/>
+          </a:prstGeom>
+          <a:noFill/>
+          <a:ln/>
+        </p:spPr>
+        <p:txBody>
+          <a:bodyPr wrap="square" rtlCol="0" anchor="ctr"/>
+          <a:lstStyle/>
+          <a:p>
+            <a:pPr algn="l" indent="0" marL="0">
+              <a:buNone/>
+            </a:pPr>
+            <a:r>
+              <a:rPr lang="en-US" sz="900" dirty="0">
+                <a:solidFill>
+                  <a:srgbClr val="5B6B7A"/>
+                </a:solidFill>
+                <a:latin typeface="Calibri" pitchFamily="34" charset="0"/>
+                <a:ea typeface="Calibri" pitchFamily="34" charset="-122"/>
+                <a:cs typeface="Calibri" pitchFamily="34" charset="-120"/>
+              </a:rPr>
+              <a:t>VaxTrack v2.0.0 — Platform Overview</a:t>
+            </a:r>
+            <a:endParaRPr lang="en-US" sz="900" dirty="0"/>
+          </a:p>
+        </p:txBody>
+      </p:sp>
+    </p:spTree>
+  </p:cSld>
+  <p:clrMapOvr>
+    <a:masterClrMapping/>
+  </p:clrMapOvr>
+</p:sld>
+</file>
+
+<file path=ppt/slides/slide15.xml><?xml version="1.0" encoding="utf-8"?>
+<p:sld xmlns:a="http://schemas.openxmlformats.org/drawingml/2006/main" xmlns:r="http://schemas.openxmlformats.org/officeDocument/2006/relationships" xmlns:p="http://schemas.openxmlformats.org/presentationml/2006/main">
+  <p:cSld name="Slide 15">
+    <p:bg>
+      <p:bgPr>
+        <a:solidFill>
+          <a:srgbClr val="F7F9FB"/>
+        </a:solidFill>
+      </p:bgPr>
+    </p:bg>
+    <p:spTree>
+      <p:nvGrpSpPr>
+        <p:cNvPr id="1" name=""/>
+        <p:cNvGrpSpPr/>
+        <p:nvPr/>
+      </p:nvGrpSpPr>
+      <p:grpSpPr>
+        <a:xfrm>
+          <a:off x="0" y="0"/>
+          <a:ext cx="0" cy="0"/>
+          <a:chOff x="0" y="0"/>
+          <a:chExt cx="0" cy="0"/>
+        </a:xfrm>
+      </p:grpSpPr>
+      <p:sp>
+        <p:nvSpPr>
+          <p:cNvPr id="2" name="Text 0"/>
+          <p:cNvSpPr/>
+          <p:nvPr/>
+        </p:nvSpPr>
+        <p:spPr>
+          <a:xfrm>
+            <a:off x="640080" y="411480"/>
+            <a:ext cx="9144000" cy="548640"/>
+          </a:xfrm>
+          <a:prstGeom prst="rect">
+            <a:avLst/>
+          </a:prstGeom>
+          <a:noFill/>
+          <a:ln/>
+        </p:spPr>
+        <p:txBody>
+          <a:bodyPr wrap="square" rtlCol="0" anchor="ctr"/>
+          <a:lstStyle/>
+          <a:p>
+            <a:pPr indent="0" marL="0">
+              <a:buNone/>
+            </a:pPr>
+            <a:r>
+              <a:rPr lang="en-US" sz="2800" b="1" dirty="0">
+                <a:solidFill>
+                  <a:srgbClr val="0F2438"/>
+                </a:solidFill>
+                <a:latin typeface="Cambria" pitchFamily="34" charset="0"/>
+                <a:ea typeface="Cambria" pitchFamily="34" charset="-122"/>
+                <a:cs typeface="Cambria" pitchFamily="34" charset="-120"/>
+              </a:rPr>
+              <a:t>WHAT'S NEXT</a:t>
+            </a:r>
+            <a:endParaRPr lang="en-US" sz="2800" dirty="0"/>
+          </a:p>
+        </p:txBody>
+      </p:sp>
+      <p:sp>
+        <p:nvSpPr>
+          <p:cNvPr id="3" name="Text 1"/>
+          <p:cNvSpPr/>
+          <p:nvPr/>
+        </p:nvSpPr>
+        <p:spPr>
+          <a:xfrm>
+            <a:off x="640080" y="960120"/>
+            <a:ext cx="10515600" cy="365760"/>
+          </a:xfrm>
+          <a:prstGeom prst="rect">
+            <a:avLst/>
+          </a:prstGeom>
+          <a:noFill/>
+          <a:ln/>
+        </p:spPr>
+        <p:txBody>
+          <a:bodyPr wrap="square" rtlCol="0" anchor="ctr"/>
+          <a:lstStyle/>
+          <a:p>
+            <a:pPr indent="0" marL="0">
+              <a:buNone/>
+            </a:pPr>
+            <a:r>
+              <a:rPr lang="en-US" sz="1200" i="1" dirty="0">
+                <a:solidFill>
+                  <a:srgbClr val="5B6B7A"/>
+                </a:solidFill>
+                <a:latin typeface="Calibri" pitchFamily="34" charset="0"/>
+                <a:ea typeface="Calibri" pitchFamily="34" charset="-122"/>
+                <a:cs typeface="Calibri" pitchFamily="34" charset="-120"/>
+              </a:rPr>
+              <a:t>Explicitly out of scope for this release — candidates for a future one, not gaps in today's requirements.</a:t>
+            </a:r>
+            <a:endParaRPr lang="en-US" sz="1200" dirty="0"/>
+          </a:p>
+        </p:txBody>
+      </p:sp>
+      <p:sp>
+        <p:nvSpPr>
+          <p:cNvPr id="4" name="Shape 2"/>
+          <p:cNvSpPr/>
+          <p:nvPr/>
+        </p:nvSpPr>
+        <p:spPr>
+          <a:xfrm>
+            <a:off x="640080" y="1691640"/>
+            <a:ext cx="329184" cy="329184"/>
+          </a:xfrm>
+          <a:prstGeom prst="ellipse">
+            <a:avLst/>
+          </a:prstGeom>
+          <a:solidFill>
+            <a:srgbClr val="0F2438"/>
+          </a:solidFill>
+          <a:ln/>
+        </p:spPr>
+      </p:sp>
+      <p:sp>
+        <p:nvSpPr>
+          <p:cNvPr id="5" name="Text 3"/>
+          <p:cNvSpPr/>
+          <p:nvPr/>
+        </p:nvSpPr>
+        <p:spPr>
+          <a:xfrm>
+            <a:off x="640080" y="1691640"/>
+            <a:ext cx="329184" cy="329184"/>
+          </a:xfrm>
+          <a:prstGeom prst="rect">
+            <a:avLst/>
+          </a:prstGeom>
+          <a:noFill/>
+          <a:ln/>
+        </p:spPr>
+        <p:txBody>
+          <a:bodyPr wrap="none" rtlCol="0" anchor="ctr"/>
+          <a:lstStyle/>
+          <a:p>
+            <a:pPr algn="ctr" indent="0" marL="0">
+              <a:buNone/>
+            </a:pPr>
+            <a:r>
+              <a:rPr lang="en-US" sz="1500" b="1" dirty="0">
+                <a:solidFill>
+                  <a:srgbClr val="22C7B5"/>
+                </a:solidFill>
+                <a:latin typeface="Calibri" pitchFamily="34" charset="0"/>
+                <a:ea typeface="Calibri" pitchFamily="34" charset="-122"/>
+                <a:cs typeface="Calibri" pitchFamily="34" charset="-120"/>
+              </a:rPr>
+              <a:t>→</a:t>
+            </a:r>
+            <a:endParaRPr lang="en-US" sz="1500" dirty="0"/>
+          </a:p>
+        </p:txBody>
+      </p:sp>
+      <p:sp>
+        <p:nvSpPr>
+          <p:cNvPr id="6" name="Text 4"/>
+          <p:cNvSpPr/>
+          <p:nvPr/>
+        </p:nvSpPr>
+        <p:spPr>
+          <a:xfrm>
+            <a:off x="1143000" y="1600200"/>
+            <a:ext cx="4754880" cy="1097280"/>
+          </a:xfrm>
+          <a:prstGeom prst="rect">
+            <a:avLst/>
+          </a:prstGeom>
+          <a:noFill/>
+          <a:ln/>
+        </p:spPr>
+        <p:txBody>
+          <a:bodyPr wrap="square" rtlCol="0" anchor="ctr"/>
+          <a:lstStyle/>
+          <a:p>
+            <a:pPr indent="0" marL="0">
+              <a:lnSpc>
+                <a:spcPct val="125000"/>
+              </a:lnSpc>
+              <a:buNone/>
+            </a:pPr>
+            <a:r>
+              <a:rPr lang="en-US" sz="1150" dirty="0">
+                <a:solidFill>
+                  <a:srgbClr val="1B2733"/>
+                </a:solidFill>
+                <a:latin typeface="Calibri" pitchFamily="34" charset="0"/>
+                <a:ea typeface="Calibri" pitchFamily="34" charset="-122"/>
+                <a:cs typeface="Calibri" pitchFamily="34" charset="-120"/>
+              </a:rPr>
+              <a:t>Outbound email/SMS delivery of notifications, reset tokens, and certificates (in-app only today).</a:t>
+            </a:r>
+            <a:endParaRPr lang="en-US" sz="1150" dirty="0"/>
+          </a:p>
+        </p:txBody>
+      </p:sp>
+      <p:sp>
+        <p:nvSpPr>
+          <p:cNvPr id="7" name="Shape 5"/>
+          <p:cNvSpPr/>
+          <p:nvPr/>
+        </p:nvSpPr>
+        <p:spPr>
+          <a:xfrm>
+            <a:off x="6263640" y="1691640"/>
+            <a:ext cx="329184" cy="329184"/>
+          </a:xfrm>
+          <a:prstGeom prst="ellipse">
+            <a:avLst/>
+          </a:prstGeom>
+          <a:solidFill>
+            <a:srgbClr val="0F2438"/>
+          </a:solidFill>
+          <a:ln/>
+        </p:spPr>
+      </p:sp>
+      <p:sp>
+        <p:nvSpPr>
+          <p:cNvPr id="8" name="Text 6"/>
+          <p:cNvSpPr/>
+          <p:nvPr/>
+        </p:nvSpPr>
+        <p:spPr>
+          <a:xfrm>
+            <a:off x="6263640" y="1691640"/>
+            <a:ext cx="329184" cy="329184"/>
+          </a:xfrm>
+          <a:prstGeom prst="rect">
+            <a:avLst/>
+          </a:prstGeom>
+          <a:noFill/>
+          <a:ln/>
+        </p:spPr>
+        <p:txBody>
+          <a:bodyPr wrap="none" rtlCol="0" anchor="ctr"/>
+          <a:lstStyle/>
+          <a:p>
+            <a:pPr algn="ctr" indent="0" marL="0">
+              <a:buNone/>
+            </a:pPr>
+            <a:r>
+              <a:rPr lang="en-US" sz="1500" b="1" dirty="0">
+                <a:solidFill>
+                  <a:srgbClr val="22C7B5"/>
+                </a:solidFill>
+                <a:latin typeface="Calibri" pitchFamily="34" charset="0"/>
+                <a:ea typeface="Calibri" pitchFamily="34" charset="-122"/>
+                <a:cs typeface="Calibri" pitchFamily="34" charset="-120"/>
+              </a:rPr>
+              <a:t>→</a:t>
+            </a:r>
+            <a:endParaRPr lang="en-US" sz="1500" dirty="0"/>
+          </a:p>
+        </p:txBody>
+      </p:sp>
+      <p:sp>
+        <p:nvSpPr>
+          <p:cNvPr id="9" name="Text 7"/>
+          <p:cNvSpPr/>
+          <p:nvPr/>
+        </p:nvSpPr>
+        <p:spPr>
+          <a:xfrm>
+            <a:off x="6766560" y="1600200"/>
+            <a:ext cx="4754880" cy="1097280"/>
+          </a:xfrm>
+          <a:prstGeom prst="rect">
+            <a:avLst/>
+          </a:prstGeom>
+          <a:noFill/>
+          <a:ln/>
+        </p:spPr>
+        <p:txBody>
+          <a:bodyPr wrap="square" rtlCol="0" anchor="ctr"/>
+          <a:lstStyle/>
+          <a:p>
+            <a:pPr indent="0" marL="0">
+              <a:lnSpc>
+                <a:spcPct val="125000"/>
+              </a:lnSpc>
+              <a:buNone/>
+            </a:pPr>
+            <a:r>
+              <a:rPr lang="en-US" sz="1150" dirty="0">
+                <a:solidFill>
+                  <a:srgbClr val="1B2733"/>
+                </a:solidFill>
+                <a:latin typeface="Calibri" pitchFamily="34" charset="0"/>
+                <a:ea typeface="Calibri" pitchFamily="34" charset="-122"/>
+                <a:cs typeface="Calibri" pitchFamily="34" charset="-120"/>
+              </a:rPr>
+              <a:t>Payment processing — the platform does not charge for bookings.</a:t>
+            </a:r>
+            <a:endParaRPr lang="en-US" sz="1150" dirty="0"/>
+          </a:p>
+        </p:txBody>
+      </p:sp>
+      <p:sp>
+        <p:nvSpPr>
+          <p:cNvPr id="10" name="Shape 8"/>
+          <p:cNvSpPr/>
+          <p:nvPr/>
+        </p:nvSpPr>
+        <p:spPr>
+          <a:xfrm>
+            <a:off x="640080" y="2926080"/>
+            <a:ext cx="329184" cy="329184"/>
+          </a:xfrm>
+          <a:prstGeom prst="ellipse">
+            <a:avLst/>
+          </a:prstGeom>
+          <a:solidFill>
+            <a:srgbClr val="0F2438"/>
+          </a:solidFill>
+          <a:ln/>
+        </p:spPr>
+      </p:sp>
+      <p:sp>
+        <p:nvSpPr>
+          <p:cNvPr id="11" name="Text 9"/>
+          <p:cNvSpPr/>
+          <p:nvPr/>
+        </p:nvSpPr>
+        <p:spPr>
+          <a:xfrm>
+            <a:off x="640080" y="2926080"/>
+            <a:ext cx="329184" cy="329184"/>
+          </a:xfrm>
+          <a:prstGeom prst="rect">
+            <a:avLst/>
+          </a:prstGeom>
+          <a:noFill/>
+          <a:ln/>
+        </p:spPr>
+        <p:txBody>
+          <a:bodyPr wrap="none" rtlCol="0" anchor="ctr"/>
+          <a:lstStyle/>
+          <a:p>
+            <a:pPr algn="ctr" indent="0" marL="0">
+              <a:buNone/>
+            </a:pPr>
+            <a:r>
+              <a:rPr lang="en-US" sz="1500" b="1" dirty="0">
+                <a:solidFill>
+                  <a:srgbClr val="22C7B5"/>
+                </a:solidFill>
+                <a:latin typeface="Calibri" pitchFamily="34" charset="0"/>
+                <a:ea typeface="Calibri" pitchFamily="34" charset="-122"/>
+                <a:cs typeface="Calibri" pitchFamily="34" charset="-120"/>
+              </a:rPr>
+              <a:t>→</a:t>
+            </a:r>
+            <a:endParaRPr lang="en-US" sz="1500" dirty="0"/>
+          </a:p>
+        </p:txBody>
+      </p:sp>
+      <p:sp>
+        <p:nvSpPr>
+          <p:cNvPr id="12" name="Text 10"/>
+          <p:cNvSpPr/>
+          <p:nvPr/>
+        </p:nvSpPr>
+        <p:spPr>
+          <a:xfrm>
+            <a:off x="1143000" y="2834640"/>
+            <a:ext cx="4754880" cy="1097280"/>
+          </a:xfrm>
+          <a:prstGeom prst="rect">
+            <a:avLst/>
+          </a:prstGeom>
+          <a:noFill/>
+          <a:ln/>
+        </p:spPr>
+        <p:txBody>
+          <a:bodyPr wrap="square" rtlCol="0" anchor="ctr"/>
+          <a:lstStyle/>
+          <a:p>
+            <a:pPr indent="0" marL="0">
+              <a:lnSpc>
+                <a:spcPct val="125000"/>
+              </a:lnSpc>
+              <a:buNone/>
+            </a:pPr>
+            <a:r>
+              <a:rPr lang="en-US" sz="1150" dirty="0">
+                <a:solidFill>
+                  <a:srgbClr val="1B2733"/>
+                </a:solidFill>
+                <a:latin typeface="Calibri" pitchFamily="34" charset="0"/>
+                <a:ea typeface="Calibri" pitchFamily="34" charset="-122"/>
+                <a:cs typeface="Calibri" pitchFamily="34" charset="-120"/>
+              </a:rPr>
+              <a:t>Third-party identity provider (SSO/OAuth) login — first-party email/password only today.</a:t>
+            </a:r>
+            <a:endParaRPr lang="en-US" sz="1150" dirty="0"/>
+          </a:p>
+        </p:txBody>
+      </p:sp>
+      <p:sp>
+        <p:nvSpPr>
+          <p:cNvPr id="13" name="Shape 11"/>
+          <p:cNvSpPr/>
+          <p:nvPr/>
+        </p:nvSpPr>
+        <p:spPr>
+          <a:xfrm>
+            <a:off x="6263640" y="2926080"/>
+            <a:ext cx="329184" cy="329184"/>
+          </a:xfrm>
+          <a:prstGeom prst="ellipse">
+            <a:avLst/>
+          </a:prstGeom>
+          <a:solidFill>
+            <a:srgbClr val="0F2438"/>
+          </a:solidFill>
+          <a:ln/>
+        </p:spPr>
+      </p:sp>
+      <p:sp>
+        <p:nvSpPr>
+          <p:cNvPr id="14" name="Text 12"/>
+          <p:cNvSpPr/>
+          <p:nvPr/>
+        </p:nvSpPr>
+        <p:spPr>
+          <a:xfrm>
+            <a:off x="6263640" y="2926080"/>
+            <a:ext cx="329184" cy="329184"/>
+          </a:xfrm>
+          <a:prstGeom prst="rect">
+            <a:avLst/>
+          </a:prstGeom>
+          <a:noFill/>
+          <a:ln/>
+        </p:spPr>
+        <p:txBody>
+          <a:bodyPr wrap="none" rtlCol="0" anchor="ctr"/>
+          <a:lstStyle/>
+          <a:p>
+            <a:pPr algn="ctr" indent="0" marL="0">
+              <a:buNone/>
+            </a:pPr>
+            <a:r>
+              <a:rPr lang="en-US" sz="1500" b="1" dirty="0">
+                <a:solidFill>
+                  <a:srgbClr val="22C7B5"/>
+                </a:solidFill>
+                <a:latin typeface="Calibri" pitchFamily="34" charset="0"/>
+                <a:ea typeface="Calibri" pitchFamily="34" charset="-122"/>
+                <a:cs typeface="Calibri" pitchFamily="34" charset="-120"/>
+              </a:rPr>
+              <a:t>→</a:t>
+            </a:r>
+            <a:endParaRPr lang="en-US" sz="1500" dirty="0"/>
+          </a:p>
+        </p:txBody>
+      </p:sp>
+      <p:sp>
+        <p:nvSpPr>
+          <p:cNvPr id="15" name="Text 13"/>
+          <p:cNvSpPr/>
+          <p:nvPr/>
+        </p:nvSpPr>
+        <p:spPr>
+          <a:xfrm>
+            <a:off x="6766560" y="2834640"/>
+            <a:ext cx="4754880" cy="1097280"/>
+          </a:xfrm>
+          <a:prstGeom prst="rect">
+            <a:avLst/>
+          </a:prstGeom>
+          <a:noFill/>
+          <a:ln/>
+        </p:spPr>
+        <p:txBody>
+          <a:bodyPr wrap="square" rtlCol="0" anchor="ctr"/>
+          <a:lstStyle/>
+          <a:p>
+            <a:pPr indent="0" marL="0">
+              <a:lnSpc>
+                <a:spcPct val="125000"/>
+              </a:lnSpc>
+              <a:buNone/>
+            </a:pPr>
+            <a:r>
+              <a:rPr lang="en-US" sz="1150" dirty="0">
+                <a:solidFill>
+                  <a:srgbClr val="1B2733"/>
+                </a:solidFill>
+                <a:latin typeface="Calibri" pitchFamily="34" charset="0"/>
+                <a:ea typeface="Calibri" pitchFamily="34" charset="-122"/>
+                <a:cs typeface="Calibri" pitchFamily="34" charset="-120"/>
+              </a:rPr>
+              <a:t>Multi-language / localisation support.</a:t>
+            </a:r>
+            <a:endParaRPr lang="en-US" sz="1150" dirty="0"/>
+          </a:p>
+        </p:txBody>
+      </p:sp>
+      <p:sp>
+        <p:nvSpPr>
+          <p:cNvPr id="16" name="Shape 14"/>
+          <p:cNvSpPr/>
+          <p:nvPr/>
+        </p:nvSpPr>
+        <p:spPr>
+          <a:xfrm>
+            <a:off x="640080" y="4160520"/>
+            <a:ext cx="329184" cy="329184"/>
+          </a:xfrm>
+          <a:prstGeom prst="ellipse">
+            <a:avLst/>
+          </a:prstGeom>
+          <a:solidFill>
+            <a:srgbClr val="0F2438"/>
+          </a:solidFill>
+          <a:ln/>
+        </p:spPr>
+      </p:sp>
+      <p:sp>
+        <p:nvSpPr>
+          <p:cNvPr id="17" name="Text 15"/>
+          <p:cNvSpPr/>
+          <p:nvPr/>
+        </p:nvSpPr>
+        <p:spPr>
+          <a:xfrm>
+            <a:off x="640080" y="4160520"/>
+            <a:ext cx="329184" cy="329184"/>
+          </a:xfrm>
+          <a:prstGeom prst="rect">
+            <a:avLst/>
+          </a:prstGeom>
+          <a:noFill/>
+          <a:ln/>
+        </p:spPr>
+        <p:txBody>
+          <a:bodyPr wrap="none" rtlCol="0" anchor="ctr"/>
+          <a:lstStyle/>
+          <a:p>
+            <a:pPr algn="ctr" indent="0" marL="0">
+              <a:buNone/>
+            </a:pPr>
+            <a:r>
+              <a:rPr lang="en-US" sz="1500" b="1" dirty="0">
+                <a:solidFill>
+                  <a:srgbClr val="22C7B5"/>
+                </a:solidFill>
+                <a:latin typeface="Calibri" pitchFamily="34" charset="0"/>
+                <a:ea typeface="Calibri" pitchFamily="34" charset="-122"/>
+                <a:cs typeface="Calibri" pitchFamily="34" charset="-120"/>
+              </a:rPr>
+              <a:t>→</a:t>
+            </a:r>
+            <a:endParaRPr lang="en-US" sz="1500" dirty="0"/>
+          </a:p>
+        </p:txBody>
+      </p:sp>
+      <p:sp>
+        <p:nvSpPr>
+          <p:cNvPr id="18" name="Text 16"/>
+          <p:cNvSpPr/>
+          <p:nvPr/>
+        </p:nvSpPr>
+        <p:spPr>
+          <a:xfrm>
+            <a:off x="1143000" y="4069080"/>
+            <a:ext cx="4754880" cy="1097280"/>
+          </a:xfrm>
+          <a:prstGeom prst="rect">
+            <a:avLst/>
+          </a:prstGeom>
+          <a:noFill/>
+          <a:ln/>
+        </p:spPr>
+        <p:txBody>
+          <a:bodyPr wrap="square" rtlCol="0" anchor="ctr"/>
+          <a:lstStyle/>
+          <a:p>
+            <a:pPr indent="0" marL="0">
+              <a:lnSpc>
+                <a:spcPct val="125000"/>
+              </a:lnSpc>
+              <a:buNone/>
+            </a:pPr>
+            <a:r>
+              <a:rPr lang="en-US" sz="1150" dirty="0">
+                <a:solidFill>
+                  <a:srgbClr val="1B2733"/>
+                </a:solidFill>
+                <a:latin typeface="Calibri" pitchFamily="34" charset="0"/>
+                <a:ea typeface="Calibri" pitchFamily="34" charset="-122"/>
+                <a:cs typeface="Calibri" pitchFamily="34" charset="-120"/>
+              </a:rPr>
+              <a:t>Native mobile applications — the API is already client-agnostic and could support one.</a:t>
+            </a:r>
+            <a:endParaRPr lang="en-US" sz="1150" dirty="0"/>
+          </a:p>
+        </p:txBody>
+      </p:sp>
+      <p:sp>
+        <p:nvSpPr>
+          <p:cNvPr id="19" name="Shape 17"/>
+          <p:cNvSpPr/>
+          <p:nvPr/>
+        </p:nvSpPr>
+        <p:spPr>
+          <a:xfrm>
+            <a:off x="6263640" y="4160520"/>
+            <a:ext cx="329184" cy="329184"/>
+          </a:xfrm>
+          <a:prstGeom prst="ellipse">
+            <a:avLst/>
+          </a:prstGeom>
+          <a:solidFill>
+            <a:srgbClr val="0F2438"/>
+          </a:solidFill>
+          <a:ln/>
+        </p:spPr>
+      </p:sp>
+      <p:sp>
+        <p:nvSpPr>
+          <p:cNvPr id="20" name="Text 18"/>
+          <p:cNvSpPr/>
+          <p:nvPr/>
+        </p:nvSpPr>
+        <p:spPr>
+          <a:xfrm>
+            <a:off x="6263640" y="4160520"/>
+            <a:ext cx="329184" cy="329184"/>
+          </a:xfrm>
+          <a:prstGeom prst="rect">
+            <a:avLst/>
+          </a:prstGeom>
+          <a:noFill/>
+          <a:ln/>
+        </p:spPr>
+        <p:txBody>
+          <a:bodyPr wrap="none" rtlCol="0" anchor="ctr"/>
+          <a:lstStyle/>
+          <a:p>
+            <a:pPr algn="ctr" indent="0" marL="0">
+              <a:buNone/>
+            </a:pPr>
+            <a:r>
+              <a:rPr lang="en-US" sz="1500" b="1" dirty="0">
+                <a:solidFill>
+                  <a:srgbClr val="22C7B5"/>
+                </a:solidFill>
+                <a:latin typeface="Calibri" pitchFamily="34" charset="0"/>
+                <a:ea typeface="Calibri" pitchFamily="34" charset="-122"/>
+                <a:cs typeface="Calibri" pitchFamily="34" charset="-120"/>
+              </a:rPr>
+              <a:t>→</a:t>
+            </a:r>
+            <a:endParaRPr lang="en-US" sz="1500" dirty="0"/>
+          </a:p>
+        </p:txBody>
+      </p:sp>
+      <p:sp>
+        <p:nvSpPr>
+          <p:cNvPr id="21" name="Text 19"/>
+          <p:cNvSpPr/>
+          <p:nvPr/>
+        </p:nvSpPr>
+        <p:spPr>
+          <a:xfrm>
+            <a:off x="6766560" y="4069080"/>
+            <a:ext cx="4754880" cy="1097280"/>
+          </a:xfrm>
+          <a:prstGeom prst="rect">
+            <a:avLst/>
+          </a:prstGeom>
+          <a:noFill/>
+          <a:ln/>
+        </p:spPr>
+        <p:txBody>
+          <a:bodyPr wrap="square" rtlCol="0" anchor="ctr"/>
+          <a:lstStyle/>
+          <a:p>
+            <a:pPr indent="0" marL="0">
+              <a:lnSpc>
+                <a:spcPct val="125000"/>
+              </a:lnSpc>
+              <a:buNone/>
+            </a:pPr>
+            <a:r>
+              <a:rPr lang="en-US" sz="1150" dirty="0">
+                <a:solidFill>
+                  <a:srgbClr val="1B2733"/>
+                </a:solidFill>
+                <a:latin typeface="Calibri" pitchFamily="34" charset="0"/>
+                <a:ea typeface="Calibri" pitchFamily="34" charset="-122"/>
+                <a:cs typeface="Calibri" pitchFamily="34" charset="-120"/>
+              </a:rPr>
+              <a:t>Automated appointment scheduling/optimisation across hospitals.</a:t>
+            </a:r>
+            <a:endParaRPr lang="en-US" sz="1150" dirty="0"/>
+          </a:p>
+        </p:txBody>
+      </p:sp>
+      <p:sp>
+        <p:nvSpPr>
+          <p:cNvPr id="22" name="Text 20"/>
+          <p:cNvSpPr/>
+          <p:nvPr/>
+        </p:nvSpPr>
+        <p:spPr>
+          <a:xfrm>
+            <a:off x="457200" y="6537960"/>
+            <a:ext cx="7315200" cy="274320"/>
+          </a:xfrm>
+          <a:prstGeom prst="rect">
+            <a:avLst/>
+          </a:prstGeom>
+          <a:noFill/>
+          <a:ln/>
+        </p:spPr>
+        <p:txBody>
+          <a:bodyPr wrap="square" rtlCol="0" anchor="ctr"/>
+          <a:lstStyle/>
+          <a:p>
+            <a:pPr algn="l" indent="0" marL="0">
+              <a:buNone/>
+            </a:pPr>
+            <a:r>
+              <a:rPr lang="en-US" sz="900" dirty="0">
+                <a:solidFill>
+                  <a:srgbClr val="5B6B7A"/>
+                </a:solidFill>
+                <a:latin typeface="Calibri" pitchFamily="34" charset="0"/>
+                <a:ea typeface="Calibri" pitchFamily="34" charset="-122"/>
+                <a:cs typeface="Calibri" pitchFamily="34" charset="-120"/>
+              </a:rPr>
+              <a:t>VaxTrack v2.0.0 — Platform Overview</a:t>
+            </a:r>
+            <a:endParaRPr lang="en-US" sz="900" dirty="0"/>
+          </a:p>
+        </p:txBody>
+      </p:sp>
+    </p:spTree>
+  </p:cSld>
+  <p:clrMapOvr>
+    <a:masterClrMapping/>
+  </p:clrMapOvr>
+</p:sld>
+</file>
+
+<file path=ppt/slides/slide16.xml><?xml version="1.0" encoding="utf-8"?>
+<p:sld xmlns:a="http://schemas.openxmlformats.org/drawingml/2006/main" xmlns:r="http://schemas.openxmlformats.org/officeDocument/2006/relationships" xmlns:p="http://schemas.openxmlformats.org/presentationml/2006/main">
+  <p:cSld name="Slide 16">
     <p:bg>
       <p:bgPr>
         <a:solidFill>
@@ -5460,8 +7101,8 @@
         </p:nvSpPr>
         <p:spPr>
           <a:xfrm>
-            <a:off x="822960" y="2743200"/>
-            <a:ext cx="10058400" cy="914400"/>
+            <a:off x="640080" y="457200"/>
+            <a:ext cx="9144000" cy="548640"/>
           </a:xfrm>
           <a:prstGeom prst="rect">
             <a:avLst/>
@@ -5477,7 +7118,7 @@
               <a:buNone/>
             </a:pPr>
             <a:r>
-              <a:rPr lang="en-US" sz="4400" b="1" dirty="0">
+              <a:rPr lang="en-US" sz="3000" b="1" dirty="0">
                 <a:solidFill>
                   <a:srgbClr val="FFFFFF"/>
                 </a:solidFill>
@@ -5485,6 +7126,428 @@
                 <a:ea typeface="Cambria" pitchFamily="34" charset="-122"/>
                 <a:cs typeface="Cambria" pitchFamily="34" charset="-120"/>
               </a:rPr>
+              <a:t>CONCLUSION</a:t>
+            </a:r>
+            <a:endParaRPr lang="en-US" sz="3000" dirty="0"/>
+          </a:p>
+        </p:txBody>
+      </p:sp>
+      <p:sp>
+        <p:nvSpPr>
+          <p:cNvPr id="3" name="Text 1"/>
+          <p:cNvSpPr/>
+          <p:nvPr/>
+        </p:nvSpPr>
+        <p:spPr>
+          <a:xfrm>
+            <a:off x="640080" y="1371600"/>
+            <a:ext cx="10698480" cy="1188720"/>
+          </a:xfrm>
+          <a:prstGeom prst="rect">
+            <a:avLst/>
+          </a:prstGeom>
+          <a:noFill/>
+          <a:ln/>
+        </p:spPr>
+        <p:txBody>
+          <a:bodyPr wrap="square" rtlCol="0" anchor="ctr"/>
+          <a:lstStyle/>
+          <a:p>
+            <a:pPr indent="0" marL="0">
+              <a:lnSpc>
+                <a:spcPct val="135000"/>
+              </a:lnSpc>
+              <a:buNone/>
+            </a:pPr>
+            <a:r>
+              <a:rPr lang="en-US" sz="1500" dirty="0">
+                <a:solidFill>
+                  <a:srgbClr val="FFFFFF"/>
+                </a:solidFill>
+                <a:latin typeface="Calibri" pitchFamily="34" charset="0"/>
+                <a:ea typeface="Calibri" pitchFamily="34" charset="-122"/>
+                <a:cs typeface="Calibri" pitchFamily="34" charset="-120"/>
+              </a:rPr>
+              <a:t>VaxTrack v2.0.0 turns a single-developer demo into a platform an operator could actually run: multiple hospitals, three scoped roles, self-service where it's safe, oversight where it matters, and an audit trail on everything in between.</a:t>
+            </a:r>
+            <a:endParaRPr lang="en-US" sz="1500" dirty="0"/>
+          </a:p>
+        </p:txBody>
+      </p:sp>
+      <p:sp>
+        <p:nvSpPr>
+          <p:cNvPr id="4" name="Shape 2"/>
+          <p:cNvSpPr/>
+          <p:nvPr/>
+        </p:nvSpPr>
+        <p:spPr>
+          <a:xfrm>
+            <a:off x="640080" y="2880360"/>
+            <a:ext cx="3456432" cy="2651760"/>
+          </a:xfrm>
+          <a:prstGeom prst="roundRect">
+            <a:avLst>
+              <a:gd name="adj" fmla="val 3448"/>
+            </a:avLst>
+          </a:prstGeom>
+          <a:solidFill>
+            <a:srgbClr val="163A57"/>
+          </a:solidFill>
+          <a:ln/>
+        </p:spPr>
+      </p:sp>
+      <p:sp>
+        <p:nvSpPr>
+          <p:cNvPr id="5" name="Text 3"/>
+          <p:cNvSpPr/>
+          <p:nvPr/>
+        </p:nvSpPr>
+        <p:spPr>
+          <a:xfrm>
+            <a:off x="868680" y="3108960"/>
+            <a:ext cx="2999232" cy="457200"/>
+          </a:xfrm>
+          <a:prstGeom prst="rect">
+            <a:avLst/>
+          </a:prstGeom>
+          <a:noFill/>
+          <a:ln/>
+        </p:spPr>
+        <p:txBody>
+          <a:bodyPr wrap="square" rtlCol="0" anchor="ctr"/>
+          <a:lstStyle/>
+          <a:p>
+            <a:pPr indent="0" marL="0">
+              <a:buNone/>
+            </a:pPr>
+            <a:r>
+              <a:rPr lang="en-US" sz="1400" b="1" dirty="0">
+                <a:solidFill>
+                  <a:srgbClr val="22C7B5"/>
+                </a:solidFill>
+                <a:latin typeface="Calibri" pitchFamily="34" charset="0"/>
+                <a:ea typeface="Calibri" pitchFamily="34" charset="-122"/>
+                <a:cs typeface="Calibri" pitchFamily="34" charset="-120"/>
+              </a:rPr>
+              <a:t>For Business</a:t>
+            </a:r>
+            <a:endParaRPr lang="en-US" sz="1400" dirty="0"/>
+          </a:p>
+        </p:txBody>
+      </p:sp>
+      <p:sp>
+        <p:nvSpPr>
+          <p:cNvPr id="6" name="Text 4"/>
+          <p:cNvSpPr/>
+          <p:nvPr/>
+        </p:nvSpPr>
+        <p:spPr>
+          <a:xfrm>
+            <a:off x="868680" y="3657600"/>
+            <a:ext cx="2999232" cy="1737360"/>
+          </a:xfrm>
+          <a:prstGeom prst="rect">
+            <a:avLst/>
+          </a:prstGeom>
+          <a:noFill/>
+          <a:ln/>
+        </p:spPr>
+        <p:txBody>
+          <a:bodyPr wrap="square" rtlCol="0" anchor="ctr"/>
+          <a:lstStyle/>
+          <a:p>
+            <a:pPr indent="0" marL="0">
+              <a:lnSpc>
+                <a:spcPct val="130000"/>
+              </a:lnSpc>
+              <a:buNone/>
+            </a:pPr>
+            <a:r>
+              <a:rPr lang="en-US" sz="1150" dirty="0">
+                <a:solidFill>
+                  <a:srgbClr val="9FB3C8"/>
+                </a:solidFill>
+                <a:latin typeface="Calibri" pitchFamily="34" charset="0"/>
+                <a:ea typeface="Calibri" pitchFamily="34" charset="-122"/>
+                <a:cs typeface="Calibri" pitchFamily="34" charset="-120"/>
+              </a:rPr>
+              <a:t>One accountable system of record, from registration to certificate — with self-service that reduces platform-admin load.</a:t>
+            </a:r>
+            <a:endParaRPr lang="en-US" sz="1150" dirty="0"/>
+          </a:p>
+        </p:txBody>
+      </p:sp>
+      <p:sp>
+        <p:nvSpPr>
+          <p:cNvPr id="7" name="Shape 5"/>
+          <p:cNvSpPr/>
+          <p:nvPr/>
+        </p:nvSpPr>
+        <p:spPr>
+          <a:xfrm>
+            <a:off x="4315968" y="2880360"/>
+            <a:ext cx="3456432" cy="2651760"/>
+          </a:xfrm>
+          <a:prstGeom prst="roundRect">
+            <a:avLst>
+              <a:gd name="adj" fmla="val 3448"/>
+            </a:avLst>
+          </a:prstGeom>
+          <a:solidFill>
+            <a:srgbClr val="163A57"/>
+          </a:solidFill>
+          <a:ln/>
+        </p:spPr>
+      </p:sp>
+      <p:sp>
+        <p:nvSpPr>
+          <p:cNvPr id="8" name="Text 6"/>
+          <p:cNvSpPr/>
+          <p:nvPr/>
+        </p:nvSpPr>
+        <p:spPr>
+          <a:xfrm>
+            <a:off x="4544568" y="3108960"/>
+            <a:ext cx="2999232" cy="457200"/>
+          </a:xfrm>
+          <a:prstGeom prst="rect">
+            <a:avLst/>
+          </a:prstGeom>
+          <a:noFill/>
+          <a:ln/>
+        </p:spPr>
+        <p:txBody>
+          <a:bodyPr wrap="square" rtlCol="0" anchor="ctr"/>
+          <a:lstStyle/>
+          <a:p>
+            <a:pPr indent="0" marL="0">
+              <a:buNone/>
+            </a:pPr>
+            <a:r>
+              <a:rPr lang="en-US" sz="1400" b="1" dirty="0">
+                <a:solidFill>
+                  <a:srgbClr val="22C7B5"/>
+                </a:solidFill>
+                <a:latin typeface="Calibri" pitchFamily="34" charset="0"/>
+                <a:ea typeface="Calibri" pitchFamily="34" charset="-122"/>
+                <a:cs typeface="Calibri" pitchFamily="34" charset="-120"/>
+              </a:rPr>
+              <a:t>For Engineering</a:t>
+            </a:r>
+            <a:endParaRPr lang="en-US" sz="1400" dirty="0"/>
+          </a:p>
+        </p:txBody>
+      </p:sp>
+      <p:sp>
+        <p:nvSpPr>
+          <p:cNvPr id="9" name="Text 7"/>
+          <p:cNvSpPr/>
+          <p:nvPr/>
+        </p:nvSpPr>
+        <p:spPr>
+          <a:xfrm>
+            <a:off x="4544568" y="3657600"/>
+            <a:ext cx="2999232" cy="1737360"/>
+          </a:xfrm>
+          <a:prstGeom prst="rect">
+            <a:avLst/>
+          </a:prstGeom>
+          <a:noFill/>
+          <a:ln/>
+        </p:spPr>
+        <p:txBody>
+          <a:bodyPr wrap="square" rtlCol="0" anchor="ctr"/>
+          <a:lstStyle/>
+          <a:p>
+            <a:pPr indent="0" marL="0">
+              <a:lnSpc>
+                <a:spcPct val="130000"/>
+              </a:lnSpc>
+              <a:buNone/>
+            </a:pPr>
+            <a:r>
+              <a:rPr lang="en-US" sz="1150" dirty="0">
+                <a:solidFill>
+                  <a:srgbClr val="9FB3C8"/>
+                </a:solidFill>
+                <a:latin typeface="Calibri" pitchFamily="34" charset="0"/>
+                <a:ea typeface="Calibri" pitchFamily="34" charset="-122"/>
+                <a:cs typeface="Calibri" pitchFamily="34" charset="-120"/>
+              </a:rPr>
+              <a:t>A clean, API-first, three-layer architecture with every rule enforced server-side — ready for a real database, a real client, and real scale.</a:t>
+            </a:r>
+            <a:endParaRPr lang="en-US" sz="1150" dirty="0"/>
+          </a:p>
+        </p:txBody>
+      </p:sp>
+      <p:sp>
+        <p:nvSpPr>
+          <p:cNvPr id="10" name="Shape 8"/>
+          <p:cNvSpPr/>
+          <p:nvPr/>
+        </p:nvSpPr>
+        <p:spPr>
+          <a:xfrm>
+            <a:off x="7991856" y="2880360"/>
+            <a:ext cx="3456432" cy="2651760"/>
+          </a:xfrm>
+          <a:prstGeom prst="roundRect">
+            <a:avLst>
+              <a:gd name="adj" fmla="val 3448"/>
+            </a:avLst>
+          </a:prstGeom>
+          <a:solidFill>
+            <a:srgbClr val="163A57"/>
+          </a:solidFill>
+          <a:ln/>
+        </p:spPr>
+      </p:sp>
+      <p:sp>
+        <p:nvSpPr>
+          <p:cNvPr id="11" name="Text 9"/>
+          <p:cNvSpPr/>
+          <p:nvPr/>
+        </p:nvSpPr>
+        <p:spPr>
+          <a:xfrm>
+            <a:off x="8220456" y="3108960"/>
+            <a:ext cx="2999232" cy="457200"/>
+          </a:xfrm>
+          <a:prstGeom prst="rect">
+            <a:avLst/>
+          </a:prstGeom>
+          <a:noFill/>
+          <a:ln/>
+        </p:spPr>
+        <p:txBody>
+          <a:bodyPr wrap="square" rtlCol="0" anchor="ctr"/>
+          <a:lstStyle/>
+          <a:p>
+            <a:pPr indent="0" marL="0">
+              <a:buNone/>
+            </a:pPr>
+            <a:r>
+              <a:rPr lang="en-US" sz="1400" b="1" dirty="0">
+                <a:solidFill>
+                  <a:srgbClr val="22C7B5"/>
+                </a:solidFill>
+                <a:latin typeface="Calibri" pitchFamily="34" charset="0"/>
+                <a:ea typeface="Calibri" pitchFamily="34" charset="-122"/>
+                <a:cs typeface="Calibri" pitchFamily="34" charset="-120"/>
+              </a:rPr>
+              <a:t>For Governance</a:t>
+            </a:r>
+            <a:endParaRPr lang="en-US" sz="1400" dirty="0"/>
+          </a:p>
+        </p:txBody>
+      </p:sp>
+      <p:sp>
+        <p:nvSpPr>
+          <p:cNvPr id="12" name="Text 10"/>
+          <p:cNvSpPr/>
+          <p:nvPr/>
+        </p:nvSpPr>
+        <p:spPr>
+          <a:xfrm>
+            <a:off x="8220456" y="3657600"/>
+            <a:ext cx="2999232" cy="1737360"/>
+          </a:xfrm>
+          <a:prstGeom prst="rect">
+            <a:avLst/>
+          </a:prstGeom>
+          <a:noFill/>
+          <a:ln/>
+        </p:spPr>
+        <p:txBody>
+          <a:bodyPr wrap="square" rtlCol="0" anchor="ctr"/>
+          <a:lstStyle/>
+          <a:p>
+            <a:pPr indent="0" marL="0">
+              <a:lnSpc>
+                <a:spcPct val="130000"/>
+              </a:lnSpc>
+              <a:buNone/>
+            </a:pPr>
+            <a:r>
+              <a:rPr lang="en-US" sz="1150" dirty="0">
+                <a:solidFill>
+                  <a:srgbClr val="9FB3C8"/>
+                </a:solidFill>
+                <a:latin typeface="Calibri" pitchFamily="34" charset="0"/>
+                <a:ea typeface="Calibri" pitchFamily="34" charset="-122"/>
+                <a:cs typeface="Calibri" pitchFamily="34" charset="-120"/>
+              </a:rPr>
+              <a:t>Full audit trails and a documented spec set (FSD, TSD, Test Cases, Review Q&amp;A) ready for onboarding and sign-off.</a:t>
+            </a:r>
+            <a:endParaRPr lang="en-US" sz="1150" dirty="0"/>
+          </a:p>
+        </p:txBody>
+      </p:sp>
+    </p:spTree>
+  </p:cSld>
+  <p:clrMapOvr>
+    <a:masterClrMapping/>
+  </p:clrMapOvr>
+</p:sld>
+</file>
+
+<file path=ppt/slides/slide17.xml><?xml version="1.0" encoding="utf-8"?>
+<p:sld xmlns:a="http://schemas.openxmlformats.org/drawingml/2006/main" xmlns:r="http://schemas.openxmlformats.org/officeDocument/2006/relationships" xmlns:p="http://schemas.openxmlformats.org/presentationml/2006/main">
+  <p:cSld name="Slide 17">
+    <p:bg>
+      <p:bgPr>
+        <a:solidFill>
+          <a:srgbClr val="0F2438"/>
+        </a:solidFill>
+      </p:bgPr>
+    </p:bg>
+    <p:spTree>
+      <p:nvGrpSpPr>
+        <p:cNvPr id="1" name=""/>
+        <p:cNvGrpSpPr/>
+        <p:nvPr/>
+      </p:nvGrpSpPr>
+      <p:grpSpPr>
+        <a:xfrm>
+          <a:off x="0" y="0"/>
+          <a:ext cx="0" cy="0"/>
+          <a:chOff x="0" y="0"/>
+          <a:chExt cx="0" cy="0"/>
+        </a:xfrm>
+      </p:grpSpPr>
+      <p:sp>
+        <p:nvSpPr>
+          <p:cNvPr id="2" name="Text 0"/>
+          <p:cNvSpPr/>
+          <p:nvPr/>
+        </p:nvSpPr>
+        <p:spPr>
+          <a:xfrm>
+            <a:off x="822960" y="2743200"/>
+            <a:ext cx="10058400" cy="914400"/>
+          </a:xfrm>
+          <a:prstGeom prst="rect">
+            <a:avLst/>
+          </a:prstGeom>
+          <a:noFill/>
+          <a:ln/>
+        </p:spPr>
+        <p:txBody>
+          <a:bodyPr wrap="square" rtlCol="0" anchor="ctr"/>
+          <a:lstStyle/>
+          <a:p>
+            <a:pPr indent="0" marL="0">
+              <a:buNone/>
+            </a:pPr>
+            <a:r>
+              <a:rPr lang="en-US" sz="4400" b="1" dirty="0">
+                <a:solidFill>
+                  <a:srgbClr val="FFFFFF"/>
+                </a:solidFill>
+                <a:latin typeface="Cambria" pitchFamily="34" charset="0"/>
+                <a:ea typeface="Cambria" pitchFamily="34" charset="-122"/>
+                <a:cs typeface="Cambria" pitchFamily="34" charset="-120"/>
+              </a:rPr>
               <a:t>THANK YOU</a:t>
             </a:r>
             <a:endParaRPr lang="en-US" sz="4400" dirty="0"/>
@@ -5563,7 +7626,7 @@
                 <a:ea typeface="Calibri" pitchFamily="34" charset="-122"/>
                 <a:cs typeface="Calibri" pitchFamily="34" charset="-120"/>
               </a:rPr>
-              <a:t>Vivek Kumar  |  Associate Consultant, Infosys  —  Developer, British Petroleum</a:t>
+              <a:t>Vivek Kumar  |  Senior Associate Consultant, Infosys  —  Developer, British Petroleum</a:t>
             </a:r>
             <a:endParaRPr lang="en-US" sz="1200" dirty="0"/>
           </a:p>
@@ -12371,8 +14434,8 @@
         </p:nvSpPr>
         <p:spPr>
           <a:xfrm>
-            <a:off x="640080" y="411480"/>
-            <a:ext cx="10058400" cy="548640"/>
+            <a:off x="640080" y="384048"/>
+            <a:ext cx="10881360" cy="502920"/>
           </a:xfrm>
           <a:prstGeom prst="rect">
             <a:avLst/>
@@ -12388,7 +14451,7 @@
               <a:buNone/>
             </a:pPr>
             <a:r>
-              <a:rPr lang="en-US" sz="2600" b="1" dirty="0">
+              <a:rPr lang="en-US" sz="2200" b="1" dirty="0">
                 <a:solidFill>
                   <a:srgbClr val="0F2438"/>
                 </a:solidFill>
@@ -12396,9 +14459,9 @@
                 <a:ea typeface="Cambria" pitchFamily="34" charset="-122"/>
                 <a:cs typeface="Cambria" pitchFamily="34" charset="-120"/>
               </a:rPr>
-              <a:t>BUSINESS RULES &amp; GUARDRAILS</a:t>
-            </a:r>
-            <a:endParaRPr lang="en-US" sz="2600" dirty="0"/>
+              <a:t>PLATFORM IN ACTION — BENEFICIARY JOURNEY</a:t>
+            </a:r>
+            <a:endParaRPr lang="en-US" sz="2200" dirty="0"/>
           </a:p>
         </p:txBody>
       </p:sp>
@@ -12410,8 +14473,8 @@
         </p:nvSpPr>
         <p:spPr>
           <a:xfrm>
-            <a:off x="640080" y="960120"/>
-            <a:ext cx="10515600" cy="365760"/>
+            <a:off x="640080" y="868680"/>
+            <a:ext cx="10515600" cy="320040"/>
           </a:xfrm>
           <a:prstGeom prst="rect">
             <a:avLst/>
@@ -12427,7 +14490,7 @@
               <a:buNone/>
             </a:pPr>
             <a:r>
-              <a:rPr lang="en-US" sz="1200" i="1" dirty="0">
+              <a:rPr lang="en-US" sz="1150" i="1" dirty="0">
                 <a:solidFill>
                   <a:srgbClr val="5B6B7A"/>
                 </a:solidFill>
@@ -12435,26 +14498,65 @@
                 <a:ea typeface="Calibri" pitchFamily="34" charset="-122"/>
                 <a:cs typeface="Calibri" pitchFamily="34" charset="-120"/>
               </a:rPr>
-              <a:t>A sample of the rules that keep capacity and identity from being abused.</a:t>
-            </a:r>
-            <a:endParaRPr lang="en-US" sz="1200" dirty="0"/>
-          </a:p>
-        </p:txBody>
-      </p:sp>
-      <p:sp>
-        <p:nvSpPr>
-          <p:cNvPr id="4" name="Shape 2"/>
-          <p:cNvSpPr/>
-          <p:nvPr/>
-        </p:nvSpPr>
-        <p:spPr>
-          <a:xfrm>
-            <a:off x="640080" y="1508760"/>
-            <a:ext cx="5257800" cy="1371600"/>
+              <a:t>Live v2.0.0 screens, from sign-in to a booking in progress.</a:t>
+            </a:r>
+            <a:endParaRPr lang="en-US" sz="1150" dirty="0"/>
+          </a:p>
+        </p:txBody>
+      </p:sp>
+      <p:sp>
+        <p:nvSpPr>
+          <p:cNvPr id="4" name="Text 2"/>
+          <p:cNvSpPr/>
+          <p:nvPr/>
+        </p:nvSpPr>
+        <p:spPr>
+          <a:xfrm>
+            <a:off x="594360" y="1325880"/>
+            <a:ext cx="5349240" cy="256032"/>
+          </a:xfrm>
+          <a:prstGeom prst="rect">
+            <a:avLst/>
+          </a:prstGeom>
+          <a:noFill/>
+          <a:ln/>
+        </p:spPr>
+        <p:txBody>
+          <a:bodyPr wrap="square" rtlCol="0" anchor="ctr"/>
+          <a:lstStyle/>
+          <a:p>
+            <a:pPr indent="0" marL="0">
+              <a:buNone/>
+            </a:pPr>
+            <a:r>
+              <a:rPr lang="en-US" sz="1000" b="1" dirty="0">
+                <a:solidFill>
+                  <a:srgbClr val="5B6B7A"/>
+                </a:solidFill>
+                <a:latin typeface="Calibri" pitchFamily="34" charset="0"/>
+                <a:ea typeface="Calibri" pitchFamily="34" charset="-122"/>
+                <a:cs typeface="Calibri" pitchFamily="34" charset="-120"/>
+              </a:rPr>
+              <a:t>Sign in</a:t>
+            </a:r>
+            <a:endParaRPr lang="en-US" sz="1000" dirty="0"/>
+          </a:p>
+        </p:txBody>
+      </p:sp>
+      <p:sp>
+        <p:nvSpPr>
+          <p:cNvPr id="5" name="Shape 3"/>
+          <p:cNvSpPr/>
+          <p:nvPr/>
+        </p:nvSpPr>
+        <p:spPr>
+          <a:xfrm>
+            <a:off x="539496" y="1563624"/>
+            <a:ext cx="5458968" cy="2240280"/>
           </a:xfrm>
           <a:prstGeom prst="roundRect">
             <a:avLst>
-              <a:gd name="adj" fmla="val 5333"/>
+              <a:gd name="adj" fmla="val 2449"/>
             </a:avLst>
           </a:prstGeom>
           <a:solidFill>
@@ -12466,18 +14568,48 @@
             </a:solidFill>
             <a:prstDash val="solid"/>
           </a:ln>
-        </p:spPr>
-      </p:sp>
-      <p:sp>
-        <p:nvSpPr>
-          <p:cNvPr id="5" name="Text 3"/>
-          <p:cNvSpPr/>
-          <p:nvPr/>
-        </p:nvSpPr>
-        <p:spPr>
-          <a:xfrm>
-            <a:off x="841248" y="1636776"/>
-            <a:ext cx="4855464" cy="594360"/>
+          <a:effectLst>
+            <a:outerShdw sx="100000" sy="100000" kx="0" ky="0" algn="bl" rotWithShape="0" blurRad="76200" dist="25400" dir="5400000">
+              <a:srgbClr val="5B6B7A">
+                <a:alpha val="25000"/>
+              </a:srgbClr>
+            </a:outerShdw>
+          </a:effectLst>
+        </p:spPr>
+      </p:sp>
+      <p:pic>
+        <p:nvPicPr>
+          <p:cNvPr id="6" name="Image 0" descr="/tmp/build/imgs_v2/01-login.png">    </p:cNvPr>
+          <p:cNvPicPr>
+            <a:picLocks noChangeAspect="1"/>
+          </p:cNvPicPr>
+          <p:nvPr/>
+        </p:nvPicPr>
+        <p:blipFill>
+          <a:blip r:embed="rId1"/>
+          <a:srcRect l="0" r="0" t="0" b="0"/>
+          <a:stretch/>
+        </p:blipFill>
+        <p:spPr>
+          <a:xfrm>
+            <a:off x="594360" y="1618488"/>
+            <a:ext cx="5349240" cy="2130552"/>
+          </a:xfrm>
+          <a:prstGeom prst="rect">
+            <a:avLst/>
+          </a:prstGeom>
+        </p:spPr>
+      </p:pic>
+      <p:sp>
+        <p:nvSpPr>
+          <p:cNvPr id="7" name="Text 4"/>
+          <p:cNvSpPr/>
+          <p:nvPr/>
+        </p:nvSpPr>
+        <p:spPr>
+          <a:xfrm>
+            <a:off x="6217920" y="1325880"/>
+            <a:ext cx="5349240" cy="256032"/>
           </a:xfrm>
           <a:prstGeom prst="rect">
             <a:avLst/>
@@ -12490,55 +14622,10 @@
           <a:lstStyle/>
           <a:p>
             <a:pPr indent="0" marL="0">
-              <a:lnSpc>
-                <a:spcPct val="115000"/>
-              </a:lnSpc>
-              <a:buNone/>
-            </a:pPr>
-            <a:r>
-              <a:rPr lang="en-US" sz="1200" b="1" dirty="0">
-                <a:solidFill>
-                  <a:srgbClr val="1B2733"/>
-                </a:solidFill>
-                <a:latin typeface="Calibri" pitchFamily="34" charset="0"/>
-                <a:ea typeface="Calibri" pitchFamily="34" charset="-122"/>
-                <a:cs typeface="Calibri" pitchFamily="34" charset="-120"/>
-              </a:rPr>
-              <a:t>No double-booking, no booking on someone else's behalf</a:t>
-            </a:r>
-            <a:endParaRPr lang="en-US" sz="1200" dirty="0"/>
-          </a:p>
-        </p:txBody>
-      </p:sp>
-      <p:sp>
-        <p:nvSpPr>
-          <p:cNvPr id="6" name="Text 4"/>
-          <p:cNvSpPr/>
-          <p:nvPr/>
-        </p:nvSpPr>
-        <p:spPr>
-          <a:xfrm>
-            <a:off x="841248" y="2221992"/>
-            <a:ext cx="4855464" cy="594360"/>
-          </a:xfrm>
-          <a:prstGeom prst="rect">
-            <a:avLst/>
-          </a:prstGeom>
-          <a:noFill/>
-          <a:ln/>
-        </p:spPr>
-        <p:txBody>
-          <a:bodyPr wrap="square" rtlCol="0" anchor="ctr"/>
-          <a:lstStyle/>
-          <a:p>
-            <a:pPr indent="0" marL="0">
-              <a:lnSpc>
-                <a:spcPct val="120000"/>
-              </a:lnSpc>
-              <a:buNone/>
-            </a:pPr>
-            <a:r>
-              <a:rPr lang="en-US" sz="1050" dirty="0">
+              <a:buNone/>
+            </a:pPr>
+            <a:r>
+              <a:rPr lang="en-US" sz="1000" b="1" dirty="0">
                 <a:solidFill>
                   <a:srgbClr val="5B6B7A"/>
                 </a:solidFill>
@@ -12546,26 +14633,26 @@
                 <a:ea typeface="Calibri" pitchFamily="34" charset="-122"/>
                 <a:cs typeface="Calibri" pitchFamily="34" charset="-120"/>
               </a:rPr>
-              <a:t>Every booking is tied to the authenticated caller's own identity.</a:t>
-            </a:r>
-            <a:endParaRPr lang="en-US" sz="1050" dirty="0"/>
-          </a:p>
-        </p:txBody>
-      </p:sp>
-      <p:sp>
-        <p:nvSpPr>
-          <p:cNvPr id="7" name="Shape 5"/>
-          <p:cNvSpPr/>
-          <p:nvPr/>
-        </p:nvSpPr>
-        <p:spPr>
-          <a:xfrm>
-            <a:off x="6263640" y="1508760"/>
-            <a:ext cx="5257800" cy="1371600"/>
+              <a:t>Book Dose 1 — hospital &amp; slot selection</a:t>
+            </a:r>
+            <a:endParaRPr lang="en-US" sz="1000" dirty="0"/>
+          </a:p>
+        </p:txBody>
+      </p:sp>
+      <p:sp>
+        <p:nvSpPr>
+          <p:cNvPr id="8" name="Shape 5"/>
+          <p:cNvSpPr/>
+          <p:nvPr/>
+        </p:nvSpPr>
+        <p:spPr>
+          <a:xfrm>
+            <a:off x="6163056" y="1563624"/>
+            <a:ext cx="5458968" cy="2240280"/>
           </a:xfrm>
           <a:prstGeom prst="roundRect">
             <a:avLst>
-              <a:gd name="adj" fmla="val 5333"/>
+              <a:gd name="adj" fmla="val 2449"/>
             </a:avLst>
           </a:prstGeom>
           <a:solidFill>
@@ -12577,18 +14664,48 @@
             </a:solidFill>
             <a:prstDash val="solid"/>
           </a:ln>
-        </p:spPr>
-      </p:sp>
-      <p:sp>
-        <p:nvSpPr>
-          <p:cNvPr id="8" name="Text 6"/>
-          <p:cNvSpPr/>
-          <p:nvPr/>
-        </p:nvSpPr>
-        <p:spPr>
-          <a:xfrm>
-            <a:off x="6464808" y="1636776"/>
-            <a:ext cx="4855464" cy="594360"/>
+          <a:effectLst>
+            <a:outerShdw sx="100000" sy="100000" kx="0" ky="0" algn="bl" rotWithShape="0" blurRad="76200" dist="25400" dir="5400000">
+              <a:srgbClr val="5B6B7A">
+                <a:alpha val="25000"/>
+              </a:srgbClr>
+            </a:outerShdw>
+          </a:effectLst>
+        </p:spPr>
+      </p:sp>
+      <p:pic>
+        <p:nvPicPr>
+          <p:cNvPr id="9" name="Image 1" descr="/tmp/build/imgs_v2/02-hospital-selection-with-slot.png">    </p:cNvPr>
+          <p:cNvPicPr>
+            <a:picLocks noChangeAspect="1"/>
+          </p:cNvPicPr>
+          <p:nvPr/>
+        </p:nvPicPr>
+        <p:blipFill>
+          <a:blip r:embed="rId2"/>
+          <a:srcRect l="0" r="0" t="0" b="0"/>
+          <a:stretch/>
+        </p:blipFill>
+        <p:spPr>
+          <a:xfrm>
+            <a:off x="6217920" y="1618488"/>
+            <a:ext cx="5349240" cy="2130552"/>
+          </a:xfrm>
+          <a:prstGeom prst="rect">
+            <a:avLst/>
+          </a:prstGeom>
+        </p:spPr>
+      </p:pic>
+      <p:sp>
+        <p:nvSpPr>
+          <p:cNvPr id="10" name="Text 6"/>
+          <p:cNvSpPr/>
+          <p:nvPr/>
+        </p:nvSpPr>
+        <p:spPr>
+          <a:xfrm>
+            <a:off x="594360" y="3977640"/>
+            <a:ext cx="5349240" cy="256032"/>
           </a:xfrm>
           <a:prstGeom prst="rect">
             <a:avLst/>
@@ -12601,55 +14718,10 @@
           <a:lstStyle/>
           <a:p>
             <a:pPr indent="0" marL="0">
-              <a:lnSpc>
-                <a:spcPct val="115000"/>
-              </a:lnSpc>
-              <a:buNone/>
-            </a:pPr>
-            <a:r>
-              <a:rPr lang="en-US" sz="1200" b="1" dirty="0">
-                <a:solidFill>
-                  <a:srgbClr val="1B2733"/>
-                </a:solidFill>
-                <a:latin typeface="Calibri" pitchFamily="34" charset="0"/>
-                <a:ea typeface="Calibri" pitchFamily="34" charset="-122"/>
-                <a:cs typeface="Calibri" pitchFamily="34" charset="-120"/>
-              </a:rPr>
-              <a:t>No login for a disabled account, under any circumstance</a:t>
-            </a:r>
-            <a:endParaRPr lang="en-US" sz="1200" dirty="0"/>
-          </a:p>
-        </p:txBody>
-      </p:sp>
-      <p:sp>
-        <p:nvSpPr>
-          <p:cNvPr id="9" name="Text 7"/>
-          <p:cNvSpPr/>
-          <p:nvPr/>
-        </p:nvSpPr>
-        <p:spPr>
-          <a:xfrm>
-            <a:off x="6464808" y="2221992"/>
-            <a:ext cx="4855464" cy="594360"/>
-          </a:xfrm>
-          <a:prstGeom prst="rect">
-            <a:avLst/>
-          </a:prstGeom>
-          <a:noFill/>
-          <a:ln/>
-        </p:spPr>
-        <p:txBody>
-          <a:bodyPr wrap="square" rtlCol="0" anchor="ctr"/>
-          <a:lstStyle/>
-          <a:p>
-            <a:pPr indent="0" marL="0">
-              <a:lnSpc>
-                <a:spcPct val="120000"/>
-              </a:lnSpc>
-              <a:buNone/>
-            </a:pPr>
-            <a:r>
-              <a:rPr lang="en-US" sz="1050" dirty="0">
+              <a:buNone/>
+            </a:pPr>
+            <a:r>
+              <a:rPr lang="en-US" sz="1000" b="1" dirty="0">
                 <a:solidFill>
                   <a:srgbClr val="5B6B7A"/>
                 </a:solidFill>
@@ -12657,26 +14729,26 @@
                 <a:ea typeface="Calibri" pitchFamily="34" charset="-122"/>
                 <a:cs typeface="Calibri" pitchFamily="34" charset="-120"/>
               </a:rPr>
-              <a:t>Reactivation requires an explicit platform-admin approval.</a:t>
-            </a:r>
-            <a:endParaRPr lang="en-US" sz="1050" dirty="0"/>
-          </a:p>
-        </p:txBody>
-      </p:sp>
-      <p:sp>
-        <p:nvSpPr>
-          <p:cNvPr id="10" name="Shape 8"/>
-          <p:cNvSpPr/>
-          <p:nvPr/>
-        </p:nvSpPr>
-        <p:spPr>
-          <a:xfrm>
-            <a:off x="640080" y="3017520"/>
-            <a:ext cx="5257800" cy="1371600"/>
+              <a:t>My Bookings — Dose 1 pending approval</a:t>
+            </a:r>
+            <a:endParaRPr lang="en-US" sz="1000" dirty="0"/>
+          </a:p>
+        </p:txBody>
+      </p:sp>
+      <p:sp>
+        <p:nvSpPr>
+          <p:cNvPr id="11" name="Shape 7"/>
+          <p:cNvSpPr/>
+          <p:nvPr/>
+        </p:nvSpPr>
+        <p:spPr>
+          <a:xfrm>
+            <a:off x="539496" y="4215384"/>
+            <a:ext cx="5458968" cy="2240280"/>
           </a:xfrm>
           <a:prstGeom prst="roundRect">
             <a:avLst>
-              <a:gd name="adj" fmla="val 5333"/>
+              <a:gd name="adj" fmla="val 2449"/>
             </a:avLst>
           </a:prstGeom>
           <a:solidFill>
@@ -12688,18 +14760,48 @@
             </a:solidFill>
             <a:prstDash val="solid"/>
           </a:ln>
-        </p:spPr>
-      </p:sp>
-      <p:sp>
-        <p:nvSpPr>
-          <p:cNvPr id="11" name="Text 9"/>
-          <p:cNvSpPr/>
-          <p:nvPr/>
-        </p:nvSpPr>
-        <p:spPr>
-          <a:xfrm>
-            <a:off x="841248" y="3145536"/>
-            <a:ext cx="4855464" cy="594360"/>
+          <a:effectLst>
+            <a:outerShdw sx="100000" sy="100000" kx="0" ky="0" algn="bl" rotWithShape="0" blurRad="76200" dist="25400" dir="5400000">
+              <a:srgbClr val="5B6B7A">
+                <a:alpha val="25000"/>
+              </a:srgbClr>
+            </a:outerShdw>
+          </a:effectLst>
+        </p:spPr>
+      </p:sp>
+      <p:pic>
+        <p:nvPicPr>
+          <p:cNvPr id="12" name="Image 2" descr="/tmp/build/imgs_v2/03-my-bookings-pending.png">    </p:cNvPr>
+          <p:cNvPicPr>
+            <a:picLocks noChangeAspect="1"/>
+          </p:cNvPicPr>
+          <p:nvPr/>
+        </p:nvPicPr>
+        <p:blipFill>
+          <a:blip r:embed="rId3"/>
+          <a:srcRect l="0" r="0" t="0" b="0"/>
+          <a:stretch/>
+        </p:blipFill>
+        <p:spPr>
+          <a:xfrm>
+            <a:off x="594360" y="4270248"/>
+            <a:ext cx="5349240" cy="2130552"/>
+          </a:xfrm>
+          <a:prstGeom prst="rect">
+            <a:avLst/>
+          </a:prstGeom>
+        </p:spPr>
+      </p:pic>
+      <p:sp>
+        <p:nvSpPr>
+          <p:cNvPr id="13" name="Text 8"/>
+          <p:cNvSpPr/>
+          <p:nvPr/>
+        </p:nvSpPr>
+        <p:spPr>
+          <a:xfrm>
+            <a:off x="6217920" y="3977640"/>
+            <a:ext cx="5349240" cy="256032"/>
           </a:xfrm>
           <a:prstGeom prst="rect">
             <a:avLst/>
@@ -12712,55 +14814,10 @@
           <a:lstStyle/>
           <a:p>
             <a:pPr indent="0" marL="0">
-              <a:lnSpc>
-                <a:spcPct val="115000"/>
-              </a:lnSpc>
-              <a:buNone/>
-            </a:pPr>
-            <a:r>
-              <a:rPr lang="en-US" sz="1200" b="1" dirty="0">
-                <a:solidFill>
-                  <a:srgbClr val="1B2733"/>
-                </a:solidFill>
-                <a:latin typeface="Calibri" pitchFamily="34" charset="0"/>
-                <a:ea typeface="Calibri" pitchFamily="34" charset="-122"/>
-                <a:cs typeface="Calibri" pitchFamily="34" charset="-120"/>
-              </a:rPr>
-              <a:t>No hospital removed without a second-party confirmation</a:t>
-            </a:r>
-            <a:endParaRPr lang="en-US" sz="1200" dirty="0"/>
-          </a:p>
-        </p:txBody>
-      </p:sp>
-      <p:sp>
-        <p:nvSpPr>
-          <p:cNvPr id="12" name="Text 10"/>
-          <p:cNvSpPr/>
-          <p:nvPr/>
-        </p:nvSpPr>
-        <p:spPr>
-          <a:xfrm>
-            <a:off x="841248" y="3730752"/>
-            <a:ext cx="4855464" cy="594360"/>
-          </a:xfrm>
-          <a:prstGeom prst="rect">
-            <a:avLst/>
-          </a:prstGeom>
-          <a:noFill/>
-          <a:ln/>
-        </p:spPr>
-        <p:txBody>
-          <a:bodyPr wrap="square" rtlCol="0" anchor="ctr"/>
-          <a:lstStyle/>
-          <a:p>
-            <a:pPr indent="0" marL="0">
-              <a:lnSpc>
-                <a:spcPct val="120000"/>
-              </a:lnSpc>
-              <a:buNone/>
-            </a:pPr>
-            <a:r>
-              <a:rPr lang="en-US" sz="1050" dirty="0">
+              <a:buNone/>
+            </a:pPr>
+            <a:r>
+              <a:rPr lang="en-US" sz="1000" b="1" dirty="0">
                 <a:solidFill>
                   <a:srgbClr val="5B6B7A"/>
                 </a:solidFill>
@@ -12768,26 +14825,26 @@
                 <a:ea typeface="Calibri" pitchFamily="34" charset="-122"/>
                 <a:cs typeface="Calibri" pitchFamily="34" charset="-120"/>
               </a:rPr>
-              <a:t>A two-party unregister/authorize flow protects against unilateral removal.</a:t>
-            </a:r>
-            <a:endParaRPr lang="en-US" sz="1050" dirty="0"/>
-          </a:p>
-        </p:txBody>
-      </p:sp>
-      <p:sp>
-        <p:nvSpPr>
-          <p:cNvPr id="13" name="Shape 11"/>
-          <p:cNvSpPr/>
-          <p:nvPr/>
-        </p:nvSpPr>
-        <p:spPr>
-          <a:xfrm>
-            <a:off x="6263640" y="3017520"/>
-            <a:ext cx="5257800" cy="1371600"/>
+              <a:t>User Profile</a:t>
+            </a:r>
+            <a:endParaRPr lang="en-US" sz="1000" dirty="0"/>
+          </a:p>
+        </p:txBody>
+      </p:sp>
+      <p:sp>
+        <p:nvSpPr>
+          <p:cNvPr id="14" name="Shape 9"/>
+          <p:cNvSpPr/>
+          <p:nvPr/>
+        </p:nvSpPr>
+        <p:spPr>
+          <a:xfrm>
+            <a:off x="6163056" y="4215384"/>
+            <a:ext cx="5458968" cy="2240280"/>
           </a:xfrm>
           <a:prstGeom prst="roundRect">
             <a:avLst>
-              <a:gd name="adj" fmla="val 5333"/>
+              <a:gd name="adj" fmla="val 2449"/>
             </a:avLst>
           </a:prstGeom>
           <a:solidFill>
@@ -12799,317 +14856,41 @@
             </a:solidFill>
             <a:prstDash val="solid"/>
           </a:ln>
-        </p:spPr>
-      </p:sp>
-      <p:sp>
-        <p:nvSpPr>
-          <p:cNvPr id="14" name="Text 12"/>
-          <p:cNvSpPr/>
-          <p:nvPr/>
-        </p:nvSpPr>
-        <p:spPr>
-          <a:xfrm>
-            <a:off x="6464808" y="3145536"/>
-            <a:ext cx="4855464" cy="594360"/>
-          </a:xfrm>
-          <a:prstGeom prst="rect">
-            <a:avLst/>
-          </a:prstGeom>
-          <a:noFill/>
-          <a:ln/>
-        </p:spPr>
-        <p:txBody>
-          <a:bodyPr wrap="square" rtlCol="0" anchor="ctr"/>
-          <a:lstStyle/>
-          <a:p>
-            <a:pPr indent="0" marL="0">
-              <a:lnSpc>
-                <a:spcPct val="115000"/>
-              </a:lnSpc>
-              <a:buNone/>
-            </a:pPr>
-            <a:r>
-              <a:rPr lang="en-US" sz="1200" b="1" dirty="0">
-                <a:solidFill>
-                  <a:srgbClr val="1B2733"/>
-                </a:solidFill>
-                <a:latin typeface="Calibri" pitchFamily="34" charset="0"/>
-                <a:ea typeface="Calibri" pitchFamily="34" charset="-122"/>
-                <a:cs typeface="Calibri" pitchFamily="34" charset="-120"/>
-              </a:rPr>
-              <a:t>A hospital's slots can never go negative or over capacity</a:t>
-            </a:r>
-            <a:endParaRPr lang="en-US" sz="1200" dirty="0"/>
-          </a:p>
-        </p:txBody>
-      </p:sp>
-      <p:sp>
-        <p:nvSpPr>
-          <p:cNvPr id="15" name="Text 13"/>
-          <p:cNvSpPr/>
-          <p:nvPr/>
-        </p:nvSpPr>
-        <p:spPr>
-          <a:xfrm>
-            <a:off x="6464808" y="3730752"/>
-            <a:ext cx="4855464" cy="594360"/>
-          </a:xfrm>
-          <a:prstGeom prst="rect">
-            <a:avLst/>
-          </a:prstGeom>
-          <a:noFill/>
-          <a:ln/>
-        </p:spPr>
-        <p:txBody>
-          <a:bodyPr wrap="square" rtlCol="0" anchor="ctr"/>
-          <a:lstStyle/>
-          <a:p>
-            <a:pPr indent="0" marL="0">
-              <a:lnSpc>
-                <a:spcPct val="120000"/>
-              </a:lnSpc>
-              <a:buNone/>
-            </a:pPr>
-            <a:r>
-              <a:rPr lang="en-US" sz="1050" dirty="0">
-                <a:solidFill>
-                  <a:srgbClr val="5B6B7A"/>
-                </a:solidFill>
-                <a:latin typeface="Calibri" pitchFamily="34" charset="0"/>
-                <a:ea typeface="Calibri" pitchFamily="34" charset="-122"/>
-                <a:cs typeface="Calibri" pitchFamily="34" charset="-120"/>
-              </a:rPr>
-              <a:t>Enforced under any sequence of concurrent booking operations.</a:t>
-            </a:r>
-            <a:endParaRPr lang="en-US" sz="1050" dirty="0"/>
-          </a:p>
-        </p:txBody>
-      </p:sp>
-      <p:sp>
-        <p:nvSpPr>
-          <p:cNvPr id="16" name="Shape 14"/>
-          <p:cNvSpPr/>
-          <p:nvPr/>
-        </p:nvSpPr>
-        <p:spPr>
-          <a:xfrm>
-            <a:off x="640080" y="4526280"/>
-            <a:ext cx="5257800" cy="1371600"/>
-          </a:xfrm>
-          <a:prstGeom prst="roundRect">
-            <a:avLst>
-              <a:gd name="adj" fmla="val 5333"/>
-            </a:avLst>
-          </a:prstGeom>
-          <a:solidFill>
-            <a:srgbClr val="FFFFFF"/>
-          </a:solidFill>
-          <a:ln w="12700">
-            <a:solidFill>
-              <a:srgbClr val="EEF3F6"/>
-            </a:solidFill>
-            <a:prstDash val="solid"/>
-          </a:ln>
-        </p:spPr>
-      </p:sp>
-      <p:sp>
-        <p:nvSpPr>
-          <p:cNvPr id="17" name="Text 15"/>
-          <p:cNvSpPr/>
-          <p:nvPr/>
-        </p:nvSpPr>
-        <p:spPr>
-          <a:xfrm>
-            <a:off x="841248" y="4654296"/>
-            <a:ext cx="4855464" cy="594360"/>
-          </a:xfrm>
-          <a:prstGeom prst="rect">
-            <a:avLst/>
-          </a:prstGeom>
-          <a:noFill/>
-          <a:ln/>
-        </p:spPr>
-        <p:txBody>
-          <a:bodyPr wrap="square" rtlCol="0" anchor="ctr"/>
-          <a:lstStyle/>
-          <a:p>
-            <a:pPr indent="0" marL="0">
-              <a:lnSpc>
-                <a:spcPct val="115000"/>
-              </a:lnSpc>
-              <a:buNone/>
-            </a:pPr>
-            <a:r>
-              <a:rPr lang="en-US" sz="1200" b="1" dirty="0">
-                <a:solidFill>
-                  <a:srgbClr val="1B2733"/>
-                </a:solidFill>
-                <a:latin typeface="Calibri" pitchFamily="34" charset="0"/>
-                <a:ea typeface="Calibri" pitchFamily="34" charset="-122"/>
-                <a:cs typeface="Calibri" pitchFamily="34" charset="-120"/>
-              </a:rPr>
-              <a:t>Every disable, reactivation, unregister, and role change is traceable</a:t>
-            </a:r>
-            <a:endParaRPr lang="en-US" sz="1200" dirty="0"/>
-          </a:p>
-        </p:txBody>
-      </p:sp>
-      <p:sp>
-        <p:nvSpPr>
-          <p:cNvPr id="18" name="Text 16"/>
-          <p:cNvSpPr/>
-          <p:nvPr/>
-        </p:nvSpPr>
-        <p:spPr>
-          <a:xfrm>
-            <a:off x="841248" y="5239512"/>
-            <a:ext cx="4855464" cy="594360"/>
-          </a:xfrm>
-          <a:prstGeom prst="rect">
-            <a:avLst/>
-          </a:prstGeom>
-          <a:noFill/>
-          <a:ln/>
-        </p:spPr>
-        <p:txBody>
-          <a:bodyPr wrap="square" rtlCol="0" anchor="ctr"/>
-          <a:lstStyle/>
-          <a:p>
-            <a:pPr indent="0" marL="0">
-              <a:lnSpc>
-                <a:spcPct val="120000"/>
-              </a:lnSpc>
-              <a:buNone/>
-            </a:pPr>
-            <a:r>
-              <a:rPr lang="en-US" sz="1050" dirty="0">
-                <a:solidFill>
-                  <a:srgbClr val="5B6B7A"/>
-                </a:solidFill>
-                <a:latin typeface="Calibri" pitchFamily="34" charset="0"/>
-                <a:ea typeface="Calibri" pitchFamily="34" charset="-122"/>
-                <a:cs typeface="Calibri" pitchFamily="34" charset="-120"/>
-              </a:rPr>
-              <a:t>Actor, timestamp, and — where applicable — a reason. No gaps.</a:t>
-            </a:r>
-            <a:endParaRPr lang="en-US" sz="1050" dirty="0"/>
-          </a:p>
-        </p:txBody>
-      </p:sp>
-      <p:sp>
-        <p:nvSpPr>
-          <p:cNvPr id="19" name="Shape 17"/>
-          <p:cNvSpPr/>
-          <p:nvPr/>
-        </p:nvSpPr>
-        <p:spPr>
-          <a:xfrm>
-            <a:off x="6263640" y="4526280"/>
-            <a:ext cx="5257800" cy="1371600"/>
-          </a:xfrm>
-          <a:prstGeom prst="roundRect">
-            <a:avLst>
-              <a:gd name="adj" fmla="val 5333"/>
-            </a:avLst>
-          </a:prstGeom>
-          <a:solidFill>
-            <a:srgbClr val="FFFFFF"/>
-          </a:solidFill>
-          <a:ln w="12700">
-            <a:solidFill>
-              <a:srgbClr val="EEF3F6"/>
-            </a:solidFill>
-            <a:prstDash val="solid"/>
-          </a:ln>
-        </p:spPr>
-      </p:sp>
-      <p:sp>
-        <p:nvSpPr>
-          <p:cNvPr id="20" name="Text 18"/>
-          <p:cNvSpPr/>
-          <p:nvPr/>
-        </p:nvSpPr>
-        <p:spPr>
-          <a:xfrm>
-            <a:off x="6464808" y="4654296"/>
-            <a:ext cx="4855464" cy="594360"/>
-          </a:xfrm>
-          <a:prstGeom prst="rect">
-            <a:avLst/>
-          </a:prstGeom>
-          <a:noFill/>
-          <a:ln/>
-        </p:spPr>
-        <p:txBody>
-          <a:bodyPr wrap="square" rtlCol="0" anchor="ctr"/>
-          <a:lstStyle/>
-          <a:p>
-            <a:pPr indent="0" marL="0">
-              <a:lnSpc>
-                <a:spcPct val="115000"/>
-              </a:lnSpc>
-              <a:buNone/>
-            </a:pPr>
-            <a:r>
-              <a:rPr lang="en-US" sz="1200" b="1" dirty="0">
-                <a:solidFill>
-                  <a:srgbClr val="1B2733"/>
-                </a:solidFill>
-                <a:latin typeface="Calibri" pitchFamily="34" charset="0"/>
-                <a:ea typeface="Calibri" pitchFamily="34" charset="-122"/>
-                <a:cs typeface="Calibri" pitchFamily="34" charset="-120"/>
-              </a:rPr>
-              <a:t>No record is ever physically deleted</a:t>
-            </a:r>
-            <a:endParaRPr lang="en-US" sz="1200" dirty="0"/>
-          </a:p>
-        </p:txBody>
-      </p:sp>
-      <p:sp>
-        <p:nvSpPr>
-          <p:cNvPr id="21" name="Text 19"/>
-          <p:cNvSpPr/>
-          <p:nvPr/>
-        </p:nvSpPr>
-        <p:spPr>
-          <a:xfrm>
-            <a:off x="6464808" y="5239512"/>
-            <a:ext cx="4855464" cy="594360"/>
-          </a:xfrm>
-          <a:prstGeom prst="rect">
-            <a:avLst/>
-          </a:prstGeom>
-          <a:noFill/>
-          <a:ln/>
-        </p:spPr>
-        <p:txBody>
-          <a:bodyPr wrap="square" rtlCol="0" anchor="ctr"/>
-          <a:lstStyle/>
-          <a:p>
-            <a:pPr indent="0" marL="0">
-              <a:lnSpc>
-                <a:spcPct val="120000"/>
-              </a:lnSpc>
-              <a:buNone/>
-            </a:pPr>
-            <a:r>
-              <a:rPr lang="en-US" sz="1050" dirty="0">
-                <a:solidFill>
-                  <a:srgbClr val="5B6B7A"/>
-                </a:solidFill>
-                <a:latin typeface="Calibri" pitchFamily="34" charset="0"/>
-                <a:ea typeface="Calibri" pitchFamily="34" charset="-122"/>
-                <a:cs typeface="Calibri" pitchFamily="34" charset="-120"/>
-              </a:rPr>
-              <a:t>A uniform soft-delete pattern applies across users, hospitals, bookings, and credentials.</a:t>
-            </a:r>
-            <a:endParaRPr lang="en-US" sz="1050" dirty="0"/>
-          </a:p>
-        </p:txBody>
-      </p:sp>
-      <p:sp>
-        <p:nvSpPr>
-          <p:cNvPr id="22" name="Text 20"/>
+          <a:effectLst>
+            <a:outerShdw sx="100000" sy="100000" kx="0" ky="0" algn="bl" rotWithShape="0" blurRad="76200" dist="25400" dir="5400000">
+              <a:srgbClr val="5B6B7A">
+                <a:alpha val="25000"/>
+              </a:srgbClr>
+            </a:outerShdw>
+          </a:effectLst>
+        </p:spPr>
+      </p:sp>
+      <p:pic>
+        <p:nvPicPr>
+          <p:cNvPr id="15" name="Image 3" descr="/tmp/build/imgs_v2/04-user-profile.png">    </p:cNvPr>
+          <p:cNvPicPr>
+            <a:picLocks noChangeAspect="1"/>
+          </p:cNvPicPr>
+          <p:nvPr/>
+        </p:nvPicPr>
+        <p:blipFill>
+          <a:blip r:embed="rId4"/>
+          <a:srcRect l="0" r="0" t="0" b="0"/>
+          <a:stretch/>
+        </p:blipFill>
+        <p:spPr>
+          <a:xfrm>
+            <a:off x="6217920" y="4270248"/>
+            <a:ext cx="5349240" cy="2130552"/>
+          </a:xfrm>
+          <a:prstGeom prst="rect">
+            <a:avLst/>
+          </a:prstGeom>
+        </p:spPr>
+      </p:pic>
+      <p:sp>
+        <p:nvSpPr>
+          <p:cNvPr id="16" name="Text 10"/>
           <p:cNvSpPr/>
           <p:nvPr/>
         </p:nvSpPr>
